--- a/demo-slides.pptx
+++ b/demo-slides.pptx
@@ -1,119 +1,912 @@
 
 <file path=ppt/presentation.xml><?xml version="1.0" encoding="utf-8"?>
-<p:presentation xmlns:a="http://schemas.openxmlformats.org/drawingml/2006/main" xmlns:r="http://schemas.openxmlformats.org/officeDocument/2006/relationships" xmlns:p="http://schemas.openxmlformats.org/presentationml/2006/main" saveSubsetFonts="1" autoCompressPictures="0">
+<p:presentation xmlns:p="http://schemas.openxmlformats.org/presentationml/2006/main">
   <p:sldMasterIdLst>
-    <p:sldMasterId id="2147483648" r:id="rId1"/>
+    <p:sldMasterId xmlns:r="http://schemas.openxmlformats.org/officeDocument/2006/relationships" id="2147483648" r:id="R739cd3a877aa43c1"/>
   </p:sldMasterIdLst>
+  <p:notesMasterIdLst>
+    <p:notesMasterId xmlns:r="http://schemas.openxmlformats.org/officeDocument/2006/relationships" r:id="Rb3b8c89a47f64938"/>
+  </p:notesMasterIdLst>
   <p:sldIdLst>
-    <p:sldId id="256" r:id="rId7"/>
-    <p:sldId id="257" r:id="rId8"/>
-    <p:sldId id="258" r:id="rId9"/>
-    <p:sldId id="259" r:id="rId10"/>
-    <p:sldId id="260" r:id="rId11"/>
-    <p:sldId id="261" r:id="rId12"/>
+    <p:sldId xmlns:r="http://schemas.openxmlformats.org/officeDocument/2006/relationships" id="256" r:id="Rfadf811362e64855"/>
+    <p:sldId xmlns:r="http://schemas.openxmlformats.org/officeDocument/2006/relationships" id="257" r:id="R496a67a49de245de"/>
+    <p:sldId xmlns:r="http://schemas.openxmlformats.org/officeDocument/2006/relationships" id="258" r:id="Rf60527cc992b42b7"/>
+    <p:sldId xmlns:r="http://schemas.openxmlformats.org/officeDocument/2006/relationships" id="259" r:id="R91ad6bc80bf74986"/>
+    <p:sldId xmlns:r="http://schemas.openxmlformats.org/officeDocument/2006/relationships" id="260" r:id="R56e25ddea1e740d0"/>
+    <p:sldId xmlns:r="http://schemas.openxmlformats.org/officeDocument/2006/relationships" id="261" r:id="R1fd969b73b04473a"/>
   </p:sldIdLst>
-  <p:sldSz cx="9144000" cy="5143500" type="screen4x3"/>
+  <p:sldSz cx="9144000" cy="5143500"/>
   <p:notesSz cx="6858000" cy="9144000"/>
-  <p:defaultTextStyle>
-    <a:defPPr>
-      <a:defRPr lang="en-US"/>
-    </a:defPPr>
-    <a:lvl1pPr marL="0" algn="l" defTabSz="457200" rtl="0" eaLnBrk="1" latinLnBrk="0" hangingPunct="1">
-      <a:defRPr sz="1800" kern="1200">
-        <a:solidFill>
-          <a:schemeClr val="tx1"/>
-        </a:solidFill>
-        <a:latin typeface="+mn-lt"/>
-        <a:ea typeface="+mn-ea"/>
-        <a:cs typeface="+mn-cs"/>
-      </a:defRPr>
-    </a:lvl1pPr>
-    <a:lvl2pPr marL="457200" algn="l" defTabSz="457200" rtl="0" eaLnBrk="1" latinLnBrk="0" hangingPunct="1">
-      <a:defRPr sz="1800" kern="1200">
-        <a:solidFill>
-          <a:schemeClr val="tx1"/>
-        </a:solidFill>
-        <a:latin typeface="+mn-lt"/>
-        <a:ea typeface="+mn-ea"/>
-        <a:cs typeface="+mn-cs"/>
-      </a:defRPr>
-    </a:lvl2pPr>
-    <a:lvl3pPr marL="914400" algn="l" defTabSz="457200" rtl="0" eaLnBrk="1" latinLnBrk="0" hangingPunct="1">
-      <a:defRPr sz="1800" kern="1200">
-        <a:solidFill>
-          <a:schemeClr val="tx1"/>
-        </a:solidFill>
-        <a:latin typeface="+mn-lt"/>
-        <a:ea typeface="+mn-ea"/>
-        <a:cs typeface="+mn-cs"/>
-      </a:defRPr>
-    </a:lvl3pPr>
-    <a:lvl4pPr marL="1371600" algn="l" defTabSz="457200" rtl="0" eaLnBrk="1" latinLnBrk="0" hangingPunct="1">
-      <a:defRPr sz="1800" kern="1200">
-        <a:solidFill>
-          <a:schemeClr val="tx1"/>
-        </a:solidFill>
-        <a:latin typeface="+mn-lt"/>
-        <a:ea typeface="+mn-ea"/>
-        <a:cs typeface="+mn-cs"/>
-      </a:defRPr>
-    </a:lvl4pPr>
-    <a:lvl5pPr marL="1828800" algn="l" defTabSz="457200" rtl="0" eaLnBrk="1" latinLnBrk="0" hangingPunct="1">
-      <a:defRPr sz="1800" kern="1200">
-        <a:solidFill>
-          <a:schemeClr val="tx1"/>
-        </a:solidFill>
-        <a:latin typeface="+mn-lt"/>
-        <a:ea typeface="+mn-ea"/>
-        <a:cs typeface="+mn-cs"/>
-      </a:defRPr>
-    </a:lvl5pPr>
-    <a:lvl6pPr marL="2286000" algn="l" defTabSz="457200" rtl="0" eaLnBrk="1" latinLnBrk="0" hangingPunct="1">
-      <a:defRPr sz="1800" kern="1200">
-        <a:solidFill>
-          <a:schemeClr val="tx1"/>
-        </a:solidFill>
-        <a:latin typeface="+mn-lt"/>
-        <a:ea typeface="+mn-ea"/>
-        <a:cs typeface="+mn-cs"/>
-      </a:defRPr>
-    </a:lvl6pPr>
-    <a:lvl7pPr marL="2743200" algn="l" defTabSz="457200" rtl="0" eaLnBrk="1" latinLnBrk="0" hangingPunct="1">
-      <a:defRPr sz="1800" kern="1200">
-        <a:solidFill>
-          <a:schemeClr val="tx1"/>
-        </a:solidFill>
-        <a:latin typeface="+mn-lt"/>
-        <a:ea typeface="+mn-ea"/>
-        <a:cs typeface="+mn-cs"/>
-      </a:defRPr>
-    </a:lvl7pPr>
-    <a:lvl8pPr marL="3200400" algn="l" defTabSz="457200" rtl="0" eaLnBrk="1" latinLnBrk="0" hangingPunct="1">
-      <a:defRPr sz="1800" kern="1200">
-        <a:solidFill>
-          <a:schemeClr val="tx1"/>
-        </a:solidFill>
-        <a:latin typeface="+mn-lt"/>
-        <a:ea typeface="+mn-ea"/>
-        <a:cs typeface="+mn-cs"/>
-      </a:defRPr>
-    </a:lvl8pPr>
-    <a:lvl9pPr marL="3657600" algn="l" defTabSz="457200" rtl="0" eaLnBrk="1" latinLnBrk="0" hangingPunct="1">
-      <a:defRPr sz="1800" kern="1200">
-        <a:solidFill>
-          <a:schemeClr val="tx1"/>
-        </a:solidFill>
-        <a:latin typeface="+mn-lt"/>
-        <a:ea typeface="+mn-ea"/>
-        <a:cs typeface="+mn-cs"/>
-      </a:defRPr>
-    </a:lvl9pPr>
-  </p:defaultTextStyle>
 </p:presentation>
 </file>
 
+<file path=ppt/notesMasters/notesMaster1.xml><?xml version="1.0" encoding="utf-8"?>
+<p:notesMaster xmlns:p="http://schemas.openxmlformats.org/presentationml/2006/main">
+  <p:cSld>
+    <p:bg>
+      <p:bgRef idx="1001">
+        <a:schemeClr xmlns:a="http://schemas.openxmlformats.org/drawingml/2006/main" val="bg1"/>
+      </p:bgRef>
+    </p:bg>
+    <p:spTree>
+      <p:nvGrpSpPr>
+        <p:cNvPr id="1" name=""/>
+        <p:cNvGrpSpPr/>
+        <p:nvPr/>
+      </p:nvGrpSpPr>
+      <p:grpSpPr>
+        <a:xfrm xmlns:a="http://schemas.openxmlformats.org/drawingml/2006/main"/>
+      </p:grpSpPr>
+      <p:sp>
+        <p:nvSpPr>
+          <p:cNvPr id="2" name="Header Placeholder"/>
+          <p:cNvSpPr/>
+          <p:nvPr>
+            <p:ph type="hdr" sz="quarter"/>
+          </p:nvPr>
+        </p:nvSpPr>
+        <p:spPr>
+          <a:prstGeom xmlns:a="http://schemas.openxmlformats.org/drawingml/2006/main" prst="rect">
+            <a:avLst/>
+          </a:prstGeom>
+        </p:spPr>
+        <p:txBody>
+          <a:bodyPr xmlns:a="http://schemas.openxmlformats.org/drawingml/2006/main"/>
+          <a:lstStyle xmlns:a="http://schemas.openxmlformats.org/drawingml/2006/main"/>
+          <a:p xmlns:a="http://schemas.openxmlformats.org/drawingml/2006/main"/>
+        </p:txBody>
+      </p:sp>
+      <p:sp>
+        <p:nvSpPr>
+          <p:cNvPr id="3" name="Date Placeholder"/>
+          <p:cNvSpPr/>
+          <p:nvPr>
+            <p:ph type="dt" sz="quarter" idx="1"/>
+          </p:nvPr>
+        </p:nvSpPr>
+        <p:spPr>
+          <a:prstGeom xmlns:a="http://schemas.openxmlformats.org/drawingml/2006/main" prst="rect">
+            <a:avLst/>
+          </a:prstGeom>
+        </p:spPr>
+        <p:txBody>
+          <a:bodyPr xmlns:a="http://schemas.openxmlformats.org/drawingml/2006/main"/>
+          <a:lstStyle xmlns:a="http://schemas.openxmlformats.org/drawingml/2006/main"/>
+          <a:p xmlns:a="http://schemas.openxmlformats.org/drawingml/2006/main"/>
+        </p:txBody>
+      </p:sp>
+      <p:sp>
+        <p:nvSpPr>
+          <p:cNvPr id="4" name="Slide Image Placeholder"/>
+          <p:cNvSpPr/>
+          <p:nvPr>
+            <p:ph type="sldImg" idx="2"/>
+          </p:nvPr>
+        </p:nvSpPr>
+        <p:spPr>
+          <a:prstGeom xmlns:a="http://schemas.openxmlformats.org/drawingml/2006/main" prst="rect">
+            <a:avLst/>
+          </a:prstGeom>
+        </p:spPr>
+        <p:txBody>
+          <a:bodyPr xmlns:a="http://schemas.openxmlformats.org/drawingml/2006/main"/>
+          <a:lstStyle xmlns:a="http://schemas.openxmlformats.org/drawingml/2006/main"/>
+          <a:p xmlns:a="http://schemas.openxmlformats.org/drawingml/2006/main"/>
+        </p:txBody>
+      </p:sp>
+      <p:sp>
+        <p:nvSpPr>
+          <p:cNvPr id="5" name="Notes Placeholder"/>
+          <p:cNvSpPr/>
+          <p:nvPr>
+            <p:ph type="body" sz="quarter" idx="3"/>
+          </p:nvPr>
+        </p:nvSpPr>
+        <p:spPr>
+          <a:prstGeom xmlns:a="http://schemas.openxmlformats.org/drawingml/2006/main" prst="rect">
+            <a:avLst/>
+          </a:prstGeom>
+        </p:spPr>
+        <p:txBody>
+          <a:bodyPr xmlns:a="http://schemas.openxmlformats.org/drawingml/2006/main"/>
+          <a:lstStyle xmlns:a="http://schemas.openxmlformats.org/drawingml/2006/main"/>
+          <a:p xmlns:a="http://schemas.openxmlformats.org/drawingml/2006/main"/>
+        </p:txBody>
+      </p:sp>
+      <p:sp>
+        <p:nvSpPr>
+          <p:cNvPr id="6" name="Footer Placeholder"/>
+          <p:cNvSpPr/>
+          <p:nvPr>
+            <p:ph type="ftr" sz="quarter" idx="4"/>
+          </p:nvPr>
+        </p:nvSpPr>
+        <p:spPr>
+          <a:prstGeom xmlns:a="http://schemas.openxmlformats.org/drawingml/2006/main" prst="rect">
+            <a:avLst/>
+          </a:prstGeom>
+        </p:spPr>
+        <p:txBody>
+          <a:bodyPr xmlns:a="http://schemas.openxmlformats.org/drawingml/2006/main"/>
+          <a:lstStyle xmlns:a="http://schemas.openxmlformats.org/drawingml/2006/main"/>
+          <a:p xmlns:a="http://schemas.openxmlformats.org/drawingml/2006/main"/>
+        </p:txBody>
+      </p:sp>
+      <p:sp>
+        <p:nvSpPr>
+          <p:cNvPr id="7" name="Slide Number Placeholder"/>
+          <p:cNvSpPr/>
+          <p:nvPr>
+            <p:ph type="sldNum" sz="quarter" idx="5"/>
+          </p:nvPr>
+        </p:nvSpPr>
+        <p:spPr>
+          <a:prstGeom xmlns:a="http://schemas.openxmlformats.org/drawingml/2006/main" prst="rect">
+            <a:avLst/>
+          </a:prstGeom>
+        </p:spPr>
+        <p:txBody>
+          <a:bodyPr xmlns:a="http://schemas.openxmlformats.org/drawingml/2006/main"/>
+          <a:lstStyle xmlns:a="http://schemas.openxmlformats.org/drawingml/2006/main"/>
+          <a:p xmlns:a="http://schemas.openxmlformats.org/drawingml/2006/main"/>
+        </p:txBody>
+      </p:sp>
+    </p:spTree>
+  </p:cSld>
+  <p:clrMap bg1="lt1" tx1="dk1" bg2="lt2" tx2="dk2" accent1="accent1" accent2="accent2" accent3="accent3" accent4="accent4" accent5="accent5" accent6="accent6" hlink="hlink" folHlink="folHlink"/>
+  <p:notesStyle>
+    <a:lvl1pPr xmlns:a="http://schemas.openxmlformats.org/drawingml/2006/main" marL="0" algn="l" defTabSz="914400" rtl="0" eaLnBrk="1" latinLnBrk="0" hangingPunct="1">
+      <a:defRPr sz="1200" kern="1200"/>
+    </a:lvl1pPr>
+  </p:notesStyle>
+</p:notesMaster>
+</file>
+
+<file path=ppt/notesMasters/theme/theme3.xml><?xml version="1.0" encoding="utf-8"?>
+<a:theme xmlns:a="http://schemas.openxmlformats.org/drawingml/2006/main" name="Office Theme">
+  <a:themeElements>
+    <a:clrScheme name="Office">
+      <a:dk1>
+        <a:sysClr val="windowText" lastClr="000000"/>
+      </a:dk1>
+      <a:lt1>
+        <a:sysClr val="window" lastClr="FFFFFF"/>
+      </a:lt1>
+      <a:dk2>
+        <a:srgbClr val="1F497D"/>
+      </a:dk2>
+      <a:lt2>
+        <a:srgbClr val="EEECE1"/>
+      </a:lt2>
+      <a:accent1>
+        <a:srgbClr val="4F81BD"/>
+      </a:accent1>
+      <a:accent2>
+        <a:srgbClr val="C0504D"/>
+      </a:accent2>
+      <a:accent3>
+        <a:srgbClr val="9BBB59"/>
+      </a:accent3>
+      <a:accent4>
+        <a:srgbClr val="8064A2"/>
+      </a:accent4>
+      <a:accent5>
+        <a:srgbClr val="4BACC6"/>
+      </a:accent5>
+      <a:accent6>
+        <a:srgbClr val="F79646"/>
+      </a:accent6>
+      <a:hlink>
+        <a:srgbClr val="0000FF"/>
+      </a:hlink>
+      <a:folHlink>
+        <a:srgbClr val="800080"/>
+      </a:folHlink>
+    </a:clrScheme>
+    <a:fontScheme name="Office">
+      <a:majorFont>
+        <a:latin typeface="Calibri"/>
+        <a:ea typeface=""/>
+        <a:cs typeface=""/>
+        <a:font script="Jpan" typeface="ＭＳ Ｐゴシック"/>
+        <a:font script="Hang" typeface="맑은 고딕"/>
+        <a:font script="Hans" typeface="宋体"/>
+        <a:font script="Hant" typeface="新細明體"/>
+        <a:font script="Arab" typeface="Times New Roman"/>
+        <a:font script="Hebr" typeface="Times New Roman"/>
+        <a:font script="Thai" typeface="Angsana New"/>
+        <a:font script="Ethi" typeface="Nyala"/>
+        <a:font script="Beng" typeface="Vrinda"/>
+        <a:font script="Gujr" typeface="Shruti"/>
+        <a:font script="Khmr" typeface="MoolBoran"/>
+        <a:font script="Knda" typeface="Tunga"/>
+        <a:font script="Guru" typeface="Raavi"/>
+        <a:font script="Cans" typeface="Euphemia"/>
+        <a:font script="Cher" typeface="Plantagenet Cherokee"/>
+        <a:font script="Yiii" typeface="Microsoft Yi Baiti"/>
+        <a:font script="Tibt" typeface="Microsoft Himalaya"/>
+        <a:font script="Thaa" typeface="MV Boli"/>
+        <a:font script="Deva" typeface="Mangal"/>
+        <a:font script="Telu" typeface="Gautami"/>
+        <a:font script="Taml" typeface="Latha"/>
+        <a:font script="Syrc" typeface="Estrangelo Edessa"/>
+        <a:font script="Orya" typeface="Kalinga"/>
+        <a:font script="Mlym" typeface="Kartika"/>
+        <a:font script="Laoo" typeface="DokChampa"/>
+        <a:font script="Sinh" typeface="Iskoola Pota"/>
+        <a:font script="Mong" typeface="Mongolian Baiti"/>
+        <a:font script="Viet" typeface="Times New Roman"/>
+        <a:font script="Uigh" typeface="Microsoft Uighur"/>
+        <a:font script="Geor" typeface="Sylfaen"/>
+      </a:majorFont>
+      <a:minorFont>
+        <a:latin typeface="Calibri"/>
+        <a:ea typeface=""/>
+        <a:cs typeface=""/>
+        <a:font script="Jpan" typeface="ＭＳ Ｐゴシック"/>
+        <a:font script="Hang" typeface="맑은 고딕"/>
+        <a:font script="Hans" typeface="宋体"/>
+        <a:font script="Hant" typeface="新細明體"/>
+        <a:font script="Arab" typeface="Arial"/>
+        <a:font script="Hebr" typeface="Arial"/>
+        <a:font script="Thai" typeface="Cordia New"/>
+        <a:font script="Ethi" typeface="Nyala"/>
+        <a:font script="Beng" typeface="Vrinda"/>
+        <a:font script="Gujr" typeface="Shruti"/>
+        <a:font script="Khmr" typeface="DaunPenh"/>
+        <a:font script="Knda" typeface="Tunga"/>
+        <a:font script="Guru" typeface="Raavi"/>
+        <a:font script="Cans" typeface="Euphemia"/>
+        <a:font script="Cher" typeface="Plantagenet Cherokee"/>
+        <a:font script="Yiii" typeface="Microsoft Yi Baiti"/>
+        <a:font script="Tibt" typeface="Microsoft Himalaya"/>
+        <a:font script="Thaa" typeface="MV Boli"/>
+        <a:font script="Deva" typeface="Mangal"/>
+        <a:font script="Telu" typeface="Gautami"/>
+        <a:font script="Taml" typeface="Latha"/>
+        <a:font script="Syrc" typeface="Estrangelo Edessa"/>
+        <a:font script="Orya" typeface="Kalinga"/>
+        <a:font script="Mlym" typeface="Kartika"/>
+        <a:font script="Laoo" typeface="DokChampa"/>
+        <a:font script="Sinh" typeface="Iskoola Pota"/>
+        <a:font script="Mong" typeface="Mongolian Baiti"/>
+        <a:font script="Viet" typeface="Arial"/>
+        <a:font script="Uigh" typeface="Microsoft Uighur"/>
+        <a:font script="Geor" typeface="Sylfaen"/>
+      </a:minorFont>
+    </a:fontScheme>
+    <a:fmtScheme name="Office">
+      <a:fillStyleLst>
+        <a:solidFill>
+          <a:schemeClr val="phClr"/>
+        </a:solidFill>
+        <a:gradFill rotWithShape="1">
+          <a:gsLst>
+            <a:gs pos="0">
+              <a:schemeClr val="phClr">
+                <a:tint val="50000"/>
+                <a:satMod val="300000"/>
+              </a:schemeClr>
+            </a:gs>
+            <a:gs pos="35000">
+              <a:schemeClr val="phClr">
+                <a:tint val="37000"/>
+                <a:satMod val="300000"/>
+              </a:schemeClr>
+            </a:gs>
+            <a:gs pos="100000">
+              <a:schemeClr val="phClr">
+                <a:tint val="15000"/>
+                <a:satMod val="350000"/>
+              </a:schemeClr>
+            </a:gs>
+          </a:gsLst>
+          <a:lin ang="16200000" scaled="1"/>
+        </a:gradFill>
+        <a:gradFill rotWithShape="1">
+          <a:gsLst>
+            <a:gs pos="0">
+              <a:schemeClr val="phClr">
+                <a:tint val="100000"/>
+                <a:shade val="100000"/>
+                <a:satMod val="130000"/>
+              </a:schemeClr>
+            </a:gs>
+            <a:gs pos="100000">
+              <a:schemeClr val="phClr">
+                <a:tint val="50000"/>
+                <a:shade val="100000"/>
+                <a:satMod val="350000"/>
+              </a:schemeClr>
+            </a:gs>
+          </a:gsLst>
+          <a:lin ang="16200000" scaled="0"/>
+        </a:gradFill>
+      </a:fillStyleLst>
+      <a:lnStyleLst>
+        <a:ln w="9525">
+          <a:solidFill>
+            <a:schemeClr val="phClr">
+              <a:shade val="95000"/>
+              <a:satMod val="105000"/>
+            </a:schemeClr>
+          </a:solidFill>
+          <a:prstDash val="solid"/>
+        </a:ln>
+        <a:ln w="25400">
+          <a:solidFill>
+            <a:schemeClr val="phClr"/>
+          </a:solidFill>
+          <a:prstDash val="solid"/>
+        </a:ln>
+        <a:ln w="38100">
+          <a:solidFill>
+            <a:schemeClr val="phClr"/>
+          </a:solidFill>
+          <a:prstDash val="solid"/>
+        </a:ln>
+      </a:lnStyleLst>
+      <a:effectStyleLst>
+        <a:effectStyle>
+          <a:effectLst>
+            <a:outerShdw blurRad="40000" dist="20000" dir="5400000" rotWithShape="0">
+              <a:srgbClr val="000000">
+                <a:alpha val="38000"/>
+              </a:srgbClr>
+            </a:outerShdw>
+          </a:effectLst>
+        </a:effectStyle>
+        <a:effectStyle>
+          <a:effectLst>
+            <a:outerShdw blurRad="40000" dist="23000" dir="5400000" rotWithShape="0">
+              <a:srgbClr val="000000">
+                <a:alpha val="35000"/>
+              </a:srgbClr>
+            </a:outerShdw>
+          </a:effectLst>
+        </a:effectStyle>
+        <a:effectStyle>
+          <a:effectLst>
+            <a:outerShdw blurRad="40000" dist="23000" dir="5400000" rotWithShape="0">
+              <a:srgbClr val="000000">
+                <a:alpha val="35000"/>
+              </a:srgbClr>
+            </a:outerShdw>
+          </a:effectLst>
+        </a:effectStyle>
+      </a:effectStyleLst>
+      <a:bgFillStyleLst>
+        <a:solidFill>
+          <a:schemeClr val="phClr"/>
+        </a:solidFill>
+        <a:gradFill rotWithShape="1">
+          <a:gsLst>
+            <a:gs pos="0">
+              <a:schemeClr val="phClr">
+                <a:tint val="40000"/>
+                <a:satMod val="350000"/>
+              </a:schemeClr>
+            </a:gs>
+            <a:gs pos="40000">
+              <a:schemeClr val="phClr">
+                <a:tint val="45000"/>
+                <a:shade val="99000"/>
+                <a:satMod val="350000"/>
+              </a:schemeClr>
+            </a:gs>
+            <a:gs pos="100000">
+              <a:schemeClr val="phClr">
+                <a:shade val="20000"/>
+                <a:satMod val="255000"/>
+              </a:schemeClr>
+            </a:gs>
+          </a:gsLst>
+          <a:path path="circle">
+            <a:fillToRect l="50000" t="-80000" r="50000" b="180000"/>
+          </a:path>
+        </a:gradFill>
+        <a:gradFill rotWithShape="1">
+          <a:gsLst>
+            <a:gs pos="0">
+              <a:schemeClr val="phClr">
+                <a:tint val="80000"/>
+                <a:satMod val="300000"/>
+              </a:schemeClr>
+            </a:gs>
+            <a:gs pos="100000">
+              <a:schemeClr val="phClr">
+                <a:shade val="30000"/>
+                <a:satMod val="200000"/>
+              </a:schemeClr>
+            </a:gs>
+          </a:gsLst>
+          <a:path path="circle">
+            <a:fillToRect l="50000" t="50000" r="50000" b="50000"/>
+          </a:path>
+        </a:gradFill>
+      </a:bgFillStyleLst>
+    </a:fmtScheme>
+  </a:themeElements>
+</a:theme>
+</file>
+
+<file path=ppt/notesSlides/notesSlide1.xml><?xml version="1.0" encoding="utf-8"?>
+<p:notes xmlns:p="http://schemas.openxmlformats.org/presentationml/2006/main">
+  <p:cSld>
+    <p:spTree>
+      <p:nvGrpSpPr>
+        <p:cNvPr id="1" name=""/>
+        <p:cNvGrpSpPr/>
+        <p:nvPr/>
+      </p:nvGrpSpPr>
+      <p:grpSpPr>
+        <a:xfrm xmlns:a="http://schemas.openxmlformats.org/drawingml/2006/main"/>
+      </p:grpSpPr>
+      <p:sp>
+        <p:nvSpPr>
+          <p:cNvPr id="2" name="Slide Image Placeholder 1"/>
+          <p:cNvSpPr>
+            <a:spLocks xmlns:a="http://schemas.openxmlformats.org/drawingml/2006/main" noGrp="1"/>
+          </p:cNvSpPr>
+          <p:nvPr>
+            <p:ph type="sldImg" idx="0"/>
+          </p:nvPr>
+        </p:nvSpPr>
+        <p:spPr/>
+      </p:sp>
+      <p:sp>
+        <p:nvSpPr>
+          <p:cNvPr id="3" name="Notes Placeholder 2"/>
+          <p:cNvSpPr>
+            <a:spLocks xmlns:a="http://schemas.openxmlformats.org/drawingml/2006/main" noGrp="1"/>
+          </p:cNvSpPr>
+          <p:nvPr>
+            <p:ph type="body" idx="1"/>
+          </p:nvPr>
+        </p:nvSpPr>
+        <p:spPr/>
+        <p:txBody>
+          <a:bodyPr xmlns:a="http://schemas.openxmlformats.org/drawingml/2006/main"/>
+          <a:lstStyle xmlns:a="http://schemas.openxmlformats.org/drawingml/2006/main"/>
+          <a:p xmlns:a="http://schemas.openxmlformats.org/drawingml/2006/main">
+            <a:r>
+              <a:t>[Sources]</a:t>
+            </a:r>
+          </a:p>
+          <a:p xmlns:a="http://schemas.openxmlformats.org/drawingml/2006/main">
+            <a:r>
+              <a:t>spec.md §1–§2</a:t>
+            </a:r>
+          </a:p>
+          <a:p xmlns:a="http://schemas.openxmlformats.org/drawingml/2006/main">
+            <a:r>
+              <a:t>evidence/mining-log.md</a:t>
+            </a:r>
+          </a:p>
+        </p:txBody>
+      </p:sp>
+      <p:sp>
+        <p:nvSpPr>
+          <p:cNvPr id="4" name="Slide Number Placeholder 3"/>
+          <p:cNvSpPr>
+            <a:spLocks xmlns:a="http://schemas.openxmlformats.org/drawingml/2006/main" noGrp="1"/>
+          </p:cNvSpPr>
+          <p:nvPr>
+            <p:ph type="sldNum" idx="5"/>
+          </p:nvPr>
+        </p:nvSpPr>
+        <p:spPr/>
+        <p:txBody>
+          <a:bodyPr xmlns:a="http://schemas.openxmlformats.org/drawingml/2006/main"/>
+          <a:lstStyle xmlns:a="http://schemas.openxmlformats.org/drawingml/2006/main"/>
+          <a:p xmlns:a="http://schemas.openxmlformats.org/drawingml/2006/main"/>
+        </p:txBody>
+      </p:sp>
+    </p:spTree>
+  </p:cSld>
+  <p:clrMapOvr>
+    <a:masterClrMapping xmlns:a="http://schemas.openxmlformats.org/drawingml/2006/main"/>
+  </p:clrMapOvr>
+</p:notes>
+</file>
+
+<file path=ppt/notesSlides/notesSlide2.xml><?xml version="1.0" encoding="utf-8"?>
+<p:notes xmlns:p="http://schemas.openxmlformats.org/presentationml/2006/main">
+  <p:cSld>
+    <p:spTree>
+      <p:nvGrpSpPr>
+        <p:cNvPr id="1" name=""/>
+        <p:cNvGrpSpPr/>
+        <p:nvPr/>
+      </p:nvGrpSpPr>
+      <p:grpSpPr>
+        <a:xfrm xmlns:a="http://schemas.openxmlformats.org/drawingml/2006/main"/>
+      </p:grpSpPr>
+      <p:sp>
+        <p:nvSpPr>
+          <p:cNvPr id="2" name="Slide Image Placeholder 1"/>
+          <p:cNvSpPr>
+            <a:spLocks xmlns:a="http://schemas.openxmlformats.org/drawingml/2006/main" noGrp="1"/>
+          </p:cNvSpPr>
+          <p:nvPr>
+            <p:ph type="sldImg" idx="0"/>
+          </p:nvPr>
+        </p:nvSpPr>
+        <p:spPr/>
+      </p:sp>
+      <p:sp>
+        <p:nvSpPr>
+          <p:cNvPr id="3" name="Notes Placeholder 2"/>
+          <p:cNvSpPr>
+            <a:spLocks xmlns:a="http://schemas.openxmlformats.org/drawingml/2006/main" noGrp="1"/>
+          </p:cNvSpPr>
+          <p:nvPr>
+            <p:ph type="body" idx="1"/>
+          </p:nvPr>
+        </p:nvSpPr>
+        <p:spPr/>
+        <p:txBody>
+          <a:bodyPr xmlns:a="http://schemas.openxmlformats.org/drawingml/2006/main"/>
+          <a:lstStyle xmlns:a="http://schemas.openxmlformats.org/drawingml/2006/main"/>
+          <a:p xmlns:a="http://schemas.openxmlformats.org/drawingml/2006/main">
+            <a:r>
+              <a:t>[Sources]</a:t>
+            </a:r>
+          </a:p>
+          <a:p xmlns:a="http://schemas.openxmlformats.org/drawingml/2006/main">
+            <a:r>
+              <a:t>spec.md §2</a:t>
+            </a:r>
+          </a:p>
+          <a:p xmlns:a="http://schemas.openxmlformats.org/drawingml/2006/main">
+            <a:r>
+              <a:t>evidence/mining-log.md</a:t>
+            </a:r>
+          </a:p>
+        </p:txBody>
+      </p:sp>
+      <p:sp>
+        <p:nvSpPr>
+          <p:cNvPr id="4" name="Slide Number Placeholder 3"/>
+          <p:cNvSpPr>
+            <a:spLocks xmlns:a="http://schemas.openxmlformats.org/drawingml/2006/main" noGrp="1"/>
+          </p:cNvSpPr>
+          <p:nvPr>
+            <p:ph type="sldNum" idx="5"/>
+          </p:nvPr>
+        </p:nvSpPr>
+        <p:spPr/>
+        <p:txBody>
+          <a:bodyPr xmlns:a="http://schemas.openxmlformats.org/drawingml/2006/main"/>
+          <a:lstStyle xmlns:a="http://schemas.openxmlformats.org/drawingml/2006/main"/>
+          <a:p xmlns:a="http://schemas.openxmlformats.org/drawingml/2006/main"/>
+        </p:txBody>
+      </p:sp>
+    </p:spTree>
+  </p:cSld>
+  <p:clrMapOvr>
+    <a:masterClrMapping xmlns:a="http://schemas.openxmlformats.org/drawingml/2006/main"/>
+  </p:clrMapOvr>
+</p:notes>
+</file>
+
+<file path=ppt/notesSlides/notesSlide3.xml><?xml version="1.0" encoding="utf-8"?>
+<p:notes xmlns:p="http://schemas.openxmlformats.org/presentationml/2006/main">
+  <p:cSld>
+    <p:spTree>
+      <p:nvGrpSpPr>
+        <p:cNvPr id="1" name=""/>
+        <p:cNvGrpSpPr/>
+        <p:nvPr/>
+      </p:nvGrpSpPr>
+      <p:grpSpPr>
+        <a:xfrm xmlns:a="http://schemas.openxmlformats.org/drawingml/2006/main"/>
+      </p:grpSpPr>
+      <p:sp>
+        <p:nvSpPr>
+          <p:cNvPr id="2" name="Slide Image Placeholder 1"/>
+          <p:cNvSpPr>
+            <a:spLocks xmlns:a="http://schemas.openxmlformats.org/drawingml/2006/main" noGrp="1"/>
+          </p:cNvSpPr>
+          <p:nvPr>
+            <p:ph type="sldImg" idx="0"/>
+          </p:nvPr>
+        </p:nvSpPr>
+        <p:spPr/>
+      </p:sp>
+      <p:sp>
+        <p:nvSpPr>
+          <p:cNvPr id="3" name="Notes Placeholder 2"/>
+          <p:cNvSpPr>
+            <a:spLocks xmlns:a="http://schemas.openxmlformats.org/drawingml/2006/main" noGrp="1"/>
+          </p:cNvSpPr>
+          <p:nvPr>
+            <p:ph type="body" idx="1"/>
+          </p:nvPr>
+        </p:nvSpPr>
+        <p:spPr/>
+        <p:txBody>
+          <a:bodyPr xmlns:a="http://schemas.openxmlformats.org/drawingml/2006/main"/>
+          <a:lstStyle xmlns:a="http://schemas.openxmlformats.org/drawingml/2006/main"/>
+          <a:p xmlns:a="http://schemas.openxmlformats.org/drawingml/2006/main">
+            <a:r>
+              <a:t>[Sources]</a:t>
+            </a:r>
+          </a:p>
+          <a:p xmlns:a="http://schemas.openxmlformats.org/drawingml/2006/main">
+            <a:r>
+              <a:t>spec.md §4–§6</a:t>
+            </a:r>
+          </a:p>
+          <a:p xmlns:a="http://schemas.openxmlformats.org/drawingml/2006/main">
+            <a:r>
+              <a:t>demo-script.md</a:t>
+            </a:r>
+          </a:p>
+        </p:txBody>
+      </p:sp>
+      <p:sp>
+        <p:nvSpPr>
+          <p:cNvPr id="4" name="Slide Number Placeholder 3"/>
+          <p:cNvSpPr>
+            <a:spLocks xmlns:a="http://schemas.openxmlformats.org/drawingml/2006/main" noGrp="1"/>
+          </p:cNvSpPr>
+          <p:nvPr>
+            <p:ph type="sldNum" idx="5"/>
+          </p:nvPr>
+        </p:nvSpPr>
+        <p:spPr/>
+        <p:txBody>
+          <a:bodyPr xmlns:a="http://schemas.openxmlformats.org/drawingml/2006/main"/>
+          <a:lstStyle xmlns:a="http://schemas.openxmlformats.org/drawingml/2006/main"/>
+          <a:p xmlns:a="http://schemas.openxmlformats.org/drawingml/2006/main"/>
+        </p:txBody>
+      </p:sp>
+    </p:spTree>
+  </p:cSld>
+  <p:clrMapOvr>
+    <a:masterClrMapping xmlns:a="http://schemas.openxmlformats.org/drawingml/2006/main"/>
+  </p:clrMapOvr>
+</p:notes>
+</file>
+
+<file path=ppt/notesSlides/notesSlide4.xml><?xml version="1.0" encoding="utf-8"?>
+<p:notes xmlns:p="http://schemas.openxmlformats.org/presentationml/2006/main">
+  <p:cSld>
+    <p:spTree>
+      <p:nvGrpSpPr>
+        <p:cNvPr id="1" name=""/>
+        <p:cNvGrpSpPr/>
+        <p:nvPr/>
+      </p:nvGrpSpPr>
+      <p:grpSpPr>
+        <a:xfrm xmlns:a="http://schemas.openxmlformats.org/drawingml/2006/main"/>
+      </p:grpSpPr>
+      <p:sp>
+        <p:nvSpPr>
+          <p:cNvPr id="2" name="Slide Image Placeholder 1"/>
+          <p:cNvSpPr>
+            <a:spLocks xmlns:a="http://schemas.openxmlformats.org/drawingml/2006/main" noGrp="1"/>
+          </p:cNvSpPr>
+          <p:nvPr>
+            <p:ph type="sldImg" idx="0"/>
+          </p:nvPr>
+        </p:nvSpPr>
+        <p:spPr/>
+      </p:sp>
+      <p:sp>
+        <p:nvSpPr>
+          <p:cNvPr id="3" name="Notes Placeholder 2"/>
+          <p:cNvSpPr>
+            <a:spLocks xmlns:a="http://schemas.openxmlformats.org/drawingml/2006/main" noGrp="1"/>
+          </p:cNvSpPr>
+          <p:nvPr>
+            <p:ph type="body" idx="1"/>
+          </p:nvPr>
+        </p:nvSpPr>
+        <p:spPr/>
+        <p:txBody>
+          <a:bodyPr xmlns:a="http://schemas.openxmlformats.org/drawingml/2006/main"/>
+          <a:lstStyle xmlns:a="http://schemas.openxmlformats.org/drawingml/2006/main"/>
+          <a:p xmlns:a="http://schemas.openxmlformats.org/drawingml/2006/main">
+            <a:r>
+              <a:t>[Sources]</a:t>
+            </a:r>
+          </a:p>
+          <a:p xmlns:a="http://schemas.openxmlformats.org/drawingml/2006/main">
+            <a:r>
+              <a:t>spec.md §7</a:t>
+            </a:r>
+          </a:p>
+          <a:p xmlns:a="http://schemas.openxmlformats.org/drawingml/2006/main">
+            <a:r>
+              <a:t>eval/runs/</a:t>
+            </a:r>
+          </a:p>
+        </p:txBody>
+      </p:sp>
+      <p:sp>
+        <p:nvSpPr>
+          <p:cNvPr id="4" name="Slide Number Placeholder 3"/>
+          <p:cNvSpPr>
+            <a:spLocks xmlns:a="http://schemas.openxmlformats.org/drawingml/2006/main" noGrp="1"/>
+          </p:cNvSpPr>
+          <p:nvPr>
+            <p:ph type="sldNum" idx="5"/>
+          </p:nvPr>
+        </p:nvSpPr>
+        <p:spPr/>
+        <p:txBody>
+          <a:bodyPr xmlns:a="http://schemas.openxmlformats.org/drawingml/2006/main"/>
+          <a:lstStyle xmlns:a="http://schemas.openxmlformats.org/drawingml/2006/main"/>
+          <a:p xmlns:a="http://schemas.openxmlformats.org/drawingml/2006/main"/>
+        </p:txBody>
+      </p:sp>
+    </p:spTree>
+  </p:cSld>
+  <p:clrMapOvr>
+    <a:masterClrMapping xmlns:a="http://schemas.openxmlformats.org/drawingml/2006/main"/>
+  </p:clrMapOvr>
+</p:notes>
+</file>
+
+<file path=ppt/notesSlides/notesSlide5.xml><?xml version="1.0" encoding="utf-8"?>
+<p:notes xmlns:p="http://schemas.openxmlformats.org/presentationml/2006/main">
+  <p:cSld>
+    <p:spTree>
+      <p:nvGrpSpPr>
+        <p:cNvPr id="1" name=""/>
+        <p:cNvGrpSpPr/>
+        <p:nvPr/>
+      </p:nvGrpSpPr>
+      <p:grpSpPr>
+        <a:xfrm xmlns:a="http://schemas.openxmlformats.org/drawingml/2006/main"/>
+      </p:grpSpPr>
+      <p:sp>
+        <p:nvSpPr>
+          <p:cNvPr id="2" name="Slide Image Placeholder 1"/>
+          <p:cNvSpPr>
+            <a:spLocks xmlns:a="http://schemas.openxmlformats.org/drawingml/2006/main" noGrp="1"/>
+          </p:cNvSpPr>
+          <p:nvPr>
+            <p:ph type="sldImg" idx="0"/>
+          </p:nvPr>
+        </p:nvSpPr>
+        <p:spPr/>
+      </p:sp>
+      <p:sp>
+        <p:nvSpPr>
+          <p:cNvPr id="3" name="Notes Placeholder 2"/>
+          <p:cNvSpPr>
+            <a:spLocks xmlns:a="http://schemas.openxmlformats.org/drawingml/2006/main" noGrp="1"/>
+          </p:cNvSpPr>
+          <p:nvPr>
+            <p:ph type="body" idx="1"/>
+          </p:nvPr>
+        </p:nvSpPr>
+        <p:spPr/>
+        <p:txBody>
+          <a:bodyPr xmlns:a="http://schemas.openxmlformats.org/drawingml/2006/main"/>
+          <a:lstStyle xmlns:a="http://schemas.openxmlformats.org/drawingml/2006/main"/>
+          <a:p xmlns:a="http://schemas.openxmlformats.org/drawingml/2006/main">
+            <a:r>
+              <a:t>[Sources]</a:t>
+            </a:r>
+          </a:p>
+          <a:p xmlns:a="http://schemas.openxmlformats.org/drawingml/2006/main">
+            <a:r>
+              <a:t>validation/feedback-log.md</a:t>
+            </a:r>
+          </a:p>
+        </p:txBody>
+      </p:sp>
+      <p:sp>
+        <p:nvSpPr>
+          <p:cNvPr id="4" name="Slide Number Placeholder 3"/>
+          <p:cNvSpPr>
+            <a:spLocks xmlns:a="http://schemas.openxmlformats.org/drawingml/2006/main" noGrp="1"/>
+          </p:cNvSpPr>
+          <p:nvPr>
+            <p:ph type="sldNum" idx="5"/>
+          </p:nvPr>
+        </p:nvSpPr>
+        <p:spPr/>
+        <p:txBody>
+          <a:bodyPr xmlns:a="http://schemas.openxmlformats.org/drawingml/2006/main"/>
+          <a:lstStyle xmlns:a="http://schemas.openxmlformats.org/drawingml/2006/main"/>
+          <a:p xmlns:a="http://schemas.openxmlformats.org/drawingml/2006/main"/>
+        </p:txBody>
+      </p:sp>
+    </p:spTree>
+  </p:cSld>
+  <p:clrMapOvr>
+    <a:masterClrMapping xmlns:a="http://schemas.openxmlformats.org/drawingml/2006/main"/>
+  </p:clrMapOvr>
+</p:notes>
+</file>
+
+<file path=ppt/notesSlides/notesSlide6.xml><?xml version="1.0" encoding="utf-8"?>
+<p:notes xmlns:p="http://schemas.openxmlformats.org/presentationml/2006/main">
+  <p:cSld>
+    <p:spTree>
+      <p:nvGrpSpPr>
+        <p:cNvPr id="1" name=""/>
+        <p:cNvGrpSpPr/>
+        <p:nvPr/>
+      </p:nvGrpSpPr>
+      <p:grpSpPr>
+        <a:xfrm xmlns:a="http://schemas.openxmlformats.org/drawingml/2006/main"/>
+      </p:grpSpPr>
+      <p:sp>
+        <p:nvSpPr>
+          <p:cNvPr id="2" name="Slide Image Placeholder 1"/>
+          <p:cNvSpPr>
+            <a:spLocks xmlns:a="http://schemas.openxmlformats.org/drawingml/2006/main" noGrp="1"/>
+          </p:cNvSpPr>
+          <p:nvPr>
+            <p:ph type="sldImg" idx="0"/>
+          </p:nvPr>
+        </p:nvSpPr>
+        <p:spPr/>
+      </p:sp>
+      <p:sp>
+        <p:nvSpPr>
+          <p:cNvPr id="3" name="Notes Placeholder 2"/>
+          <p:cNvSpPr>
+            <a:spLocks xmlns:a="http://schemas.openxmlformats.org/drawingml/2006/main" noGrp="1"/>
+          </p:cNvSpPr>
+          <p:nvPr>
+            <p:ph type="body" idx="1"/>
+          </p:nvPr>
+        </p:nvSpPr>
+        <p:spPr/>
+        <p:txBody>
+          <a:bodyPr xmlns:a="http://schemas.openxmlformats.org/drawingml/2006/main"/>
+          <a:lstStyle xmlns:a="http://schemas.openxmlformats.org/drawingml/2006/main"/>
+          <a:p xmlns:a="http://schemas.openxmlformats.org/drawingml/2006/main">
+            <a:r>
+              <a:t>[Sources]</a:t>
+            </a:r>
+          </a:p>
+          <a:p xmlns:a="http://schemas.openxmlformats.org/drawingml/2006/main">
+            <a:r>
+              <a:t>validation/feedback-log.md</a:t>
+            </a:r>
+          </a:p>
+          <a:p xmlns:a="http://schemas.openxmlformats.org/drawingml/2006/main">
+            <a:r>
+              <a:t>reflection/can-ma-hv-tran-huy-hoang.md</a:t>
+            </a:r>
+          </a:p>
+        </p:txBody>
+      </p:sp>
+      <p:sp>
+        <p:nvSpPr>
+          <p:cNvPr id="4" name="Slide Number Placeholder 3"/>
+          <p:cNvSpPr>
+            <a:spLocks xmlns:a="http://schemas.openxmlformats.org/drawingml/2006/main" noGrp="1"/>
+          </p:cNvSpPr>
+          <p:nvPr>
+            <p:ph type="sldNum" idx="5"/>
+          </p:nvPr>
+        </p:nvSpPr>
+        <p:spPr/>
+        <p:txBody>
+          <a:bodyPr xmlns:a="http://schemas.openxmlformats.org/drawingml/2006/main"/>
+          <a:lstStyle xmlns:a="http://schemas.openxmlformats.org/drawingml/2006/main"/>
+          <a:p xmlns:a="http://schemas.openxmlformats.org/drawingml/2006/main"/>
+        </p:txBody>
+      </p:sp>
+    </p:spTree>
+  </p:cSld>
+  <p:clrMapOvr>
+    <a:masterClrMapping xmlns:a="http://schemas.openxmlformats.org/drawingml/2006/main"/>
+  </p:clrMapOvr>
+</p:notes>
+</file>
+
 <file path=ppt/slideLayouts/slideLayout1.xml><?xml version="1.0" encoding="utf-8"?>
-<p:sldLayout xmlns:a="http://schemas.openxmlformats.org/drawingml/2006/main" xmlns:r="http://schemas.openxmlformats.org/officeDocument/2006/relationships" xmlns:p="http://schemas.openxmlformats.org/presentationml/2006/main" type="title" preserve="1">
+<p:sldLayout xmlns:p="http://schemas.openxmlformats.org/presentationml/2006/main" type="title" preserve="1">
   <p:cSld name="Title Slide">
     <p:spTree>
       <p:nvGrpSpPr>
@@ -122,60 +915,65 @@
         <p:nvPr/>
       </p:nvGrpSpPr>
       <p:grpSpPr>
-        <a:xfrm>
-          <a:off x="0" y="0"/>
-          <a:ext cx="0" cy="0"/>
-          <a:chOff x="0" y="0"/>
-          <a:chExt cx="0" cy="0"/>
-        </a:xfrm>
+        <a:xfrm xmlns:a="http://schemas.openxmlformats.org/drawingml/2006/main"/>
       </p:grpSpPr>
       <p:sp>
         <p:nvSpPr>
-          <p:cNvPr id="2" name="Title 1"/>
-          <p:cNvSpPr>
-            <a:spLocks noGrp="1"/>
-          </p:cNvSpPr>
-          <p:nvPr>
-            <p:ph type="ctrTitle"/>
-          </p:nvPr>
-        </p:nvSpPr>
-        <p:spPr>
-          <a:xfrm>
+          <p:cNvPr id="2" name="Title 1">
+            <a:extLst xmlns:a="http://schemas.openxmlformats.org/drawingml/2006/main">
+              <a:ext uri="{FF2B5EF4-FFF2-40B4-BE49-F238E27FC236}">
+                <a16:creationId xmlns:a16="http://schemas.microsoft.com/office/drawing/2014/main" id="{3702E378-F67C-4A30-A003-CE4EBD2748C5}"/>
+              </a:ext>
+            </a:extLst>
+          </p:cNvPr>
+          <p:cNvSpPr>
+            <a:spLocks xmlns:a="http://schemas.openxmlformats.org/drawingml/2006/main" noGrp="1"/>
+          </p:cNvSpPr>
+          <p:nvPr>
+            <p:ph type="ctrTitle" idx="0"/>
+          </p:nvPr>
+        </p:nvSpPr>
+        <p:spPr>
+          <a:xfrm xmlns:a="http://schemas.openxmlformats.org/drawingml/2006/main">
             <a:off x="685800" y="2130425"/>
             <a:ext cx="7772400" cy="1470025"/>
           </a:xfrm>
         </p:spPr>
         <p:txBody>
-          <a:bodyPr/>
-          <a:lstStyle/>
-          <a:p>
-            <a:r>
-              <a:rPr lang="en-US" smtClean="0"/>
+          <a:bodyPr xmlns:a="http://schemas.openxmlformats.org/drawingml/2006/main"/>
+          <a:lstStyle xmlns:a="http://schemas.openxmlformats.org/drawingml/2006/main"/>
+          <a:p xmlns:a="http://schemas.openxmlformats.org/drawingml/2006/main">
+            <a:r>
               <a:t>Click to edit Master title style</a:t>
             </a:r>
-            <a:endParaRPr lang="en-US"/>
-          </a:p>
-        </p:txBody>
-      </p:sp>
-      <p:sp>
-        <p:nvSpPr>
-          <p:cNvPr id="3" name="Subtitle 2"/>
-          <p:cNvSpPr>
-            <a:spLocks noGrp="1"/>
+          </a:p>
+        </p:txBody>
+      </p:sp>
+      <p:sp>
+        <p:nvSpPr>
+          <p:cNvPr id="3" name="Subtitle 2">
+            <a:extLst xmlns:a="http://schemas.openxmlformats.org/drawingml/2006/main">
+              <a:ext uri="{FF2B5EF4-FFF2-40B4-BE49-F238E27FC236}">
+                <a16:creationId xmlns:a16="http://schemas.microsoft.com/office/drawing/2014/main" id="{AE714B2D-621E-4148-BDEC-EE1749C201CB}"/>
+              </a:ext>
+            </a:extLst>
+          </p:cNvPr>
+          <p:cNvSpPr>
+            <a:spLocks xmlns:a="http://schemas.openxmlformats.org/drawingml/2006/main" noGrp="1"/>
           </p:cNvSpPr>
           <p:nvPr>
             <p:ph type="subTitle" idx="1"/>
           </p:nvPr>
         </p:nvSpPr>
         <p:spPr>
-          <a:xfrm>
+          <a:xfrm xmlns:a="http://schemas.openxmlformats.org/drawingml/2006/main">
             <a:off x="1371600" y="3886200"/>
             <a:ext cx="6400800" cy="1752600"/>
           </a:xfrm>
         </p:spPr>
         <p:txBody>
-          <a:bodyPr/>
-          <a:lstStyle>
+          <a:bodyPr xmlns:a="http://schemas.openxmlformats.org/drawingml/2006/main"/>
+          <a:lstStyle xmlns:a="http://schemas.openxmlformats.org/drawingml/2006/main">
             <a:lvl1pPr marL="0" indent="0" algn="ctr">
               <a:buNone/>
               <a:defRPr>
@@ -267,95 +1065,97 @@
               </a:defRPr>
             </a:lvl9pPr>
           </a:lstStyle>
-          <a:p>
-            <a:r>
-              <a:rPr lang="en-US" smtClean="0"/>
+          <a:p xmlns:a="http://schemas.openxmlformats.org/drawingml/2006/main">
+            <a:r>
               <a:t>Click to edit Master subtitle style</a:t>
             </a:r>
-            <a:endParaRPr lang="en-US"/>
-          </a:p>
-        </p:txBody>
-      </p:sp>
-      <p:sp>
-        <p:nvSpPr>
-          <p:cNvPr id="4" name="Date Placeholder 3"/>
-          <p:cNvSpPr>
-            <a:spLocks noGrp="1"/>
-          </p:cNvSpPr>
-          <p:nvPr>
-            <p:ph type="dt" sz="half" idx="10"/>
+          </a:p>
+        </p:txBody>
+      </p:sp>
+      <p:sp>
+        <p:nvSpPr>
+          <p:cNvPr id="4" name="Date Placeholder 3">
+            <a:extLst xmlns:a="http://schemas.openxmlformats.org/drawingml/2006/main">
+              <a:ext uri="{FF2B5EF4-FFF2-40B4-BE49-F238E27FC236}">
+                <a16:creationId xmlns:a16="http://schemas.microsoft.com/office/drawing/2014/main" id="{46009748-CE8D-486E-A16A-9F916E70A044}"/>
+              </a:ext>
+            </a:extLst>
+          </p:cNvPr>
+          <p:cNvSpPr>
+            <a:spLocks xmlns:a="http://schemas.openxmlformats.org/drawingml/2006/main" noGrp="1"/>
+          </p:cNvSpPr>
+          <p:nvPr>
+            <p:ph type="dt" idx="10"/>
           </p:nvPr>
         </p:nvSpPr>
         <p:spPr/>
         <p:txBody>
-          <a:bodyPr/>
-          <a:lstStyle/>
-          <a:p>
+          <a:bodyPr xmlns:a="http://schemas.openxmlformats.org/drawingml/2006/main"/>
+          <a:lstStyle xmlns:a="http://schemas.openxmlformats.org/drawingml/2006/main"/>
+          <a:p xmlns:a="http://schemas.openxmlformats.org/drawingml/2006/main">
             <a:fld id="{5BCAD085-E8A6-8845-BD4E-CB4CCA059FC4}" type="datetimeFigureOut">
-              <a:rPr lang="en-US" smtClean="0"/>
               <a:t>1/27/13</a:t>
             </a:fld>
-            <a:endParaRPr lang="en-US"/>
-          </a:p>
-        </p:txBody>
-      </p:sp>
-      <p:sp>
-        <p:nvSpPr>
-          <p:cNvPr id="5" name="Footer Placeholder 4"/>
-          <p:cNvSpPr>
-            <a:spLocks noGrp="1"/>
-          </p:cNvSpPr>
-          <p:nvPr>
-            <p:ph type="ftr" sz="quarter" idx="11"/>
+          </a:p>
+        </p:txBody>
+      </p:sp>
+      <p:sp>
+        <p:nvSpPr>
+          <p:cNvPr id="5" name="Footer Placeholder 4">
+            <a:extLst xmlns:a="http://schemas.openxmlformats.org/drawingml/2006/main">
+              <a:ext uri="{FF2B5EF4-FFF2-40B4-BE49-F238E27FC236}">
+                <a16:creationId xmlns:a16="http://schemas.microsoft.com/office/drawing/2014/main" id="{ACB8FEA1-6F77-442F-8A38-641CE5DE70CC}"/>
+              </a:ext>
+            </a:extLst>
+          </p:cNvPr>
+          <p:cNvSpPr>
+            <a:spLocks xmlns:a="http://schemas.openxmlformats.org/drawingml/2006/main" noGrp="1"/>
+          </p:cNvSpPr>
+          <p:nvPr>
+            <p:ph type="ftr" idx="11"/>
           </p:nvPr>
         </p:nvSpPr>
         <p:spPr/>
         <p:txBody>
-          <a:bodyPr/>
-          <a:lstStyle/>
-          <a:p>
-            <a:endParaRPr lang="en-US"/>
-          </a:p>
-        </p:txBody>
-      </p:sp>
-      <p:sp>
-        <p:nvSpPr>
-          <p:cNvPr id="6" name="Slide Number Placeholder 5"/>
-          <p:cNvSpPr>
-            <a:spLocks noGrp="1"/>
-          </p:cNvSpPr>
-          <p:nvPr>
-            <p:ph type="sldNum" sz="quarter" idx="12"/>
+          <a:bodyPr xmlns:a="http://schemas.openxmlformats.org/drawingml/2006/main"/>
+          <a:lstStyle xmlns:a="http://schemas.openxmlformats.org/drawingml/2006/main"/>
+          <a:p xmlns:a="http://schemas.openxmlformats.org/drawingml/2006/main"/>
+        </p:txBody>
+      </p:sp>
+      <p:sp>
+        <p:nvSpPr>
+          <p:cNvPr id="6" name="Slide Number Placeholder 5">
+            <a:extLst xmlns:a="http://schemas.openxmlformats.org/drawingml/2006/main">
+              <a:ext uri="{FF2B5EF4-FFF2-40B4-BE49-F238E27FC236}">
+                <a16:creationId xmlns:a16="http://schemas.microsoft.com/office/drawing/2014/main" id="{61DD618E-9A74-4938-BC7F-76F605F622F3}"/>
+              </a:ext>
+            </a:extLst>
+          </p:cNvPr>
+          <p:cNvSpPr>
+            <a:spLocks xmlns:a="http://schemas.openxmlformats.org/drawingml/2006/main" noGrp="1"/>
+          </p:cNvSpPr>
+          <p:nvPr>
+            <p:ph type="sldNum" idx="12"/>
           </p:nvPr>
         </p:nvSpPr>
         <p:spPr/>
         <p:txBody>
-          <a:bodyPr/>
-          <a:lstStyle/>
-          <a:p>
+          <a:bodyPr xmlns:a="http://schemas.openxmlformats.org/drawingml/2006/main"/>
+          <a:lstStyle xmlns:a="http://schemas.openxmlformats.org/drawingml/2006/main"/>
+          <a:p xmlns:a="http://schemas.openxmlformats.org/drawingml/2006/main">
             <a:fld id="{C1FF6DA9-008F-8B48-92A6-B652298478BF}" type="slidenum">
-              <a:rPr lang="en-US" smtClean="0"/>
               <a:t>‹#›</a:t>
             </a:fld>
-            <a:endParaRPr lang="en-US"/>
           </a:p>
         </p:txBody>
       </p:sp>
     </p:spTree>
-    <p:extLst>
-      <p:ext uri="{BB962C8B-B14F-4D97-AF65-F5344CB8AC3E}">
-        <p14:creationId xmlns:p14="http://schemas.microsoft.com/office/powerpoint/2010/main" val="3168075583"/>
-      </p:ext>
-    </p:extLst>
   </p:cSld>
-  <p:clrMapOvr>
-    <a:masterClrMapping/>
-  </p:clrMapOvr>
 </p:sldLayout>
 </file>
 
 <file path=ppt/slideLayouts/slideLayout10.xml><?xml version="1.0" encoding="utf-8"?>
-<p:sldLayout xmlns:a="http://schemas.openxmlformats.org/drawingml/2006/main" xmlns:r="http://schemas.openxmlformats.org/officeDocument/2006/relationships" xmlns:p="http://schemas.openxmlformats.org/presentationml/2006/main" type="vertTx" preserve="1">
+<p:sldLayout xmlns:p="http://schemas.openxmlformats.org/presentationml/2006/main" type="vertTx" preserve="1">
   <p:cSld name="Title and Vertical Text">
     <p:spTree>
       <p:nvGrpSpPr>
@@ -364,168 +1164,181 @@
         <p:nvPr/>
       </p:nvGrpSpPr>
       <p:grpSpPr>
-        <a:xfrm>
-          <a:off x="0" y="0"/>
-          <a:ext cx="0" cy="0"/>
-          <a:chOff x="0" y="0"/>
-          <a:chExt cx="0" cy="0"/>
-        </a:xfrm>
+        <a:xfrm xmlns:a="http://schemas.openxmlformats.org/drawingml/2006/main"/>
       </p:grpSpPr>
       <p:sp>
         <p:nvSpPr>
-          <p:cNvPr id="2" name="Title 1"/>
-          <p:cNvSpPr>
-            <a:spLocks noGrp="1"/>
-          </p:cNvSpPr>
-          <p:nvPr>
-            <p:ph type="title"/>
+          <p:cNvPr id="2" name="Title 1">
+            <a:extLst xmlns:a="http://schemas.openxmlformats.org/drawingml/2006/main">
+              <a:ext uri="{FF2B5EF4-FFF2-40B4-BE49-F238E27FC236}">
+                <a16:creationId xmlns:a16="http://schemas.microsoft.com/office/drawing/2014/main" id="{C89A93FA-0FB6-4104-AA38-2F2D586FD36A}"/>
+              </a:ext>
+            </a:extLst>
+          </p:cNvPr>
+          <p:cNvSpPr>
+            <a:spLocks xmlns:a="http://schemas.openxmlformats.org/drawingml/2006/main" noGrp="1"/>
+          </p:cNvSpPr>
+          <p:nvPr>
+            <p:ph type="title" idx="0"/>
           </p:nvPr>
         </p:nvSpPr>
         <p:spPr/>
         <p:txBody>
-          <a:bodyPr/>
-          <a:lstStyle/>
-          <a:p>
-            <a:r>
-              <a:rPr lang="en-US" smtClean="0"/>
+          <a:bodyPr xmlns:a="http://schemas.openxmlformats.org/drawingml/2006/main"/>
+          <a:lstStyle xmlns:a="http://schemas.openxmlformats.org/drawingml/2006/main"/>
+          <a:p xmlns:a="http://schemas.openxmlformats.org/drawingml/2006/main">
+            <a:r>
               <a:t>Click to edit Master title style</a:t>
             </a:r>
-            <a:endParaRPr lang="en-US"/>
-          </a:p>
-        </p:txBody>
-      </p:sp>
-      <p:sp>
-        <p:nvSpPr>
-          <p:cNvPr id="3" name="Vertical Text Placeholder 2"/>
-          <p:cNvSpPr>
-            <a:spLocks noGrp="1"/>
-          </p:cNvSpPr>
-          <p:nvPr>
-            <p:ph type="body" orient="vert" idx="1"/>
+          </a:p>
+        </p:txBody>
+      </p:sp>
+      <p:sp>
+        <p:nvSpPr>
+          <p:cNvPr id="3" name="Vertical Text Placeholder 2">
+            <a:extLst xmlns:a="http://schemas.openxmlformats.org/drawingml/2006/main">
+              <a:ext uri="{FF2B5EF4-FFF2-40B4-BE49-F238E27FC236}">
+                <a16:creationId xmlns:a16="http://schemas.microsoft.com/office/drawing/2014/main" id="{5B68EEAF-146D-46F8-8089-7B3534888DE6}"/>
+              </a:ext>
+            </a:extLst>
+          </p:cNvPr>
+          <p:cNvSpPr>
+            <a:spLocks xmlns:a="http://schemas.openxmlformats.org/drawingml/2006/main" noGrp="1"/>
+          </p:cNvSpPr>
+          <p:nvPr>
+            <p:ph type="body" idx="1"/>
           </p:nvPr>
         </p:nvSpPr>
         <p:spPr/>
         <p:txBody>
-          <a:bodyPr vert="eaVert"/>
-          <a:lstStyle/>
-          <a:p>
-            <a:pPr lvl="0"/>
-            <a:r>
-              <a:rPr lang="en-US" smtClean="0"/>
+          <a:bodyPr xmlns:a="http://schemas.openxmlformats.org/drawingml/2006/main" vert="eaVert"/>
+          <a:lstStyle xmlns:a="http://schemas.openxmlformats.org/drawingml/2006/main"/>
+          <a:p xmlns:a="http://schemas.openxmlformats.org/drawingml/2006/main">
+            <a:pPr lvl="0">
+              <a:buNone/>
+            </a:pPr>
+            <a:r>
               <a:t>Click to edit Master text styles</a:t>
             </a:r>
           </a:p>
-          <a:p>
-            <a:pPr lvl="1"/>
-            <a:r>
-              <a:rPr lang="en-US" smtClean="0"/>
+          <a:p xmlns:a="http://schemas.openxmlformats.org/drawingml/2006/main">
+            <a:pPr lvl="1">
+              <a:buNone/>
+            </a:pPr>
+            <a:r>
               <a:t>Second level</a:t>
             </a:r>
           </a:p>
-          <a:p>
-            <a:pPr lvl="2"/>
-            <a:r>
-              <a:rPr lang="en-US" smtClean="0"/>
+          <a:p xmlns:a="http://schemas.openxmlformats.org/drawingml/2006/main">
+            <a:pPr lvl="2">
+              <a:buNone/>
+            </a:pPr>
+            <a:r>
               <a:t>Third level</a:t>
             </a:r>
           </a:p>
-          <a:p>
-            <a:pPr lvl="3"/>
-            <a:r>
-              <a:rPr lang="en-US" smtClean="0"/>
+          <a:p xmlns:a="http://schemas.openxmlformats.org/drawingml/2006/main">
+            <a:pPr lvl="3">
+              <a:buNone/>
+            </a:pPr>
+            <a:r>
               <a:t>Fourth level</a:t>
             </a:r>
           </a:p>
-          <a:p>
-            <a:pPr lvl="4"/>
-            <a:r>
-              <a:rPr lang="en-US" smtClean="0"/>
+          <a:p xmlns:a="http://schemas.openxmlformats.org/drawingml/2006/main">
+            <a:pPr lvl="4">
+              <a:buNone/>
+            </a:pPr>
+            <a:r>
               <a:t>Fifth level</a:t>
             </a:r>
-            <a:endParaRPr lang="en-US"/>
-          </a:p>
-        </p:txBody>
-      </p:sp>
-      <p:sp>
-        <p:nvSpPr>
-          <p:cNvPr id="4" name="Date Placeholder 3"/>
-          <p:cNvSpPr>
-            <a:spLocks noGrp="1"/>
-          </p:cNvSpPr>
-          <p:nvPr>
-            <p:ph type="dt" sz="half" idx="10"/>
+          </a:p>
+        </p:txBody>
+      </p:sp>
+      <p:sp>
+        <p:nvSpPr>
+          <p:cNvPr id="4" name="Date Placeholder 3">
+            <a:extLst xmlns:a="http://schemas.openxmlformats.org/drawingml/2006/main">
+              <a:ext uri="{FF2B5EF4-FFF2-40B4-BE49-F238E27FC236}">
+                <a16:creationId xmlns:a16="http://schemas.microsoft.com/office/drawing/2014/main" id="{E51313D2-6D5D-48E4-B2B4-6B39B1B539B3}"/>
+              </a:ext>
+            </a:extLst>
+          </p:cNvPr>
+          <p:cNvSpPr>
+            <a:spLocks xmlns:a="http://schemas.openxmlformats.org/drawingml/2006/main" noGrp="1"/>
+          </p:cNvSpPr>
+          <p:nvPr>
+            <p:ph type="dt" idx="10"/>
           </p:nvPr>
         </p:nvSpPr>
         <p:spPr/>
         <p:txBody>
-          <a:bodyPr/>
-          <a:lstStyle/>
-          <a:p>
+          <a:bodyPr xmlns:a="http://schemas.openxmlformats.org/drawingml/2006/main"/>
+          <a:lstStyle xmlns:a="http://schemas.openxmlformats.org/drawingml/2006/main"/>
+          <a:p xmlns:a="http://schemas.openxmlformats.org/drawingml/2006/main">
             <a:fld id="{5BCAD085-E8A6-8845-BD4E-CB4CCA059FC4}" type="datetimeFigureOut">
-              <a:rPr lang="en-US" smtClean="0"/>
               <a:t>1/27/13</a:t>
             </a:fld>
-            <a:endParaRPr lang="en-US"/>
-          </a:p>
-        </p:txBody>
-      </p:sp>
-      <p:sp>
-        <p:nvSpPr>
-          <p:cNvPr id="5" name="Footer Placeholder 4"/>
-          <p:cNvSpPr>
-            <a:spLocks noGrp="1"/>
-          </p:cNvSpPr>
-          <p:nvPr>
-            <p:ph type="ftr" sz="quarter" idx="11"/>
+          </a:p>
+        </p:txBody>
+      </p:sp>
+      <p:sp>
+        <p:nvSpPr>
+          <p:cNvPr id="5" name="Footer Placeholder 4">
+            <a:extLst xmlns:a="http://schemas.openxmlformats.org/drawingml/2006/main">
+              <a:ext uri="{FF2B5EF4-FFF2-40B4-BE49-F238E27FC236}">
+                <a16:creationId xmlns:a16="http://schemas.microsoft.com/office/drawing/2014/main" id="{DBAB5410-85CE-46B7-949F-F3584C88048E}"/>
+              </a:ext>
+            </a:extLst>
+          </p:cNvPr>
+          <p:cNvSpPr>
+            <a:spLocks xmlns:a="http://schemas.openxmlformats.org/drawingml/2006/main" noGrp="1"/>
+          </p:cNvSpPr>
+          <p:nvPr>
+            <p:ph type="ftr" idx="11"/>
           </p:nvPr>
         </p:nvSpPr>
         <p:spPr/>
         <p:txBody>
-          <a:bodyPr/>
-          <a:lstStyle/>
-          <a:p>
-            <a:endParaRPr lang="en-US"/>
-          </a:p>
-        </p:txBody>
-      </p:sp>
-      <p:sp>
-        <p:nvSpPr>
-          <p:cNvPr id="6" name="Slide Number Placeholder 5"/>
-          <p:cNvSpPr>
-            <a:spLocks noGrp="1"/>
-          </p:cNvSpPr>
-          <p:nvPr>
-            <p:ph type="sldNum" sz="quarter" idx="12"/>
+          <a:bodyPr xmlns:a="http://schemas.openxmlformats.org/drawingml/2006/main"/>
+          <a:lstStyle xmlns:a="http://schemas.openxmlformats.org/drawingml/2006/main"/>
+          <a:p xmlns:a="http://schemas.openxmlformats.org/drawingml/2006/main"/>
+        </p:txBody>
+      </p:sp>
+      <p:sp>
+        <p:nvSpPr>
+          <p:cNvPr id="6" name="Slide Number Placeholder 5">
+            <a:extLst xmlns:a="http://schemas.openxmlformats.org/drawingml/2006/main">
+              <a:ext uri="{FF2B5EF4-FFF2-40B4-BE49-F238E27FC236}">
+                <a16:creationId xmlns:a16="http://schemas.microsoft.com/office/drawing/2014/main" id="{C0BA5852-D2DE-49D9-81C0-8F4A442BABBB}"/>
+              </a:ext>
+            </a:extLst>
+          </p:cNvPr>
+          <p:cNvSpPr>
+            <a:spLocks xmlns:a="http://schemas.openxmlformats.org/drawingml/2006/main" noGrp="1"/>
+          </p:cNvSpPr>
+          <p:nvPr>
+            <p:ph type="sldNum" idx="12"/>
           </p:nvPr>
         </p:nvSpPr>
         <p:spPr/>
         <p:txBody>
-          <a:bodyPr/>
-          <a:lstStyle/>
-          <a:p>
+          <a:bodyPr xmlns:a="http://schemas.openxmlformats.org/drawingml/2006/main"/>
+          <a:lstStyle xmlns:a="http://schemas.openxmlformats.org/drawingml/2006/main"/>
+          <a:p xmlns:a="http://schemas.openxmlformats.org/drawingml/2006/main">
             <a:fld id="{C1FF6DA9-008F-8B48-92A6-B652298478BF}" type="slidenum">
-              <a:rPr lang="en-US" smtClean="0"/>
               <a:t>‹#›</a:t>
             </a:fld>
-            <a:endParaRPr lang="en-US"/>
           </a:p>
         </p:txBody>
       </p:sp>
     </p:spTree>
-    <p:extLst>
-      <p:ext uri="{BB962C8B-B14F-4D97-AF65-F5344CB8AC3E}">
-        <p14:creationId xmlns:p14="http://schemas.microsoft.com/office/powerpoint/2010/main" val="2910927964"/>
-      </p:ext>
-    </p:extLst>
   </p:cSld>
-  <p:clrMapOvr>
-    <a:masterClrMapping/>
-  </p:clrMapOvr>
 </p:sldLayout>
 </file>
 
 <file path=ppt/slideLayouts/slideLayout11.xml><?xml version="1.0" encoding="utf-8"?>
-<p:sldLayout xmlns:a="http://schemas.openxmlformats.org/drawingml/2006/main" xmlns:r="http://schemas.openxmlformats.org/officeDocument/2006/relationships" xmlns:p="http://schemas.openxmlformats.org/presentationml/2006/main" type="vertTitleAndTx" preserve="1">
+<p:sldLayout xmlns:p="http://schemas.openxmlformats.org/presentationml/2006/main" type="vertTitleAndTx" preserve="1">
   <p:cSld name="Vertical Title and Text">
     <p:spTree>
       <p:nvGrpSpPr>
@@ -534,178 +1347,191 @@
         <p:nvPr/>
       </p:nvGrpSpPr>
       <p:grpSpPr>
-        <a:xfrm>
-          <a:off x="0" y="0"/>
-          <a:ext cx="0" cy="0"/>
-          <a:chOff x="0" y="0"/>
-          <a:chExt cx="0" cy="0"/>
-        </a:xfrm>
+        <a:xfrm xmlns:a="http://schemas.openxmlformats.org/drawingml/2006/main"/>
       </p:grpSpPr>
       <p:sp>
         <p:nvSpPr>
-          <p:cNvPr id="2" name="Vertical Title 1"/>
-          <p:cNvSpPr>
-            <a:spLocks noGrp="1"/>
-          </p:cNvSpPr>
-          <p:nvPr>
-            <p:ph type="title" orient="vert"/>
-          </p:nvPr>
-        </p:nvSpPr>
-        <p:spPr>
-          <a:xfrm>
+          <p:cNvPr id="2" name="Vertical Title 1">
+            <a:extLst xmlns:a="http://schemas.openxmlformats.org/drawingml/2006/main">
+              <a:ext uri="{FF2B5EF4-FFF2-40B4-BE49-F238E27FC236}">
+                <a16:creationId xmlns:a16="http://schemas.microsoft.com/office/drawing/2014/main" id="{88496F9F-72E9-4BC8-9C81-52B094091428}"/>
+              </a:ext>
+            </a:extLst>
+          </p:cNvPr>
+          <p:cNvSpPr>
+            <a:spLocks xmlns:a="http://schemas.openxmlformats.org/drawingml/2006/main" noGrp="1"/>
+          </p:cNvSpPr>
+          <p:nvPr>
+            <p:ph type="title" idx="0"/>
+          </p:nvPr>
+        </p:nvSpPr>
+        <p:spPr>
+          <a:xfrm xmlns:a="http://schemas.openxmlformats.org/drawingml/2006/main">
             <a:off x="6629400" y="274638"/>
             <a:ext cx="2057400" cy="5851525"/>
           </a:xfrm>
         </p:spPr>
         <p:txBody>
-          <a:bodyPr vert="eaVert"/>
-          <a:lstStyle/>
-          <a:p>
-            <a:r>
-              <a:rPr lang="en-US" smtClean="0"/>
+          <a:bodyPr xmlns:a="http://schemas.openxmlformats.org/drawingml/2006/main" vert="eaVert"/>
+          <a:lstStyle xmlns:a="http://schemas.openxmlformats.org/drawingml/2006/main"/>
+          <a:p xmlns:a="http://schemas.openxmlformats.org/drawingml/2006/main">
+            <a:r>
               <a:t>Click to edit Master title style</a:t>
             </a:r>
-            <a:endParaRPr lang="en-US"/>
-          </a:p>
-        </p:txBody>
-      </p:sp>
-      <p:sp>
-        <p:nvSpPr>
-          <p:cNvPr id="3" name="Vertical Text Placeholder 2"/>
-          <p:cNvSpPr>
-            <a:spLocks noGrp="1"/>
-          </p:cNvSpPr>
-          <p:nvPr>
-            <p:ph type="body" orient="vert" idx="1"/>
-          </p:nvPr>
-        </p:nvSpPr>
-        <p:spPr>
-          <a:xfrm>
+          </a:p>
+        </p:txBody>
+      </p:sp>
+      <p:sp>
+        <p:nvSpPr>
+          <p:cNvPr id="3" name="Vertical Text Placeholder 2">
+            <a:extLst xmlns:a="http://schemas.openxmlformats.org/drawingml/2006/main">
+              <a:ext uri="{FF2B5EF4-FFF2-40B4-BE49-F238E27FC236}">
+                <a16:creationId xmlns:a16="http://schemas.microsoft.com/office/drawing/2014/main" id="{CB551828-3980-4ABF-A887-22A059AF3124}"/>
+              </a:ext>
+            </a:extLst>
+          </p:cNvPr>
+          <p:cNvSpPr>
+            <a:spLocks xmlns:a="http://schemas.openxmlformats.org/drawingml/2006/main" noGrp="1"/>
+          </p:cNvSpPr>
+          <p:nvPr>
+            <p:ph type="body" idx="1"/>
+          </p:nvPr>
+        </p:nvSpPr>
+        <p:spPr>
+          <a:xfrm xmlns:a="http://schemas.openxmlformats.org/drawingml/2006/main">
             <a:off x="457200" y="274638"/>
             <a:ext cx="6019800" cy="5851525"/>
           </a:xfrm>
         </p:spPr>
         <p:txBody>
-          <a:bodyPr vert="eaVert"/>
-          <a:lstStyle/>
-          <a:p>
-            <a:pPr lvl="0"/>
-            <a:r>
-              <a:rPr lang="en-US" smtClean="0"/>
+          <a:bodyPr xmlns:a="http://schemas.openxmlformats.org/drawingml/2006/main" vert="eaVert"/>
+          <a:lstStyle xmlns:a="http://schemas.openxmlformats.org/drawingml/2006/main"/>
+          <a:p xmlns:a="http://schemas.openxmlformats.org/drawingml/2006/main">
+            <a:pPr lvl="0">
+              <a:buNone/>
+            </a:pPr>
+            <a:r>
               <a:t>Click to edit Master text styles</a:t>
             </a:r>
           </a:p>
-          <a:p>
-            <a:pPr lvl="1"/>
-            <a:r>
-              <a:rPr lang="en-US" smtClean="0"/>
+          <a:p xmlns:a="http://schemas.openxmlformats.org/drawingml/2006/main">
+            <a:pPr lvl="1">
+              <a:buNone/>
+            </a:pPr>
+            <a:r>
               <a:t>Second level</a:t>
             </a:r>
           </a:p>
-          <a:p>
-            <a:pPr lvl="2"/>
-            <a:r>
-              <a:rPr lang="en-US" smtClean="0"/>
+          <a:p xmlns:a="http://schemas.openxmlformats.org/drawingml/2006/main">
+            <a:pPr lvl="2">
+              <a:buNone/>
+            </a:pPr>
+            <a:r>
               <a:t>Third level</a:t>
             </a:r>
           </a:p>
-          <a:p>
-            <a:pPr lvl="3"/>
-            <a:r>
-              <a:rPr lang="en-US" smtClean="0"/>
+          <a:p xmlns:a="http://schemas.openxmlformats.org/drawingml/2006/main">
+            <a:pPr lvl="3">
+              <a:buNone/>
+            </a:pPr>
+            <a:r>
               <a:t>Fourth level</a:t>
             </a:r>
           </a:p>
-          <a:p>
-            <a:pPr lvl="4"/>
-            <a:r>
-              <a:rPr lang="en-US" smtClean="0"/>
+          <a:p xmlns:a="http://schemas.openxmlformats.org/drawingml/2006/main">
+            <a:pPr lvl="4">
+              <a:buNone/>
+            </a:pPr>
+            <a:r>
               <a:t>Fifth level</a:t>
             </a:r>
-            <a:endParaRPr lang="en-US"/>
-          </a:p>
-        </p:txBody>
-      </p:sp>
-      <p:sp>
-        <p:nvSpPr>
-          <p:cNvPr id="4" name="Date Placeholder 3"/>
-          <p:cNvSpPr>
-            <a:spLocks noGrp="1"/>
-          </p:cNvSpPr>
-          <p:nvPr>
-            <p:ph type="dt" sz="half" idx="10"/>
+          </a:p>
+        </p:txBody>
+      </p:sp>
+      <p:sp>
+        <p:nvSpPr>
+          <p:cNvPr id="4" name="Date Placeholder 3">
+            <a:extLst xmlns:a="http://schemas.openxmlformats.org/drawingml/2006/main">
+              <a:ext uri="{FF2B5EF4-FFF2-40B4-BE49-F238E27FC236}">
+                <a16:creationId xmlns:a16="http://schemas.microsoft.com/office/drawing/2014/main" id="{C322D2A5-6CA6-4195-A36A-3613C758316A}"/>
+              </a:ext>
+            </a:extLst>
+          </p:cNvPr>
+          <p:cNvSpPr>
+            <a:spLocks xmlns:a="http://schemas.openxmlformats.org/drawingml/2006/main" noGrp="1"/>
+          </p:cNvSpPr>
+          <p:nvPr>
+            <p:ph type="dt" idx="10"/>
           </p:nvPr>
         </p:nvSpPr>
         <p:spPr/>
         <p:txBody>
-          <a:bodyPr/>
-          <a:lstStyle/>
-          <a:p>
+          <a:bodyPr xmlns:a="http://schemas.openxmlformats.org/drawingml/2006/main"/>
+          <a:lstStyle xmlns:a="http://schemas.openxmlformats.org/drawingml/2006/main"/>
+          <a:p xmlns:a="http://schemas.openxmlformats.org/drawingml/2006/main">
             <a:fld id="{5BCAD085-E8A6-8845-BD4E-CB4CCA059FC4}" type="datetimeFigureOut">
-              <a:rPr lang="en-US" smtClean="0"/>
               <a:t>1/27/13</a:t>
             </a:fld>
-            <a:endParaRPr lang="en-US"/>
-          </a:p>
-        </p:txBody>
-      </p:sp>
-      <p:sp>
-        <p:nvSpPr>
-          <p:cNvPr id="5" name="Footer Placeholder 4"/>
-          <p:cNvSpPr>
-            <a:spLocks noGrp="1"/>
-          </p:cNvSpPr>
-          <p:nvPr>
-            <p:ph type="ftr" sz="quarter" idx="11"/>
+          </a:p>
+        </p:txBody>
+      </p:sp>
+      <p:sp>
+        <p:nvSpPr>
+          <p:cNvPr id="5" name="Footer Placeholder 4">
+            <a:extLst xmlns:a="http://schemas.openxmlformats.org/drawingml/2006/main">
+              <a:ext uri="{FF2B5EF4-FFF2-40B4-BE49-F238E27FC236}">
+                <a16:creationId xmlns:a16="http://schemas.microsoft.com/office/drawing/2014/main" id="{159FB00B-D1A9-4271-BCB7-8DD7F2D28DB8}"/>
+              </a:ext>
+            </a:extLst>
+          </p:cNvPr>
+          <p:cNvSpPr>
+            <a:spLocks xmlns:a="http://schemas.openxmlformats.org/drawingml/2006/main" noGrp="1"/>
+          </p:cNvSpPr>
+          <p:nvPr>
+            <p:ph type="ftr" idx="11"/>
           </p:nvPr>
         </p:nvSpPr>
         <p:spPr/>
         <p:txBody>
-          <a:bodyPr/>
-          <a:lstStyle/>
-          <a:p>
-            <a:endParaRPr lang="en-US"/>
-          </a:p>
-        </p:txBody>
-      </p:sp>
-      <p:sp>
-        <p:nvSpPr>
-          <p:cNvPr id="6" name="Slide Number Placeholder 5"/>
-          <p:cNvSpPr>
-            <a:spLocks noGrp="1"/>
-          </p:cNvSpPr>
-          <p:nvPr>
-            <p:ph type="sldNum" sz="quarter" idx="12"/>
+          <a:bodyPr xmlns:a="http://schemas.openxmlformats.org/drawingml/2006/main"/>
+          <a:lstStyle xmlns:a="http://schemas.openxmlformats.org/drawingml/2006/main"/>
+          <a:p xmlns:a="http://schemas.openxmlformats.org/drawingml/2006/main"/>
+        </p:txBody>
+      </p:sp>
+      <p:sp>
+        <p:nvSpPr>
+          <p:cNvPr id="6" name="Slide Number Placeholder 5">
+            <a:extLst xmlns:a="http://schemas.openxmlformats.org/drawingml/2006/main">
+              <a:ext uri="{FF2B5EF4-FFF2-40B4-BE49-F238E27FC236}">
+                <a16:creationId xmlns:a16="http://schemas.microsoft.com/office/drawing/2014/main" id="{6CE554CC-E6D7-4405-B22B-D8963400B7FF}"/>
+              </a:ext>
+            </a:extLst>
+          </p:cNvPr>
+          <p:cNvSpPr>
+            <a:spLocks xmlns:a="http://schemas.openxmlformats.org/drawingml/2006/main" noGrp="1"/>
+          </p:cNvSpPr>
+          <p:nvPr>
+            <p:ph type="sldNum" idx="12"/>
           </p:nvPr>
         </p:nvSpPr>
         <p:spPr/>
         <p:txBody>
-          <a:bodyPr/>
-          <a:lstStyle/>
-          <a:p>
+          <a:bodyPr xmlns:a="http://schemas.openxmlformats.org/drawingml/2006/main"/>
+          <a:lstStyle xmlns:a="http://schemas.openxmlformats.org/drawingml/2006/main"/>
+          <a:p xmlns:a="http://schemas.openxmlformats.org/drawingml/2006/main">
             <a:fld id="{C1FF6DA9-008F-8B48-92A6-B652298478BF}" type="slidenum">
-              <a:rPr lang="en-US" smtClean="0"/>
               <a:t>‹#›</a:t>
             </a:fld>
-            <a:endParaRPr lang="en-US"/>
           </a:p>
         </p:txBody>
       </p:sp>
     </p:spTree>
-    <p:extLst>
-      <p:ext uri="{BB962C8B-B14F-4D97-AF65-F5344CB8AC3E}">
-        <p14:creationId xmlns:p14="http://schemas.microsoft.com/office/powerpoint/2010/main" val="3612223792"/>
-      </p:ext>
-    </p:extLst>
   </p:cSld>
-  <p:clrMapOvr>
-    <a:masterClrMapping/>
-  </p:clrMapOvr>
 </p:sldLayout>
 </file>
 
 <file path=ppt/slideLayouts/slideLayout2.xml><?xml version="1.0" encoding="utf-8"?>
-<p:sldLayout xmlns:a="http://schemas.openxmlformats.org/drawingml/2006/main" xmlns:r="http://schemas.openxmlformats.org/officeDocument/2006/relationships" xmlns:p="http://schemas.openxmlformats.org/presentationml/2006/main" type="obj" preserve="1">
+<p:sldLayout xmlns:p="http://schemas.openxmlformats.org/presentationml/2006/main" type="obj" preserve="1">
   <p:cSld name="Title and Content">
     <p:spTree>
       <p:nvGrpSpPr>
@@ -714,41 +1540,46 @@
         <p:nvPr/>
       </p:nvGrpSpPr>
       <p:grpSpPr>
-        <a:xfrm>
-          <a:off x="0" y="0"/>
-          <a:ext cx="0" cy="0"/>
-          <a:chOff x="0" y="0"/>
-          <a:chExt cx="0" cy="0"/>
-        </a:xfrm>
+        <a:xfrm xmlns:a="http://schemas.openxmlformats.org/drawingml/2006/main"/>
       </p:grpSpPr>
       <p:sp>
         <p:nvSpPr>
-          <p:cNvPr id="2" name="Title 1"/>
-          <p:cNvSpPr>
-            <a:spLocks noGrp="1"/>
-          </p:cNvSpPr>
-          <p:nvPr>
-            <p:ph type="title"/>
+          <p:cNvPr id="2" name="Title 1">
+            <a:extLst xmlns:a="http://schemas.openxmlformats.org/drawingml/2006/main">
+              <a:ext uri="{FF2B5EF4-FFF2-40B4-BE49-F238E27FC236}">
+                <a16:creationId xmlns:a16="http://schemas.microsoft.com/office/drawing/2014/main" id="{3C403338-372B-4BCC-AB24-88E9E815A526}"/>
+              </a:ext>
+            </a:extLst>
+          </p:cNvPr>
+          <p:cNvSpPr>
+            <a:spLocks xmlns:a="http://schemas.openxmlformats.org/drawingml/2006/main" noGrp="1"/>
+          </p:cNvSpPr>
+          <p:nvPr>
+            <p:ph type="title" idx="0"/>
           </p:nvPr>
         </p:nvSpPr>
         <p:spPr/>
         <p:txBody>
-          <a:bodyPr/>
-          <a:lstStyle/>
-          <a:p>
-            <a:r>
-              <a:rPr lang="en-US" smtClean="0"/>
+          <a:bodyPr xmlns:a="http://schemas.openxmlformats.org/drawingml/2006/main"/>
+          <a:lstStyle xmlns:a="http://schemas.openxmlformats.org/drawingml/2006/main"/>
+          <a:p xmlns:a="http://schemas.openxmlformats.org/drawingml/2006/main">
+            <a:r>
               <a:t>Click to edit Master title style</a:t>
             </a:r>
-            <a:endParaRPr lang="en-US"/>
-          </a:p>
-        </p:txBody>
-      </p:sp>
-      <p:sp>
-        <p:nvSpPr>
-          <p:cNvPr id="3" name="Content Placeholder 2"/>
-          <p:cNvSpPr>
-            <a:spLocks noGrp="1"/>
+          </a:p>
+        </p:txBody>
+      </p:sp>
+      <p:sp>
+        <p:nvSpPr>
+          <p:cNvPr id="3" name="Content Placeholder 2">
+            <a:extLst xmlns:a="http://schemas.openxmlformats.org/drawingml/2006/main">
+              <a:ext uri="{FF2B5EF4-FFF2-40B4-BE49-F238E27FC236}">
+                <a16:creationId xmlns:a16="http://schemas.microsoft.com/office/drawing/2014/main" id="{2F13162E-1595-498D-BF8C-1595099D09EC}"/>
+              </a:ext>
+            </a:extLst>
+          </p:cNvPr>
+          <p:cNvSpPr>
+            <a:spLocks xmlns:a="http://schemas.openxmlformats.org/drawingml/2006/main" noGrp="1"/>
           </p:cNvSpPr>
           <p:nvPr>
             <p:ph idx="1"/>
@@ -756,126 +1587,134 @@
         </p:nvSpPr>
         <p:spPr/>
         <p:txBody>
-          <a:bodyPr/>
-          <a:lstStyle/>
-          <a:p>
-            <a:pPr lvl="0"/>
-            <a:r>
-              <a:rPr lang="en-US" smtClean="0"/>
+          <a:bodyPr xmlns:a="http://schemas.openxmlformats.org/drawingml/2006/main"/>
+          <a:lstStyle xmlns:a="http://schemas.openxmlformats.org/drawingml/2006/main"/>
+          <a:p xmlns:a="http://schemas.openxmlformats.org/drawingml/2006/main">
+            <a:pPr lvl="0">
+              <a:buNone/>
+            </a:pPr>
+            <a:r>
               <a:t>Click to edit Master text styles</a:t>
             </a:r>
           </a:p>
-          <a:p>
-            <a:pPr lvl="1"/>
-            <a:r>
-              <a:rPr lang="en-US" smtClean="0"/>
+          <a:p xmlns:a="http://schemas.openxmlformats.org/drawingml/2006/main">
+            <a:pPr lvl="1">
+              <a:buNone/>
+            </a:pPr>
+            <a:r>
               <a:t>Second level</a:t>
             </a:r>
           </a:p>
-          <a:p>
-            <a:pPr lvl="2"/>
-            <a:r>
-              <a:rPr lang="en-US" smtClean="0"/>
+          <a:p xmlns:a="http://schemas.openxmlformats.org/drawingml/2006/main">
+            <a:pPr lvl="2">
+              <a:buNone/>
+            </a:pPr>
+            <a:r>
               <a:t>Third level</a:t>
             </a:r>
           </a:p>
-          <a:p>
-            <a:pPr lvl="3"/>
-            <a:r>
-              <a:rPr lang="en-US" smtClean="0"/>
+          <a:p xmlns:a="http://schemas.openxmlformats.org/drawingml/2006/main">
+            <a:pPr lvl="3">
+              <a:buNone/>
+            </a:pPr>
+            <a:r>
               <a:t>Fourth level</a:t>
             </a:r>
           </a:p>
-          <a:p>
-            <a:pPr lvl="4"/>
-            <a:r>
-              <a:rPr lang="en-US" smtClean="0"/>
+          <a:p xmlns:a="http://schemas.openxmlformats.org/drawingml/2006/main">
+            <a:pPr lvl="4">
+              <a:buNone/>
+            </a:pPr>
+            <a:r>
               <a:t>Fifth level</a:t>
             </a:r>
-            <a:endParaRPr lang="en-US"/>
-          </a:p>
-        </p:txBody>
-      </p:sp>
-      <p:sp>
-        <p:nvSpPr>
-          <p:cNvPr id="4" name="Date Placeholder 3"/>
-          <p:cNvSpPr>
-            <a:spLocks noGrp="1"/>
-          </p:cNvSpPr>
-          <p:nvPr>
-            <p:ph type="dt" sz="half" idx="10"/>
+          </a:p>
+        </p:txBody>
+      </p:sp>
+      <p:sp>
+        <p:nvSpPr>
+          <p:cNvPr id="4" name="Date Placeholder 3">
+            <a:extLst xmlns:a="http://schemas.openxmlformats.org/drawingml/2006/main">
+              <a:ext uri="{FF2B5EF4-FFF2-40B4-BE49-F238E27FC236}">
+                <a16:creationId xmlns:a16="http://schemas.microsoft.com/office/drawing/2014/main" id="{E3A8C907-3C04-40F6-9141-62DDDBC3C450}"/>
+              </a:ext>
+            </a:extLst>
+          </p:cNvPr>
+          <p:cNvSpPr>
+            <a:spLocks xmlns:a="http://schemas.openxmlformats.org/drawingml/2006/main" noGrp="1"/>
+          </p:cNvSpPr>
+          <p:nvPr>
+            <p:ph type="dt" idx="10"/>
           </p:nvPr>
         </p:nvSpPr>
         <p:spPr/>
         <p:txBody>
-          <a:bodyPr/>
-          <a:lstStyle/>
-          <a:p>
+          <a:bodyPr xmlns:a="http://schemas.openxmlformats.org/drawingml/2006/main"/>
+          <a:lstStyle xmlns:a="http://schemas.openxmlformats.org/drawingml/2006/main"/>
+          <a:p xmlns:a="http://schemas.openxmlformats.org/drawingml/2006/main">
             <a:fld id="{5BCAD085-E8A6-8845-BD4E-CB4CCA059FC4}" type="datetimeFigureOut">
-              <a:rPr lang="en-US" smtClean="0"/>
               <a:t>1/27/13</a:t>
             </a:fld>
-            <a:endParaRPr lang="en-US"/>
-          </a:p>
-        </p:txBody>
-      </p:sp>
-      <p:sp>
-        <p:nvSpPr>
-          <p:cNvPr id="5" name="Footer Placeholder 4"/>
-          <p:cNvSpPr>
-            <a:spLocks noGrp="1"/>
-          </p:cNvSpPr>
-          <p:nvPr>
-            <p:ph type="ftr" sz="quarter" idx="11"/>
+          </a:p>
+        </p:txBody>
+      </p:sp>
+      <p:sp>
+        <p:nvSpPr>
+          <p:cNvPr id="5" name="Footer Placeholder 4">
+            <a:extLst xmlns:a="http://schemas.openxmlformats.org/drawingml/2006/main">
+              <a:ext uri="{FF2B5EF4-FFF2-40B4-BE49-F238E27FC236}">
+                <a16:creationId xmlns:a16="http://schemas.microsoft.com/office/drawing/2014/main" id="{2274E05F-296A-4EAF-91D2-0C63D47981F6}"/>
+              </a:ext>
+            </a:extLst>
+          </p:cNvPr>
+          <p:cNvSpPr>
+            <a:spLocks xmlns:a="http://schemas.openxmlformats.org/drawingml/2006/main" noGrp="1"/>
+          </p:cNvSpPr>
+          <p:nvPr>
+            <p:ph type="ftr" idx="11"/>
           </p:nvPr>
         </p:nvSpPr>
         <p:spPr/>
         <p:txBody>
-          <a:bodyPr/>
-          <a:lstStyle/>
-          <a:p>
-            <a:endParaRPr lang="en-US"/>
-          </a:p>
-        </p:txBody>
-      </p:sp>
-      <p:sp>
-        <p:nvSpPr>
-          <p:cNvPr id="6" name="Slide Number Placeholder 5"/>
-          <p:cNvSpPr>
-            <a:spLocks noGrp="1"/>
-          </p:cNvSpPr>
-          <p:nvPr>
-            <p:ph type="sldNum" sz="quarter" idx="12"/>
+          <a:bodyPr xmlns:a="http://schemas.openxmlformats.org/drawingml/2006/main"/>
+          <a:lstStyle xmlns:a="http://schemas.openxmlformats.org/drawingml/2006/main"/>
+          <a:p xmlns:a="http://schemas.openxmlformats.org/drawingml/2006/main"/>
+        </p:txBody>
+      </p:sp>
+      <p:sp>
+        <p:nvSpPr>
+          <p:cNvPr id="6" name="Slide Number Placeholder 5">
+            <a:extLst xmlns:a="http://schemas.openxmlformats.org/drawingml/2006/main">
+              <a:ext uri="{FF2B5EF4-FFF2-40B4-BE49-F238E27FC236}">
+                <a16:creationId xmlns:a16="http://schemas.microsoft.com/office/drawing/2014/main" id="{418FBEE0-F776-49BA-998C-9378D84FFB9E}"/>
+              </a:ext>
+            </a:extLst>
+          </p:cNvPr>
+          <p:cNvSpPr>
+            <a:spLocks xmlns:a="http://schemas.openxmlformats.org/drawingml/2006/main" noGrp="1"/>
+          </p:cNvSpPr>
+          <p:nvPr>
+            <p:ph type="sldNum" idx="12"/>
           </p:nvPr>
         </p:nvSpPr>
         <p:spPr/>
         <p:txBody>
-          <a:bodyPr/>
-          <a:lstStyle/>
-          <a:p>
+          <a:bodyPr xmlns:a="http://schemas.openxmlformats.org/drawingml/2006/main"/>
+          <a:lstStyle xmlns:a="http://schemas.openxmlformats.org/drawingml/2006/main"/>
+          <a:p xmlns:a="http://schemas.openxmlformats.org/drawingml/2006/main">
             <a:fld id="{C1FF6DA9-008F-8B48-92A6-B652298478BF}" type="slidenum">
-              <a:rPr lang="en-US" smtClean="0"/>
               <a:t>‹#›</a:t>
             </a:fld>
-            <a:endParaRPr lang="en-US"/>
           </a:p>
         </p:txBody>
       </p:sp>
     </p:spTree>
-    <p:extLst>
-      <p:ext uri="{BB962C8B-B14F-4D97-AF65-F5344CB8AC3E}">
-        <p14:creationId xmlns:p14="http://schemas.microsoft.com/office/powerpoint/2010/main" val="2614314258"/>
-      </p:ext>
-    </p:extLst>
   </p:cSld>
-  <p:clrMapOvr>
-    <a:masterClrMapping/>
-  </p:clrMapOvr>
 </p:sldLayout>
 </file>
 
 <file path=ppt/slideLayouts/slideLayout3.xml><?xml version="1.0" encoding="utf-8"?>
-<p:sldLayout xmlns:a="http://schemas.openxmlformats.org/drawingml/2006/main" xmlns:r="http://schemas.openxmlformats.org/officeDocument/2006/relationships" xmlns:p="http://schemas.openxmlformats.org/presentationml/2006/main" type="secHead" preserve="1">
+<p:sldLayout xmlns:p="http://schemas.openxmlformats.org/presentationml/2006/main" type="secHead" preserve="1">
   <p:cSld name="Section Header">
     <p:spTree>
       <p:nvGrpSpPr>
@@ -884,64 +1723,70 @@
         <p:nvPr/>
       </p:nvGrpSpPr>
       <p:grpSpPr>
-        <a:xfrm>
-          <a:off x="0" y="0"/>
-          <a:ext cx="0" cy="0"/>
-          <a:chOff x="0" y="0"/>
-          <a:chExt cx="0" cy="0"/>
-        </a:xfrm>
+        <a:xfrm xmlns:a="http://schemas.openxmlformats.org/drawingml/2006/main"/>
       </p:grpSpPr>
       <p:sp>
         <p:nvSpPr>
-          <p:cNvPr id="2" name="Title 1"/>
-          <p:cNvSpPr>
-            <a:spLocks noGrp="1"/>
-          </p:cNvSpPr>
-          <p:nvPr>
-            <p:ph type="title"/>
-          </p:nvPr>
-        </p:nvSpPr>
-        <p:spPr>
-          <a:xfrm>
+          <p:cNvPr id="2" name="Title 1">
+            <a:extLst xmlns:a="http://schemas.openxmlformats.org/drawingml/2006/main">
+              <a:ext uri="{FF2B5EF4-FFF2-40B4-BE49-F238E27FC236}">
+                <a16:creationId xmlns:a16="http://schemas.microsoft.com/office/drawing/2014/main" id="{7A782713-B978-4598-936F-FF3BD69BC1D7}"/>
+              </a:ext>
+            </a:extLst>
+          </p:cNvPr>
+          <p:cNvSpPr>
+            <a:spLocks xmlns:a="http://schemas.openxmlformats.org/drawingml/2006/main" noGrp="1"/>
+          </p:cNvSpPr>
+          <p:nvPr>
+            <p:ph type="title" idx="0"/>
+          </p:nvPr>
+        </p:nvSpPr>
+        <p:spPr>
+          <a:xfrm xmlns:a="http://schemas.openxmlformats.org/drawingml/2006/main">
             <a:off x="722313" y="4406900"/>
             <a:ext cx="7772400" cy="1362075"/>
           </a:xfrm>
         </p:spPr>
         <p:txBody>
-          <a:bodyPr anchor="t"/>
-          <a:lstStyle>
+          <a:bodyPr xmlns:a="http://schemas.openxmlformats.org/drawingml/2006/main" anchor="t"/>
+          <a:lstStyle xmlns:a="http://schemas.openxmlformats.org/drawingml/2006/main">
             <a:lvl1pPr algn="l">
+              <a:buNone/>
               <a:defRPr sz="4000" b="1" cap="all"/>
             </a:lvl1pPr>
           </a:lstStyle>
-          <a:p>
-            <a:r>
-              <a:rPr lang="en-US" smtClean="0"/>
+          <a:p xmlns:a="http://schemas.openxmlformats.org/drawingml/2006/main">
+            <a:r>
               <a:t>Click to edit Master title style</a:t>
             </a:r>
-            <a:endParaRPr lang="en-US"/>
-          </a:p>
-        </p:txBody>
-      </p:sp>
-      <p:sp>
-        <p:nvSpPr>
-          <p:cNvPr id="3" name="Text Placeholder 2"/>
-          <p:cNvSpPr>
-            <a:spLocks noGrp="1"/>
+          </a:p>
+        </p:txBody>
+      </p:sp>
+      <p:sp>
+        <p:nvSpPr>
+          <p:cNvPr id="3" name="Text Placeholder 2">
+            <a:extLst xmlns:a="http://schemas.openxmlformats.org/drawingml/2006/main">
+              <a:ext uri="{FF2B5EF4-FFF2-40B4-BE49-F238E27FC236}">
+                <a16:creationId xmlns:a16="http://schemas.microsoft.com/office/drawing/2014/main" id="{6C718D95-54D8-4910-BBD4-A6F42169B644}"/>
+              </a:ext>
+            </a:extLst>
+          </p:cNvPr>
+          <p:cNvSpPr>
+            <a:spLocks xmlns:a="http://schemas.openxmlformats.org/drawingml/2006/main" noGrp="1"/>
           </p:cNvSpPr>
           <p:nvPr>
             <p:ph type="body" idx="1"/>
           </p:nvPr>
         </p:nvSpPr>
         <p:spPr>
-          <a:xfrm>
+          <a:xfrm xmlns:a="http://schemas.openxmlformats.org/drawingml/2006/main">
             <a:off x="722313" y="2906713"/>
             <a:ext cx="7772400" cy="1500187"/>
           </a:xfrm>
         </p:spPr>
         <p:txBody>
-          <a:bodyPr anchor="b"/>
-          <a:lstStyle>
+          <a:bodyPr xmlns:a="http://schemas.openxmlformats.org/drawingml/2006/main" anchor="b"/>
+          <a:lstStyle xmlns:a="http://schemas.openxmlformats.org/drawingml/2006/main">
             <a:lvl1pPr marL="0" indent="0">
               <a:buNone/>
               <a:defRPr sz="2000">
@@ -1033,10 +1878,11 @@
               </a:defRPr>
             </a:lvl9pPr>
           </a:lstStyle>
-          <a:p>
-            <a:pPr lvl="0"/>
-            <a:r>
-              <a:rPr lang="en-US" smtClean="0"/>
+          <a:p xmlns:a="http://schemas.openxmlformats.org/drawingml/2006/main">
+            <a:pPr lvl="0">
+              <a:buNone/>
+            </a:pPr>
+            <a:r>
               <a:t>Click to edit Master text styles</a:t>
             </a:r>
           </a:p>
@@ -1044,84 +1890,88 @@
       </p:sp>
       <p:sp>
         <p:nvSpPr>
-          <p:cNvPr id="4" name="Date Placeholder 3"/>
-          <p:cNvSpPr>
-            <a:spLocks noGrp="1"/>
-          </p:cNvSpPr>
-          <p:nvPr>
-            <p:ph type="dt" sz="half" idx="10"/>
+          <p:cNvPr id="4" name="Date Placeholder 3">
+            <a:extLst xmlns:a="http://schemas.openxmlformats.org/drawingml/2006/main">
+              <a:ext uri="{FF2B5EF4-FFF2-40B4-BE49-F238E27FC236}">
+                <a16:creationId xmlns:a16="http://schemas.microsoft.com/office/drawing/2014/main" id="{1E987942-52F5-4F4C-8560-11066003A385}"/>
+              </a:ext>
+            </a:extLst>
+          </p:cNvPr>
+          <p:cNvSpPr>
+            <a:spLocks xmlns:a="http://schemas.openxmlformats.org/drawingml/2006/main" noGrp="1"/>
+          </p:cNvSpPr>
+          <p:nvPr>
+            <p:ph type="dt" idx="10"/>
           </p:nvPr>
         </p:nvSpPr>
         <p:spPr/>
         <p:txBody>
-          <a:bodyPr/>
-          <a:lstStyle/>
-          <a:p>
+          <a:bodyPr xmlns:a="http://schemas.openxmlformats.org/drawingml/2006/main"/>
+          <a:lstStyle xmlns:a="http://schemas.openxmlformats.org/drawingml/2006/main"/>
+          <a:p xmlns:a="http://schemas.openxmlformats.org/drawingml/2006/main">
             <a:fld id="{5BCAD085-E8A6-8845-BD4E-CB4CCA059FC4}" type="datetimeFigureOut">
-              <a:rPr lang="en-US" smtClean="0"/>
               <a:t>1/27/13</a:t>
             </a:fld>
-            <a:endParaRPr lang="en-US"/>
-          </a:p>
-        </p:txBody>
-      </p:sp>
-      <p:sp>
-        <p:nvSpPr>
-          <p:cNvPr id="5" name="Footer Placeholder 4"/>
-          <p:cNvSpPr>
-            <a:spLocks noGrp="1"/>
-          </p:cNvSpPr>
-          <p:nvPr>
-            <p:ph type="ftr" sz="quarter" idx="11"/>
+          </a:p>
+        </p:txBody>
+      </p:sp>
+      <p:sp>
+        <p:nvSpPr>
+          <p:cNvPr id="5" name="Footer Placeholder 4">
+            <a:extLst xmlns:a="http://schemas.openxmlformats.org/drawingml/2006/main">
+              <a:ext uri="{FF2B5EF4-FFF2-40B4-BE49-F238E27FC236}">
+                <a16:creationId xmlns:a16="http://schemas.microsoft.com/office/drawing/2014/main" id="{2793A4D1-B3F6-4902-9216-3A924CA7A3AD}"/>
+              </a:ext>
+            </a:extLst>
+          </p:cNvPr>
+          <p:cNvSpPr>
+            <a:spLocks xmlns:a="http://schemas.openxmlformats.org/drawingml/2006/main" noGrp="1"/>
+          </p:cNvSpPr>
+          <p:nvPr>
+            <p:ph type="ftr" idx="11"/>
           </p:nvPr>
         </p:nvSpPr>
         <p:spPr/>
         <p:txBody>
-          <a:bodyPr/>
-          <a:lstStyle/>
-          <a:p>
-            <a:endParaRPr lang="en-US"/>
-          </a:p>
-        </p:txBody>
-      </p:sp>
-      <p:sp>
-        <p:nvSpPr>
-          <p:cNvPr id="6" name="Slide Number Placeholder 5"/>
-          <p:cNvSpPr>
-            <a:spLocks noGrp="1"/>
-          </p:cNvSpPr>
-          <p:nvPr>
-            <p:ph type="sldNum" sz="quarter" idx="12"/>
+          <a:bodyPr xmlns:a="http://schemas.openxmlformats.org/drawingml/2006/main"/>
+          <a:lstStyle xmlns:a="http://schemas.openxmlformats.org/drawingml/2006/main"/>
+          <a:p xmlns:a="http://schemas.openxmlformats.org/drawingml/2006/main"/>
+        </p:txBody>
+      </p:sp>
+      <p:sp>
+        <p:nvSpPr>
+          <p:cNvPr id="6" name="Slide Number Placeholder 5">
+            <a:extLst xmlns:a="http://schemas.openxmlformats.org/drawingml/2006/main">
+              <a:ext uri="{FF2B5EF4-FFF2-40B4-BE49-F238E27FC236}">
+                <a16:creationId xmlns:a16="http://schemas.microsoft.com/office/drawing/2014/main" id="{2A2E3B47-FB56-4D84-A2AC-F9D0877B55AA}"/>
+              </a:ext>
+            </a:extLst>
+          </p:cNvPr>
+          <p:cNvSpPr>
+            <a:spLocks xmlns:a="http://schemas.openxmlformats.org/drawingml/2006/main" noGrp="1"/>
+          </p:cNvSpPr>
+          <p:nvPr>
+            <p:ph type="sldNum" idx="12"/>
           </p:nvPr>
         </p:nvSpPr>
         <p:spPr/>
         <p:txBody>
-          <a:bodyPr/>
-          <a:lstStyle/>
-          <a:p>
+          <a:bodyPr xmlns:a="http://schemas.openxmlformats.org/drawingml/2006/main"/>
+          <a:lstStyle xmlns:a="http://schemas.openxmlformats.org/drawingml/2006/main"/>
+          <a:p xmlns:a="http://schemas.openxmlformats.org/drawingml/2006/main">
             <a:fld id="{C1FF6DA9-008F-8B48-92A6-B652298478BF}" type="slidenum">
-              <a:rPr lang="en-US" smtClean="0"/>
               <a:t>‹#›</a:t>
             </a:fld>
-            <a:endParaRPr lang="en-US"/>
           </a:p>
         </p:txBody>
       </p:sp>
     </p:spTree>
-    <p:extLst>
-      <p:ext uri="{BB962C8B-B14F-4D97-AF65-F5344CB8AC3E}">
-        <p14:creationId xmlns:p14="http://schemas.microsoft.com/office/powerpoint/2010/main" val="960648375"/>
-      </p:ext>
-    </p:extLst>
   </p:cSld>
-  <p:clrMapOvr>
-    <a:masterClrMapping/>
-  </p:clrMapOvr>
 </p:sldLayout>
 </file>
 
 <file path=ppt/slideLayouts/slideLayout4.xml><?xml version="1.0" encoding="utf-8"?>
-<p:sldLayout xmlns:a="http://schemas.openxmlformats.org/drawingml/2006/main" xmlns:r="http://schemas.openxmlformats.org/officeDocument/2006/relationships" xmlns:p="http://schemas.openxmlformats.org/presentationml/2006/main" type="twoObj" preserve="1">
+<p:sldLayout xmlns:p="http://schemas.openxmlformats.org/presentationml/2006/main" type="twoObj" preserve="1">
   <p:cSld name="Two Content">
     <p:spTree>
       <p:nvGrpSpPr>
@@ -1130,286 +1980,327 @@
         <p:nvPr/>
       </p:nvGrpSpPr>
       <p:grpSpPr>
-        <a:xfrm>
-          <a:off x="0" y="0"/>
-          <a:ext cx="0" cy="0"/>
-          <a:chOff x="0" y="0"/>
-          <a:chExt cx="0" cy="0"/>
-        </a:xfrm>
+        <a:xfrm xmlns:a="http://schemas.openxmlformats.org/drawingml/2006/main"/>
       </p:grpSpPr>
       <p:sp>
         <p:nvSpPr>
-          <p:cNvPr id="2" name="Title 1"/>
-          <p:cNvSpPr>
-            <a:spLocks noGrp="1"/>
-          </p:cNvSpPr>
-          <p:nvPr>
-            <p:ph type="title"/>
+          <p:cNvPr id="2" name="Title 1">
+            <a:extLst xmlns:a="http://schemas.openxmlformats.org/drawingml/2006/main">
+              <a:ext uri="{FF2B5EF4-FFF2-40B4-BE49-F238E27FC236}">
+                <a16:creationId xmlns:a16="http://schemas.microsoft.com/office/drawing/2014/main" id="{5EFE4548-906B-41A7-A7EC-C934A1BA60DE}"/>
+              </a:ext>
+            </a:extLst>
+          </p:cNvPr>
+          <p:cNvSpPr>
+            <a:spLocks xmlns:a="http://schemas.openxmlformats.org/drawingml/2006/main" noGrp="1"/>
+          </p:cNvSpPr>
+          <p:nvPr>
+            <p:ph type="title" idx="0"/>
           </p:nvPr>
         </p:nvSpPr>
         <p:spPr/>
         <p:txBody>
-          <a:bodyPr/>
-          <a:lstStyle/>
-          <a:p>
-            <a:r>
-              <a:rPr lang="en-US" smtClean="0"/>
+          <a:bodyPr xmlns:a="http://schemas.openxmlformats.org/drawingml/2006/main"/>
+          <a:lstStyle xmlns:a="http://schemas.openxmlformats.org/drawingml/2006/main"/>
+          <a:p xmlns:a="http://schemas.openxmlformats.org/drawingml/2006/main">
+            <a:r>
               <a:t>Click to edit Master title style</a:t>
             </a:r>
-            <a:endParaRPr lang="en-US"/>
-          </a:p>
-        </p:txBody>
-      </p:sp>
-      <p:sp>
-        <p:nvSpPr>
-          <p:cNvPr id="3" name="Content Placeholder 2"/>
-          <p:cNvSpPr>
-            <a:spLocks noGrp="1"/>
-          </p:cNvSpPr>
-          <p:nvPr>
-            <p:ph sz="half" idx="1"/>
-          </p:nvPr>
-        </p:nvSpPr>
-        <p:spPr>
-          <a:xfrm>
+          </a:p>
+        </p:txBody>
+      </p:sp>
+      <p:sp>
+        <p:nvSpPr>
+          <p:cNvPr id="3" name="Content Placeholder 2">
+            <a:extLst xmlns:a="http://schemas.openxmlformats.org/drawingml/2006/main">
+              <a:ext uri="{FF2B5EF4-FFF2-40B4-BE49-F238E27FC236}">
+                <a16:creationId xmlns:a16="http://schemas.microsoft.com/office/drawing/2014/main" id="{B0A154BA-44C7-49B7-974A-A49AF7440C8F}"/>
+              </a:ext>
+            </a:extLst>
+          </p:cNvPr>
+          <p:cNvSpPr>
+            <a:spLocks xmlns:a="http://schemas.openxmlformats.org/drawingml/2006/main" noGrp="1"/>
+          </p:cNvSpPr>
+          <p:nvPr>
+            <p:ph idx="1"/>
+          </p:nvPr>
+        </p:nvSpPr>
+        <p:spPr>
+          <a:xfrm xmlns:a="http://schemas.openxmlformats.org/drawingml/2006/main">
             <a:off x="457200" y="1600200"/>
             <a:ext cx="4038600" cy="4525963"/>
           </a:xfrm>
         </p:spPr>
         <p:txBody>
-          <a:bodyPr/>
-          <a:lstStyle>
+          <a:bodyPr xmlns:a="http://schemas.openxmlformats.org/drawingml/2006/main"/>
+          <a:lstStyle xmlns:a="http://schemas.openxmlformats.org/drawingml/2006/main">
             <a:lvl1pPr>
+              <a:buNone/>
               <a:defRPr sz="2800"/>
             </a:lvl1pPr>
             <a:lvl2pPr>
+              <a:buNone/>
               <a:defRPr sz="2400"/>
             </a:lvl2pPr>
             <a:lvl3pPr>
+              <a:buNone/>
               <a:defRPr sz="2000"/>
             </a:lvl3pPr>
             <a:lvl4pPr>
+              <a:buNone/>
               <a:defRPr sz="1800"/>
             </a:lvl4pPr>
             <a:lvl5pPr>
+              <a:buNone/>
               <a:defRPr sz="1800"/>
             </a:lvl5pPr>
             <a:lvl6pPr>
+              <a:buNone/>
               <a:defRPr sz="1800"/>
             </a:lvl6pPr>
             <a:lvl7pPr>
+              <a:buNone/>
               <a:defRPr sz="1800"/>
             </a:lvl7pPr>
             <a:lvl8pPr>
+              <a:buNone/>
               <a:defRPr sz="1800"/>
             </a:lvl8pPr>
             <a:lvl9pPr>
+              <a:buNone/>
               <a:defRPr sz="1800"/>
             </a:lvl9pPr>
           </a:lstStyle>
-          <a:p>
-            <a:pPr lvl="0"/>
-            <a:r>
-              <a:rPr lang="en-US" smtClean="0"/>
+          <a:p xmlns:a="http://schemas.openxmlformats.org/drawingml/2006/main">
+            <a:pPr lvl="0">
+              <a:buNone/>
+            </a:pPr>
+            <a:r>
               <a:t>Click to edit Master text styles</a:t>
             </a:r>
           </a:p>
-          <a:p>
-            <a:pPr lvl="1"/>
-            <a:r>
-              <a:rPr lang="en-US" smtClean="0"/>
+          <a:p xmlns:a="http://schemas.openxmlformats.org/drawingml/2006/main">
+            <a:pPr lvl="1">
+              <a:buNone/>
+            </a:pPr>
+            <a:r>
               <a:t>Second level</a:t>
             </a:r>
           </a:p>
-          <a:p>
-            <a:pPr lvl="2"/>
-            <a:r>
-              <a:rPr lang="en-US" smtClean="0"/>
+          <a:p xmlns:a="http://schemas.openxmlformats.org/drawingml/2006/main">
+            <a:pPr lvl="2">
+              <a:buNone/>
+            </a:pPr>
+            <a:r>
               <a:t>Third level</a:t>
             </a:r>
           </a:p>
-          <a:p>
-            <a:pPr lvl="3"/>
-            <a:r>
-              <a:rPr lang="en-US" smtClean="0"/>
+          <a:p xmlns:a="http://schemas.openxmlformats.org/drawingml/2006/main">
+            <a:pPr lvl="3">
+              <a:buNone/>
+            </a:pPr>
+            <a:r>
               <a:t>Fourth level</a:t>
             </a:r>
           </a:p>
-          <a:p>
-            <a:pPr lvl="4"/>
-            <a:r>
-              <a:rPr lang="en-US" smtClean="0"/>
+          <a:p xmlns:a="http://schemas.openxmlformats.org/drawingml/2006/main">
+            <a:pPr lvl="4">
+              <a:buNone/>
+            </a:pPr>
+            <a:r>
               <a:t>Fifth level</a:t>
             </a:r>
-            <a:endParaRPr lang="en-US"/>
-          </a:p>
-        </p:txBody>
-      </p:sp>
-      <p:sp>
-        <p:nvSpPr>
-          <p:cNvPr id="4" name="Content Placeholder 3"/>
-          <p:cNvSpPr>
-            <a:spLocks noGrp="1"/>
-          </p:cNvSpPr>
-          <p:nvPr>
-            <p:ph sz="half" idx="2"/>
-          </p:nvPr>
-        </p:nvSpPr>
-        <p:spPr>
-          <a:xfrm>
+          </a:p>
+        </p:txBody>
+      </p:sp>
+      <p:sp>
+        <p:nvSpPr>
+          <p:cNvPr id="4" name="Content Placeholder 3">
+            <a:extLst xmlns:a="http://schemas.openxmlformats.org/drawingml/2006/main">
+              <a:ext uri="{FF2B5EF4-FFF2-40B4-BE49-F238E27FC236}">
+                <a16:creationId xmlns:a16="http://schemas.microsoft.com/office/drawing/2014/main" id="{C728082D-2A14-42B5-9333-0E35848D741C}"/>
+              </a:ext>
+            </a:extLst>
+          </p:cNvPr>
+          <p:cNvSpPr>
+            <a:spLocks xmlns:a="http://schemas.openxmlformats.org/drawingml/2006/main" noGrp="1"/>
+          </p:cNvSpPr>
+          <p:nvPr>
+            <p:ph idx="2"/>
+          </p:nvPr>
+        </p:nvSpPr>
+        <p:spPr>
+          <a:xfrm xmlns:a="http://schemas.openxmlformats.org/drawingml/2006/main">
             <a:off x="4648200" y="1600200"/>
             <a:ext cx="4038600" cy="4525963"/>
           </a:xfrm>
         </p:spPr>
         <p:txBody>
-          <a:bodyPr/>
-          <a:lstStyle>
+          <a:bodyPr xmlns:a="http://schemas.openxmlformats.org/drawingml/2006/main"/>
+          <a:lstStyle xmlns:a="http://schemas.openxmlformats.org/drawingml/2006/main">
             <a:lvl1pPr>
+              <a:buNone/>
               <a:defRPr sz="2800"/>
             </a:lvl1pPr>
             <a:lvl2pPr>
+              <a:buNone/>
               <a:defRPr sz="2400"/>
             </a:lvl2pPr>
             <a:lvl3pPr>
+              <a:buNone/>
               <a:defRPr sz="2000"/>
             </a:lvl3pPr>
             <a:lvl4pPr>
+              <a:buNone/>
               <a:defRPr sz="1800"/>
             </a:lvl4pPr>
             <a:lvl5pPr>
+              <a:buNone/>
               <a:defRPr sz="1800"/>
             </a:lvl5pPr>
             <a:lvl6pPr>
+              <a:buNone/>
               <a:defRPr sz="1800"/>
             </a:lvl6pPr>
             <a:lvl7pPr>
+              <a:buNone/>
               <a:defRPr sz="1800"/>
             </a:lvl7pPr>
             <a:lvl8pPr>
+              <a:buNone/>
               <a:defRPr sz="1800"/>
             </a:lvl8pPr>
             <a:lvl9pPr>
+              <a:buNone/>
               <a:defRPr sz="1800"/>
             </a:lvl9pPr>
           </a:lstStyle>
-          <a:p>
-            <a:pPr lvl="0"/>
-            <a:r>
-              <a:rPr lang="en-US" smtClean="0"/>
+          <a:p xmlns:a="http://schemas.openxmlformats.org/drawingml/2006/main">
+            <a:pPr lvl="0">
+              <a:buNone/>
+            </a:pPr>
+            <a:r>
               <a:t>Click to edit Master text styles</a:t>
             </a:r>
           </a:p>
-          <a:p>
-            <a:pPr lvl="1"/>
-            <a:r>
-              <a:rPr lang="en-US" smtClean="0"/>
+          <a:p xmlns:a="http://schemas.openxmlformats.org/drawingml/2006/main">
+            <a:pPr lvl="1">
+              <a:buNone/>
+            </a:pPr>
+            <a:r>
               <a:t>Second level</a:t>
             </a:r>
           </a:p>
-          <a:p>
-            <a:pPr lvl="2"/>
-            <a:r>
-              <a:rPr lang="en-US" smtClean="0"/>
+          <a:p xmlns:a="http://schemas.openxmlformats.org/drawingml/2006/main">
+            <a:pPr lvl="2">
+              <a:buNone/>
+            </a:pPr>
+            <a:r>
               <a:t>Third level</a:t>
             </a:r>
           </a:p>
-          <a:p>
-            <a:pPr lvl="3"/>
-            <a:r>
-              <a:rPr lang="en-US" smtClean="0"/>
+          <a:p xmlns:a="http://schemas.openxmlformats.org/drawingml/2006/main">
+            <a:pPr lvl="3">
+              <a:buNone/>
+            </a:pPr>
+            <a:r>
               <a:t>Fourth level</a:t>
             </a:r>
           </a:p>
-          <a:p>
-            <a:pPr lvl="4"/>
-            <a:r>
-              <a:rPr lang="en-US" smtClean="0"/>
+          <a:p xmlns:a="http://schemas.openxmlformats.org/drawingml/2006/main">
+            <a:pPr lvl="4">
+              <a:buNone/>
+            </a:pPr>
+            <a:r>
               <a:t>Fifth level</a:t>
             </a:r>
-            <a:endParaRPr lang="en-US"/>
-          </a:p>
-        </p:txBody>
-      </p:sp>
-      <p:sp>
-        <p:nvSpPr>
-          <p:cNvPr id="5" name="Date Placeholder 4"/>
-          <p:cNvSpPr>
-            <a:spLocks noGrp="1"/>
-          </p:cNvSpPr>
-          <p:nvPr>
-            <p:ph type="dt" sz="half" idx="10"/>
+          </a:p>
+        </p:txBody>
+      </p:sp>
+      <p:sp>
+        <p:nvSpPr>
+          <p:cNvPr id="5" name="Date Placeholder 4">
+            <a:extLst xmlns:a="http://schemas.openxmlformats.org/drawingml/2006/main">
+              <a:ext uri="{FF2B5EF4-FFF2-40B4-BE49-F238E27FC236}">
+                <a16:creationId xmlns:a16="http://schemas.microsoft.com/office/drawing/2014/main" id="{D78B7FA8-1A79-490E-975A-35F6352D11E2}"/>
+              </a:ext>
+            </a:extLst>
+          </p:cNvPr>
+          <p:cNvSpPr>
+            <a:spLocks xmlns:a="http://schemas.openxmlformats.org/drawingml/2006/main" noGrp="1"/>
+          </p:cNvSpPr>
+          <p:nvPr>
+            <p:ph type="dt" idx="10"/>
           </p:nvPr>
         </p:nvSpPr>
         <p:spPr/>
         <p:txBody>
-          <a:bodyPr/>
-          <a:lstStyle/>
-          <a:p>
+          <a:bodyPr xmlns:a="http://schemas.openxmlformats.org/drawingml/2006/main"/>
+          <a:lstStyle xmlns:a="http://schemas.openxmlformats.org/drawingml/2006/main"/>
+          <a:p xmlns:a="http://schemas.openxmlformats.org/drawingml/2006/main">
             <a:fld id="{5BCAD085-E8A6-8845-BD4E-CB4CCA059FC4}" type="datetimeFigureOut">
-              <a:rPr lang="en-US" smtClean="0"/>
               <a:t>1/27/13</a:t>
             </a:fld>
-            <a:endParaRPr lang="en-US"/>
-          </a:p>
-        </p:txBody>
-      </p:sp>
-      <p:sp>
-        <p:nvSpPr>
-          <p:cNvPr id="6" name="Footer Placeholder 5"/>
-          <p:cNvSpPr>
-            <a:spLocks noGrp="1"/>
-          </p:cNvSpPr>
-          <p:nvPr>
-            <p:ph type="ftr" sz="quarter" idx="11"/>
+          </a:p>
+        </p:txBody>
+      </p:sp>
+      <p:sp>
+        <p:nvSpPr>
+          <p:cNvPr id="6" name="Footer Placeholder 5">
+            <a:extLst xmlns:a="http://schemas.openxmlformats.org/drawingml/2006/main">
+              <a:ext uri="{FF2B5EF4-FFF2-40B4-BE49-F238E27FC236}">
+                <a16:creationId xmlns:a16="http://schemas.microsoft.com/office/drawing/2014/main" id="{EFE4A44B-A090-4F72-B12C-B8C9B4C0D217}"/>
+              </a:ext>
+            </a:extLst>
+          </p:cNvPr>
+          <p:cNvSpPr>
+            <a:spLocks xmlns:a="http://schemas.openxmlformats.org/drawingml/2006/main" noGrp="1"/>
+          </p:cNvSpPr>
+          <p:nvPr>
+            <p:ph type="ftr" idx="11"/>
           </p:nvPr>
         </p:nvSpPr>
         <p:spPr/>
         <p:txBody>
-          <a:bodyPr/>
-          <a:lstStyle/>
-          <a:p>
-            <a:endParaRPr lang="en-US"/>
-          </a:p>
-        </p:txBody>
-      </p:sp>
-      <p:sp>
-        <p:nvSpPr>
-          <p:cNvPr id="7" name="Slide Number Placeholder 6"/>
-          <p:cNvSpPr>
-            <a:spLocks noGrp="1"/>
-          </p:cNvSpPr>
-          <p:nvPr>
-            <p:ph type="sldNum" sz="quarter" idx="12"/>
+          <a:bodyPr xmlns:a="http://schemas.openxmlformats.org/drawingml/2006/main"/>
+          <a:lstStyle xmlns:a="http://schemas.openxmlformats.org/drawingml/2006/main"/>
+          <a:p xmlns:a="http://schemas.openxmlformats.org/drawingml/2006/main"/>
+        </p:txBody>
+      </p:sp>
+      <p:sp>
+        <p:nvSpPr>
+          <p:cNvPr id="7" name="Slide Number Placeholder 6">
+            <a:extLst xmlns:a="http://schemas.openxmlformats.org/drawingml/2006/main">
+              <a:ext uri="{FF2B5EF4-FFF2-40B4-BE49-F238E27FC236}">
+                <a16:creationId xmlns:a16="http://schemas.microsoft.com/office/drawing/2014/main" id="{FE36661E-51A3-4984-882D-1E99B7A24A75}"/>
+              </a:ext>
+            </a:extLst>
+          </p:cNvPr>
+          <p:cNvSpPr>
+            <a:spLocks xmlns:a="http://schemas.openxmlformats.org/drawingml/2006/main" noGrp="1"/>
+          </p:cNvSpPr>
+          <p:nvPr>
+            <p:ph type="sldNum" idx="12"/>
           </p:nvPr>
         </p:nvSpPr>
         <p:spPr/>
         <p:txBody>
-          <a:bodyPr/>
-          <a:lstStyle/>
-          <a:p>
+          <a:bodyPr xmlns:a="http://schemas.openxmlformats.org/drawingml/2006/main"/>
+          <a:lstStyle xmlns:a="http://schemas.openxmlformats.org/drawingml/2006/main"/>
+          <a:p xmlns:a="http://schemas.openxmlformats.org/drawingml/2006/main">
             <a:fld id="{C1FF6DA9-008F-8B48-92A6-B652298478BF}" type="slidenum">
-              <a:rPr lang="en-US" smtClean="0"/>
               <a:t>‹#›</a:t>
             </a:fld>
-            <a:endParaRPr lang="en-US"/>
           </a:p>
         </p:txBody>
       </p:sp>
     </p:spTree>
-    <p:extLst>
-      <p:ext uri="{BB962C8B-B14F-4D97-AF65-F5344CB8AC3E}">
-        <p14:creationId xmlns:p14="http://schemas.microsoft.com/office/powerpoint/2010/main" val="2782244947"/>
-      </p:ext>
-    </p:extLst>
   </p:cSld>
-  <p:clrMapOvr>
-    <a:masterClrMapping/>
-  </p:clrMapOvr>
 </p:sldLayout>
 </file>
 
 <file path=ppt/slideLayouts/slideLayout5.xml><?xml version="1.0" encoding="utf-8"?>
-<p:sldLayout xmlns:a="http://schemas.openxmlformats.org/drawingml/2006/main" xmlns:r="http://schemas.openxmlformats.org/officeDocument/2006/relationships" xmlns:p="http://schemas.openxmlformats.org/presentationml/2006/main" type="twoTxTwoObj" preserve="1">
+<p:sldLayout xmlns:p="http://schemas.openxmlformats.org/presentationml/2006/main" type="twoTxTwoObj" preserve="1">
   <p:cSld name="Comparison">
     <p:spTree>
       <p:nvGrpSpPr>
@@ -1418,59 +2309,65 @@
         <p:nvPr/>
       </p:nvGrpSpPr>
       <p:grpSpPr>
-        <a:xfrm>
-          <a:off x="0" y="0"/>
-          <a:ext cx="0" cy="0"/>
-          <a:chOff x="0" y="0"/>
-          <a:chExt cx="0" cy="0"/>
-        </a:xfrm>
+        <a:xfrm xmlns:a="http://schemas.openxmlformats.org/drawingml/2006/main"/>
       </p:grpSpPr>
       <p:sp>
         <p:nvSpPr>
-          <p:cNvPr id="2" name="Title 1"/>
-          <p:cNvSpPr>
-            <a:spLocks noGrp="1"/>
-          </p:cNvSpPr>
-          <p:nvPr>
-            <p:ph type="title"/>
+          <p:cNvPr id="2" name="Title 1">
+            <a:extLst xmlns:a="http://schemas.openxmlformats.org/drawingml/2006/main">
+              <a:ext uri="{FF2B5EF4-FFF2-40B4-BE49-F238E27FC236}">
+                <a16:creationId xmlns:a16="http://schemas.microsoft.com/office/drawing/2014/main" id="{585279D1-D14E-4478-A181-910F93473CC5}"/>
+              </a:ext>
+            </a:extLst>
+          </p:cNvPr>
+          <p:cNvSpPr>
+            <a:spLocks xmlns:a="http://schemas.openxmlformats.org/drawingml/2006/main" noGrp="1"/>
+          </p:cNvSpPr>
+          <p:nvPr>
+            <p:ph type="title" idx="0"/>
           </p:nvPr>
         </p:nvSpPr>
         <p:spPr/>
         <p:txBody>
-          <a:bodyPr/>
-          <a:lstStyle>
+          <a:bodyPr xmlns:a="http://schemas.openxmlformats.org/drawingml/2006/main"/>
+          <a:lstStyle xmlns:a="http://schemas.openxmlformats.org/drawingml/2006/main">
             <a:lvl1pPr>
+              <a:buNone/>
               <a:defRPr/>
             </a:lvl1pPr>
           </a:lstStyle>
-          <a:p>
-            <a:r>
-              <a:rPr lang="en-US" smtClean="0"/>
+          <a:p xmlns:a="http://schemas.openxmlformats.org/drawingml/2006/main">
+            <a:r>
               <a:t>Click to edit Master title style</a:t>
             </a:r>
-            <a:endParaRPr lang="en-US"/>
-          </a:p>
-        </p:txBody>
-      </p:sp>
-      <p:sp>
-        <p:nvSpPr>
-          <p:cNvPr id="3" name="Text Placeholder 2"/>
-          <p:cNvSpPr>
-            <a:spLocks noGrp="1"/>
+          </a:p>
+        </p:txBody>
+      </p:sp>
+      <p:sp>
+        <p:nvSpPr>
+          <p:cNvPr id="3" name="Text Placeholder 2">
+            <a:extLst xmlns:a="http://schemas.openxmlformats.org/drawingml/2006/main">
+              <a:ext uri="{FF2B5EF4-FFF2-40B4-BE49-F238E27FC236}">
+                <a16:creationId xmlns:a16="http://schemas.microsoft.com/office/drawing/2014/main" id="{2818FBB7-0D5C-4AEE-9ABC-00557A2D5C2C}"/>
+              </a:ext>
+            </a:extLst>
+          </p:cNvPr>
+          <p:cNvSpPr>
+            <a:spLocks xmlns:a="http://schemas.openxmlformats.org/drawingml/2006/main" noGrp="1"/>
           </p:cNvSpPr>
           <p:nvPr>
             <p:ph type="body" idx="1"/>
           </p:nvPr>
         </p:nvSpPr>
         <p:spPr>
-          <a:xfrm>
+          <a:xfrm xmlns:a="http://schemas.openxmlformats.org/drawingml/2006/main">
             <a:off x="457200" y="1535113"/>
             <a:ext cx="4040188" cy="639762"/>
           </a:xfrm>
         </p:spPr>
         <p:txBody>
-          <a:bodyPr anchor="b"/>
-          <a:lstStyle>
+          <a:bodyPr xmlns:a="http://schemas.openxmlformats.org/drawingml/2006/main" anchor="b"/>
+          <a:lstStyle xmlns:a="http://schemas.openxmlformats.org/drawingml/2006/main">
             <a:lvl1pPr marL="0" indent="0">
               <a:buNone/>
               <a:defRPr sz="2400" b="1"/>
@@ -1508,10 +2405,11 @@
               <a:defRPr sz="1600" b="1"/>
             </a:lvl9pPr>
           </a:lstStyle>
-          <a:p>
-            <a:pPr lvl="0"/>
-            <a:r>
-              <a:rPr lang="en-US" smtClean="0"/>
+          <a:p xmlns:a="http://schemas.openxmlformats.org/drawingml/2006/main">
+            <a:pPr lvl="0">
+              <a:buNone/>
+            </a:pPr>
+            <a:r>
               <a:t>Click to edit Master text styles</a:t>
             </a:r>
           </a:p>
@@ -1519,108 +2417,133 @@
       </p:sp>
       <p:sp>
         <p:nvSpPr>
-          <p:cNvPr id="4" name="Content Placeholder 3"/>
-          <p:cNvSpPr>
-            <a:spLocks noGrp="1"/>
-          </p:cNvSpPr>
-          <p:nvPr>
-            <p:ph sz="half" idx="2"/>
-          </p:nvPr>
-        </p:nvSpPr>
-        <p:spPr>
-          <a:xfrm>
+          <p:cNvPr id="4" name="Content Placeholder 3">
+            <a:extLst xmlns:a="http://schemas.openxmlformats.org/drawingml/2006/main">
+              <a:ext uri="{FF2B5EF4-FFF2-40B4-BE49-F238E27FC236}">
+                <a16:creationId xmlns:a16="http://schemas.microsoft.com/office/drawing/2014/main" id="{97C28351-307F-48F5-AD6E-BD622E52B5B3}"/>
+              </a:ext>
+            </a:extLst>
+          </p:cNvPr>
+          <p:cNvSpPr>
+            <a:spLocks xmlns:a="http://schemas.openxmlformats.org/drawingml/2006/main" noGrp="1"/>
+          </p:cNvSpPr>
+          <p:nvPr>
+            <p:ph idx="2"/>
+          </p:nvPr>
+        </p:nvSpPr>
+        <p:spPr>
+          <a:xfrm xmlns:a="http://schemas.openxmlformats.org/drawingml/2006/main">
             <a:off x="457200" y="2174875"/>
             <a:ext cx="4040188" cy="3951288"/>
           </a:xfrm>
         </p:spPr>
         <p:txBody>
-          <a:bodyPr/>
-          <a:lstStyle>
+          <a:bodyPr xmlns:a="http://schemas.openxmlformats.org/drawingml/2006/main"/>
+          <a:lstStyle xmlns:a="http://schemas.openxmlformats.org/drawingml/2006/main">
             <a:lvl1pPr>
+              <a:buNone/>
               <a:defRPr sz="2400"/>
             </a:lvl1pPr>
             <a:lvl2pPr>
+              <a:buNone/>
               <a:defRPr sz="2000"/>
             </a:lvl2pPr>
             <a:lvl3pPr>
+              <a:buNone/>
               <a:defRPr sz="1800"/>
             </a:lvl3pPr>
             <a:lvl4pPr>
+              <a:buNone/>
               <a:defRPr sz="1600"/>
             </a:lvl4pPr>
             <a:lvl5pPr>
+              <a:buNone/>
               <a:defRPr sz="1600"/>
             </a:lvl5pPr>
             <a:lvl6pPr>
+              <a:buNone/>
               <a:defRPr sz="1600"/>
             </a:lvl6pPr>
             <a:lvl7pPr>
+              <a:buNone/>
               <a:defRPr sz="1600"/>
             </a:lvl7pPr>
             <a:lvl8pPr>
+              <a:buNone/>
               <a:defRPr sz="1600"/>
             </a:lvl8pPr>
             <a:lvl9pPr>
+              <a:buNone/>
               <a:defRPr sz="1600"/>
             </a:lvl9pPr>
           </a:lstStyle>
-          <a:p>
-            <a:pPr lvl="0"/>
-            <a:r>
-              <a:rPr lang="en-US" smtClean="0"/>
+          <a:p xmlns:a="http://schemas.openxmlformats.org/drawingml/2006/main">
+            <a:pPr lvl="0">
+              <a:buNone/>
+            </a:pPr>
+            <a:r>
               <a:t>Click to edit Master text styles</a:t>
             </a:r>
           </a:p>
-          <a:p>
-            <a:pPr lvl="1"/>
-            <a:r>
-              <a:rPr lang="en-US" smtClean="0"/>
+          <a:p xmlns:a="http://schemas.openxmlformats.org/drawingml/2006/main">
+            <a:pPr lvl="1">
+              <a:buNone/>
+            </a:pPr>
+            <a:r>
               <a:t>Second level</a:t>
             </a:r>
           </a:p>
-          <a:p>
-            <a:pPr lvl="2"/>
-            <a:r>
-              <a:rPr lang="en-US" smtClean="0"/>
+          <a:p xmlns:a="http://schemas.openxmlformats.org/drawingml/2006/main">
+            <a:pPr lvl="2">
+              <a:buNone/>
+            </a:pPr>
+            <a:r>
               <a:t>Third level</a:t>
             </a:r>
           </a:p>
-          <a:p>
-            <a:pPr lvl="3"/>
-            <a:r>
-              <a:rPr lang="en-US" smtClean="0"/>
+          <a:p xmlns:a="http://schemas.openxmlformats.org/drawingml/2006/main">
+            <a:pPr lvl="3">
+              <a:buNone/>
+            </a:pPr>
+            <a:r>
               <a:t>Fourth level</a:t>
             </a:r>
           </a:p>
-          <a:p>
-            <a:pPr lvl="4"/>
-            <a:r>
-              <a:rPr lang="en-US" smtClean="0"/>
+          <a:p xmlns:a="http://schemas.openxmlformats.org/drawingml/2006/main">
+            <a:pPr lvl="4">
+              <a:buNone/>
+            </a:pPr>
+            <a:r>
               <a:t>Fifth level</a:t>
             </a:r>
-            <a:endParaRPr lang="en-US"/>
-          </a:p>
-        </p:txBody>
-      </p:sp>
-      <p:sp>
-        <p:nvSpPr>
-          <p:cNvPr id="5" name="Text Placeholder 4"/>
-          <p:cNvSpPr>
-            <a:spLocks noGrp="1"/>
-          </p:cNvSpPr>
-          <p:nvPr>
-            <p:ph type="body" sz="quarter" idx="3"/>
-          </p:nvPr>
-        </p:nvSpPr>
-        <p:spPr>
-          <a:xfrm>
+          </a:p>
+        </p:txBody>
+      </p:sp>
+      <p:sp>
+        <p:nvSpPr>
+          <p:cNvPr id="5" name="Text Placeholder 4">
+            <a:extLst xmlns:a="http://schemas.openxmlformats.org/drawingml/2006/main">
+              <a:ext uri="{FF2B5EF4-FFF2-40B4-BE49-F238E27FC236}">
+                <a16:creationId xmlns:a16="http://schemas.microsoft.com/office/drawing/2014/main" id="{9980A346-B052-4C2C-9BCF-2FDE8B4A9226}"/>
+              </a:ext>
+            </a:extLst>
+          </p:cNvPr>
+          <p:cNvSpPr>
+            <a:spLocks xmlns:a="http://schemas.openxmlformats.org/drawingml/2006/main" noGrp="1"/>
+          </p:cNvSpPr>
+          <p:nvPr>
+            <p:ph type="body" idx="3"/>
+          </p:nvPr>
+        </p:nvSpPr>
+        <p:spPr>
+          <a:xfrm xmlns:a="http://schemas.openxmlformats.org/drawingml/2006/main">
             <a:off x="4645025" y="1535113"/>
             <a:ext cx="4041775" cy="639762"/>
           </a:xfrm>
         </p:spPr>
         <p:txBody>
-          <a:bodyPr anchor="b"/>
-          <a:lstStyle>
+          <a:bodyPr xmlns:a="http://schemas.openxmlformats.org/drawingml/2006/main" anchor="b"/>
+          <a:lstStyle xmlns:a="http://schemas.openxmlformats.org/drawingml/2006/main">
             <a:lvl1pPr marL="0" indent="0">
               <a:buNone/>
               <a:defRPr sz="2400" b="1"/>
@@ -1658,10 +2581,11 @@
               <a:defRPr sz="1600" b="1"/>
             </a:lvl9pPr>
           </a:lstStyle>
-          <a:p>
-            <a:pPr lvl="0"/>
-            <a:r>
-              <a:rPr lang="en-US" smtClean="0"/>
+          <a:p xmlns:a="http://schemas.openxmlformats.org/drawingml/2006/main">
+            <a:pPr lvl="0">
+              <a:buNone/>
+            </a:pPr>
+            <a:r>
               <a:t>Click to edit Master text styles</a:t>
             </a:r>
           </a:p>
@@ -1669,169 +2593,192 @@
       </p:sp>
       <p:sp>
         <p:nvSpPr>
-          <p:cNvPr id="6" name="Content Placeholder 5"/>
-          <p:cNvSpPr>
-            <a:spLocks noGrp="1"/>
-          </p:cNvSpPr>
-          <p:nvPr>
-            <p:ph sz="quarter" idx="4"/>
-          </p:nvPr>
-        </p:nvSpPr>
-        <p:spPr>
-          <a:xfrm>
+          <p:cNvPr id="6" name="Content Placeholder 5">
+            <a:extLst xmlns:a="http://schemas.openxmlformats.org/drawingml/2006/main">
+              <a:ext uri="{FF2B5EF4-FFF2-40B4-BE49-F238E27FC236}">
+                <a16:creationId xmlns:a16="http://schemas.microsoft.com/office/drawing/2014/main" id="{C3C1FCCF-0BA3-41A7-83C6-895DAAA39776}"/>
+              </a:ext>
+            </a:extLst>
+          </p:cNvPr>
+          <p:cNvSpPr>
+            <a:spLocks xmlns:a="http://schemas.openxmlformats.org/drawingml/2006/main" noGrp="1"/>
+          </p:cNvSpPr>
+          <p:nvPr>
+            <p:ph idx="4"/>
+          </p:nvPr>
+        </p:nvSpPr>
+        <p:spPr>
+          <a:xfrm xmlns:a="http://schemas.openxmlformats.org/drawingml/2006/main">
             <a:off x="4645025" y="2174875"/>
             <a:ext cx="4041775" cy="3951288"/>
           </a:xfrm>
         </p:spPr>
         <p:txBody>
-          <a:bodyPr/>
-          <a:lstStyle>
+          <a:bodyPr xmlns:a="http://schemas.openxmlformats.org/drawingml/2006/main"/>
+          <a:lstStyle xmlns:a="http://schemas.openxmlformats.org/drawingml/2006/main">
             <a:lvl1pPr>
+              <a:buNone/>
               <a:defRPr sz="2400"/>
             </a:lvl1pPr>
             <a:lvl2pPr>
+              <a:buNone/>
               <a:defRPr sz="2000"/>
             </a:lvl2pPr>
             <a:lvl3pPr>
+              <a:buNone/>
               <a:defRPr sz="1800"/>
             </a:lvl3pPr>
             <a:lvl4pPr>
+              <a:buNone/>
               <a:defRPr sz="1600"/>
             </a:lvl4pPr>
             <a:lvl5pPr>
+              <a:buNone/>
               <a:defRPr sz="1600"/>
             </a:lvl5pPr>
             <a:lvl6pPr>
+              <a:buNone/>
               <a:defRPr sz="1600"/>
             </a:lvl6pPr>
             <a:lvl7pPr>
+              <a:buNone/>
               <a:defRPr sz="1600"/>
             </a:lvl7pPr>
             <a:lvl8pPr>
+              <a:buNone/>
               <a:defRPr sz="1600"/>
             </a:lvl8pPr>
             <a:lvl9pPr>
+              <a:buNone/>
               <a:defRPr sz="1600"/>
             </a:lvl9pPr>
           </a:lstStyle>
-          <a:p>
-            <a:pPr lvl="0"/>
-            <a:r>
-              <a:rPr lang="en-US" smtClean="0"/>
+          <a:p xmlns:a="http://schemas.openxmlformats.org/drawingml/2006/main">
+            <a:pPr lvl="0">
+              <a:buNone/>
+            </a:pPr>
+            <a:r>
               <a:t>Click to edit Master text styles</a:t>
             </a:r>
           </a:p>
-          <a:p>
-            <a:pPr lvl="1"/>
-            <a:r>
-              <a:rPr lang="en-US" smtClean="0"/>
+          <a:p xmlns:a="http://schemas.openxmlformats.org/drawingml/2006/main">
+            <a:pPr lvl="1">
+              <a:buNone/>
+            </a:pPr>
+            <a:r>
               <a:t>Second level</a:t>
             </a:r>
           </a:p>
-          <a:p>
-            <a:pPr lvl="2"/>
-            <a:r>
-              <a:rPr lang="en-US" smtClean="0"/>
+          <a:p xmlns:a="http://schemas.openxmlformats.org/drawingml/2006/main">
+            <a:pPr lvl="2">
+              <a:buNone/>
+            </a:pPr>
+            <a:r>
               <a:t>Third level</a:t>
             </a:r>
           </a:p>
-          <a:p>
-            <a:pPr lvl="3"/>
-            <a:r>
-              <a:rPr lang="en-US" smtClean="0"/>
+          <a:p xmlns:a="http://schemas.openxmlformats.org/drawingml/2006/main">
+            <a:pPr lvl="3">
+              <a:buNone/>
+            </a:pPr>
+            <a:r>
               <a:t>Fourth level</a:t>
             </a:r>
           </a:p>
-          <a:p>
-            <a:pPr lvl="4"/>
-            <a:r>
-              <a:rPr lang="en-US" smtClean="0"/>
+          <a:p xmlns:a="http://schemas.openxmlformats.org/drawingml/2006/main">
+            <a:pPr lvl="4">
+              <a:buNone/>
+            </a:pPr>
+            <a:r>
               <a:t>Fifth level</a:t>
             </a:r>
-            <a:endParaRPr lang="en-US"/>
-          </a:p>
-        </p:txBody>
-      </p:sp>
-      <p:sp>
-        <p:nvSpPr>
-          <p:cNvPr id="7" name="Date Placeholder 6"/>
-          <p:cNvSpPr>
-            <a:spLocks noGrp="1"/>
-          </p:cNvSpPr>
-          <p:nvPr>
-            <p:ph type="dt" sz="half" idx="10"/>
+          </a:p>
+        </p:txBody>
+      </p:sp>
+      <p:sp>
+        <p:nvSpPr>
+          <p:cNvPr id="7" name="Date Placeholder 6">
+            <a:extLst xmlns:a="http://schemas.openxmlformats.org/drawingml/2006/main">
+              <a:ext uri="{FF2B5EF4-FFF2-40B4-BE49-F238E27FC236}">
+                <a16:creationId xmlns:a16="http://schemas.microsoft.com/office/drawing/2014/main" id="{CAC67A38-7131-4439-9297-7ED8F7C5196E}"/>
+              </a:ext>
+            </a:extLst>
+          </p:cNvPr>
+          <p:cNvSpPr>
+            <a:spLocks xmlns:a="http://schemas.openxmlformats.org/drawingml/2006/main" noGrp="1"/>
+          </p:cNvSpPr>
+          <p:nvPr>
+            <p:ph type="dt" idx="10"/>
           </p:nvPr>
         </p:nvSpPr>
         <p:spPr/>
         <p:txBody>
-          <a:bodyPr/>
-          <a:lstStyle/>
-          <a:p>
+          <a:bodyPr xmlns:a="http://schemas.openxmlformats.org/drawingml/2006/main"/>
+          <a:lstStyle xmlns:a="http://schemas.openxmlformats.org/drawingml/2006/main"/>
+          <a:p xmlns:a="http://schemas.openxmlformats.org/drawingml/2006/main">
             <a:fld id="{5BCAD085-E8A6-8845-BD4E-CB4CCA059FC4}" type="datetimeFigureOut">
-              <a:rPr lang="en-US" smtClean="0"/>
               <a:t>1/27/13</a:t>
             </a:fld>
-            <a:endParaRPr lang="en-US"/>
-          </a:p>
-        </p:txBody>
-      </p:sp>
-      <p:sp>
-        <p:nvSpPr>
-          <p:cNvPr id="8" name="Footer Placeholder 7"/>
-          <p:cNvSpPr>
-            <a:spLocks noGrp="1"/>
-          </p:cNvSpPr>
-          <p:nvPr>
-            <p:ph type="ftr" sz="quarter" idx="11"/>
+          </a:p>
+        </p:txBody>
+      </p:sp>
+      <p:sp>
+        <p:nvSpPr>
+          <p:cNvPr id="8" name="Footer Placeholder 7">
+            <a:extLst xmlns:a="http://schemas.openxmlformats.org/drawingml/2006/main">
+              <a:ext uri="{FF2B5EF4-FFF2-40B4-BE49-F238E27FC236}">
+                <a16:creationId xmlns:a16="http://schemas.microsoft.com/office/drawing/2014/main" id="{95698E66-0823-4B8C-BCE9-AAEB9CCFACC8}"/>
+              </a:ext>
+            </a:extLst>
+          </p:cNvPr>
+          <p:cNvSpPr>
+            <a:spLocks xmlns:a="http://schemas.openxmlformats.org/drawingml/2006/main" noGrp="1"/>
+          </p:cNvSpPr>
+          <p:nvPr>
+            <p:ph type="ftr" idx="11"/>
           </p:nvPr>
         </p:nvSpPr>
         <p:spPr/>
         <p:txBody>
-          <a:bodyPr/>
-          <a:lstStyle/>
-          <a:p>
-            <a:endParaRPr lang="en-US"/>
-          </a:p>
-        </p:txBody>
-      </p:sp>
-      <p:sp>
-        <p:nvSpPr>
-          <p:cNvPr id="9" name="Slide Number Placeholder 8"/>
-          <p:cNvSpPr>
-            <a:spLocks noGrp="1"/>
-          </p:cNvSpPr>
-          <p:nvPr>
-            <p:ph type="sldNum" sz="quarter" idx="12"/>
+          <a:bodyPr xmlns:a="http://schemas.openxmlformats.org/drawingml/2006/main"/>
+          <a:lstStyle xmlns:a="http://schemas.openxmlformats.org/drawingml/2006/main"/>
+          <a:p xmlns:a="http://schemas.openxmlformats.org/drawingml/2006/main"/>
+        </p:txBody>
+      </p:sp>
+      <p:sp>
+        <p:nvSpPr>
+          <p:cNvPr id="9" name="Slide Number Placeholder 8">
+            <a:extLst xmlns:a="http://schemas.openxmlformats.org/drawingml/2006/main">
+              <a:ext uri="{FF2B5EF4-FFF2-40B4-BE49-F238E27FC236}">
+                <a16:creationId xmlns:a16="http://schemas.microsoft.com/office/drawing/2014/main" id="{D44AE560-CB48-4526-80C4-41DBC1F2FF66}"/>
+              </a:ext>
+            </a:extLst>
+          </p:cNvPr>
+          <p:cNvSpPr>
+            <a:spLocks xmlns:a="http://schemas.openxmlformats.org/drawingml/2006/main" noGrp="1"/>
+          </p:cNvSpPr>
+          <p:nvPr>
+            <p:ph type="sldNum" idx="12"/>
           </p:nvPr>
         </p:nvSpPr>
         <p:spPr/>
         <p:txBody>
-          <a:bodyPr/>
-          <a:lstStyle/>
-          <a:p>
+          <a:bodyPr xmlns:a="http://schemas.openxmlformats.org/drawingml/2006/main"/>
+          <a:lstStyle xmlns:a="http://schemas.openxmlformats.org/drawingml/2006/main"/>
+          <a:p xmlns:a="http://schemas.openxmlformats.org/drawingml/2006/main">
             <a:fld id="{C1FF6DA9-008F-8B48-92A6-B652298478BF}" type="slidenum">
-              <a:rPr lang="en-US" smtClean="0"/>
               <a:t>‹#›</a:t>
             </a:fld>
-            <a:endParaRPr lang="en-US"/>
           </a:p>
         </p:txBody>
       </p:sp>
     </p:spTree>
-    <p:extLst>
-      <p:ext uri="{BB962C8B-B14F-4D97-AF65-F5344CB8AC3E}">
-        <p14:creationId xmlns:p14="http://schemas.microsoft.com/office/powerpoint/2010/main" val="990158736"/>
-      </p:ext>
-    </p:extLst>
   </p:cSld>
-  <p:clrMapOvr>
-    <a:masterClrMapping/>
-  </p:clrMapOvr>
 </p:sldLayout>
 </file>
 
 <file path=ppt/slideLayouts/slideLayout6.xml><?xml version="1.0" encoding="utf-8"?>
-<p:sldLayout xmlns:a="http://schemas.openxmlformats.org/drawingml/2006/main" xmlns:r="http://schemas.openxmlformats.org/officeDocument/2006/relationships" xmlns:p="http://schemas.openxmlformats.org/presentationml/2006/main" type="titleOnly" preserve="1">
+<p:sldLayout xmlns:p="http://schemas.openxmlformats.org/presentationml/2006/main" type="titleOnly" preserve="1">
   <p:cSld name="Title Only">
     <p:spTree>
       <p:nvGrpSpPr>
@@ -1840,116 +2787,119 @@
         <p:nvPr/>
       </p:nvGrpSpPr>
       <p:grpSpPr>
-        <a:xfrm>
-          <a:off x="0" y="0"/>
-          <a:ext cx="0" cy="0"/>
-          <a:chOff x="0" y="0"/>
-          <a:chExt cx="0" cy="0"/>
-        </a:xfrm>
+        <a:xfrm xmlns:a="http://schemas.openxmlformats.org/drawingml/2006/main"/>
       </p:grpSpPr>
       <p:sp>
         <p:nvSpPr>
-          <p:cNvPr id="2" name="Title 1"/>
-          <p:cNvSpPr>
-            <a:spLocks noGrp="1"/>
-          </p:cNvSpPr>
-          <p:nvPr>
-            <p:ph type="title"/>
+          <p:cNvPr id="2" name="Title 1">
+            <a:extLst xmlns:a="http://schemas.openxmlformats.org/drawingml/2006/main">
+              <a:ext uri="{FF2B5EF4-FFF2-40B4-BE49-F238E27FC236}">
+                <a16:creationId xmlns:a16="http://schemas.microsoft.com/office/drawing/2014/main" id="{93CCA076-7F8C-4E9A-BD91-CF08EC92284A}"/>
+              </a:ext>
+            </a:extLst>
+          </p:cNvPr>
+          <p:cNvSpPr>
+            <a:spLocks xmlns:a="http://schemas.openxmlformats.org/drawingml/2006/main" noGrp="1"/>
+          </p:cNvSpPr>
+          <p:nvPr>
+            <p:ph type="title" idx="0"/>
           </p:nvPr>
         </p:nvSpPr>
         <p:spPr/>
         <p:txBody>
-          <a:bodyPr/>
-          <a:lstStyle/>
-          <a:p>
-            <a:r>
-              <a:rPr lang="en-US" smtClean="0"/>
+          <a:bodyPr xmlns:a="http://schemas.openxmlformats.org/drawingml/2006/main"/>
+          <a:lstStyle xmlns:a="http://schemas.openxmlformats.org/drawingml/2006/main"/>
+          <a:p xmlns:a="http://schemas.openxmlformats.org/drawingml/2006/main">
+            <a:r>
               <a:t>Click to edit Master title style</a:t>
             </a:r>
-            <a:endParaRPr lang="en-US"/>
-          </a:p>
-        </p:txBody>
-      </p:sp>
-      <p:sp>
-        <p:nvSpPr>
-          <p:cNvPr id="3" name="Date Placeholder 2"/>
-          <p:cNvSpPr>
-            <a:spLocks noGrp="1"/>
-          </p:cNvSpPr>
-          <p:nvPr>
-            <p:ph type="dt" sz="half" idx="10"/>
+          </a:p>
+        </p:txBody>
+      </p:sp>
+      <p:sp>
+        <p:nvSpPr>
+          <p:cNvPr id="3" name="Date Placeholder 2">
+            <a:extLst xmlns:a="http://schemas.openxmlformats.org/drawingml/2006/main">
+              <a:ext uri="{FF2B5EF4-FFF2-40B4-BE49-F238E27FC236}">
+                <a16:creationId xmlns:a16="http://schemas.microsoft.com/office/drawing/2014/main" id="{DB7BC71C-9517-4499-8D1C-176C60AA484D}"/>
+              </a:ext>
+            </a:extLst>
+          </p:cNvPr>
+          <p:cNvSpPr>
+            <a:spLocks xmlns:a="http://schemas.openxmlformats.org/drawingml/2006/main" noGrp="1"/>
+          </p:cNvSpPr>
+          <p:nvPr>
+            <p:ph type="dt" idx="10"/>
           </p:nvPr>
         </p:nvSpPr>
         <p:spPr/>
         <p:txBody>
-          <a:bodyPr/>
-          <a:lstStyle/>
-          <a:p>
+          <a:bodyPr xmlns:a="http://schemas.openxmlformats.org/drawingml/2006/main"/>
+          <a:lstStyle xmlns:a="http://schemas.openxmlformats.org/drawingml/2006/main"/>
+          <a:p xmlns:a="http://schemas.openxmlformats.org/drawingml/2006/main">
             <a:fld id="{5BCAD085-E8A6-8845-BD4E-CB4CCA059FC4}" type="datetimeFigureOut">
-              <a:rPr lang="en-US" smtClean="0"/>
               <a:t>1/27/13</a:t>
             </a:fld>
-            <a:endParaRPr lang="en-US"/>
-          </a:p>
-        </p:txBody>
-      </p:sp>
-      <p:sp>
-        <p:nvSpPr>
-          <p:cNvPr id="4" name="Footer Placeholder 3"/>
-          <p:cNvSpPr>
-            <a:spLocks noGrp="1"/>
-          </p:cNvSpPr>
-          <p:nvPr>
-            <p:ph type="ftr" sz="quarter" idx="11"/>
+          </a:p>
+        </p:txBody>
+      </p:sp>
+      <p:sp>
+        <p:nvSpPr>
+          <p:cNvPr id="4" name="Footer Placeholder 3">
+            <a:extLst xmlns:a="http://schemas.openxmlformats.org/drawingml/2006/main">
+              <a:ext uri="{FF2B5EF4-FFF2-40B4-BE49-F238E27FC236}">
+                <a16:creationId xmlns:a16="http://schemas.microsoft.com/office/drawing/2014/main" id="{049771E4-1578-465B-AA01-59938CDF6F3B}"/>
+              </a:ext>
+            </a:extLst>
+          </p:cNvPr>
+          <p:cNvSpPr>
+            <a:spLocks xmlns:a="http://schemas.openxmlformats.org/drawingml/2006/main" noGrp="1"/>
+          </p:cNvSpPr>
+          <p:nvPr>
+            <p:ph type="ftr" idx="11"/>
           </p:nvPr>
         </p:nvSpPr>
         <p:spPr/>
         <p:txBody>
-          <a:bodyPr/>
-          <a:lstStyle/>
-          <a:p>
-            <a:endParaRPr lang="en-US"/>
-          </a:p>
-        </p:txBody>
-      </p:sp>
-      <p:sp>
-        <p:nvSpPr>
-          <p:cNvPr id="5" name="Slide Number Placeholder 4"/>
-          <p:cNvSpPr>
-            <a:spLocks noGrp="1"/>
-          </p:cNvSpPr>
-          <p:nvPr>
-            <p:ph type="sldNum" sz="quarter" idx="12"/>
+          <a:bodyPr xmlns:a="http://schemas.openxmlformats.org/drawingml/2006/main"/>
+          <a:lstStyle xmlns:a="http://schemas.openxmlformats.org/drawingml/2006/main"/>
+          <a:p xmlns:a="http://schemas.openxmlformats.org/drawingml/2006/main"/>
+        </p:txBody>
+      </p:sp>
+      <p:sp>
+        <p:nvSpPr>
+          <p:cNvPr id="5" name="Slide Number Placeholder 4">
+            <a:extLst xmlns:a="http://schemas.openxmlformats.org/drawingml/2006/main">
+              <a:ext uri="{FF2B5EF4-FFF2-40B4-BE49-F238E27FC236}">
+                <a16:creationId xmlns:a16="http://schemas.microsoft.com/office/drawing/2014/main" id="{F4F9DE3F-5B6C-4A70-8102-9E190CBCCBFC}"/>
+              </a:ext>
+            </a:extLst>
+          </p:cNvPr>
+          <p:cNvSpPr>
+            <a:spLocks xmlns:a="http://schemas.openxmlformats.org/drawingml/2006/main" noGrp="1"/>
+          </p:cNvSpPr>
+          <p:nvPr>
+            <p:ph type="sldNum" idx="12"/>
           </p:nvPr>
         </p:nvSpPr>
         <p:spPr/>
         <p:txBody>
-          <a:bodyPr/>
-          <a:lstStyle/>
-          <a:p>
+          <a:bodyPr xmlns:a="http://schemas.openxmlformats.org/drawingml/2006/main"/>
+          <a:lstStyle xmlns:a="http://schemas.openxmlformats.org/drawingml/2006/main"/>
+          <a:p xmlns:a="http://schemas.openxmlformats.org/drawingml/2006/main">
             <a:fld id="{C1FF6DA9-008F-8B48-92A6-B652298478BF}" type="slidenum">
-              <a:rPr lang="en-US" smtClean="0"/>
               <a:t>‹#›</a:t>
             </a:fld>
-            <a:endParaRPr lang="en-US"/>
           </a:p>
         </p:txBody>
       </p:sp>
     </p:spTree>
-    <p:extLst>
-      <p:ext uri="{BB962C8B-B14F-4D97-AF65-F5344CB8AC3E}">
-        <p14:creationId xmlns:p14="http://schemas.microsoft.com/office/powerpoint/2010/main" val="727027711"/>
-      </p:ext>
-    </p:extLst>
   </p:cSld>
-  <p:clrMapOvr>
-    <a:masterClrMapping/>
-  </p:clrMapOvr>
 </p:sldLayout>
 </file>
 
 <file path=ppt/slideLayouts/slideLayout7.xml><?xml version="1.0" encoding="utf-8"?>
-<p:sldLayout xmlns:a="http://schemas.openxmlformats.org/drawingml/2006/main" xmlns:r="http://schemas.openxmlformats.org/officeDocument/2006/relationships" xmlns:p="http://schemas.openxmlformats.org/presentationml/2006/main" type="blank" preserve="1">
+<p:sldLayout xmlns:p="http://schemas.openxmlformats.org/presentationml/2006/main" type="blank" preserve="1">
   <p:cSld name="Blank">
     <p:spTree>
       <p:nvGrpSpPr>
@@ -1958,93 +2908,92 @@
         <p:nvPr/>
       </p:nvGrpSpPr>
       <p:grpSpPr>
-        <a:xfrm>
-          <a:off x="0" y="0"/>
-          <a:ext cx="0" cy="0"/>
-          <a:chOff x="0" y="0"/>
-          <a:chExt cx="0" cy="0"/>
-        </a:xfrm>
+        <a:xfrm xmlns:a="http://schemas.openxmlformats.org/drawingml/2006/main"/>
       </p:grpSpPr>
       <p:sp>
         <p:nvSpPr>
-          <p:cNvPr id="2" name="Date Placeholder 1"/>
-          <p:cNvSpPr>
-            <a:spLocks noGrp="1"/>
-          </p:cNvSpPr>
-          <p:nvPr>
-            <p:ph type="dt" sz="half" idx="10"/>
+          <p:cNvPr id="2" name="Date Placeholder 1">
+            <a:extLst xmlns:a="http://schemas.openxmlformats.org/drawingml/2006/main">
+              <a:ext uri="{FF2B5EF4-FFF2-40B4-BE49-F238E27FC236}">
+                <a16:creationId xmlns:a16="http://schemas.microsoft.com/office/drawing/2014/main" id="{96FA4A2E-2A15-48CB-AF0B-FFF5EB2AA6FB}"/>
+              </a:ext>
+            </a:extLst>
+          </p:cNvPr>
+          <p:cNvSpPr>
+            <a:spLocks xmlns:a="http://schemas.openxmlformats.org/drawingml/2006/main" noGrp="1"/>
+          </p:cNvSpPr>
+          <p:nvPr>
+            <p:ph type="dt" idx="10"/>
           </p:nvPr>
         </p:nvSpPr>
         <p:spPr/>
         <p:txBody>
-          <a:bodyPr/>
-          <a:lstStyle/>
-          <a:p>
+          <a:bodyPr xmlns:a="http://schemas.openxmlformats.org/drawingml/2006/main"/>
+          <a:lstStyle xmlns:a="http://schemas.openxmlformats.org/drawingml/2006/main"/>
+          <a:p xmlns:a="http://schemas.openxmlformats.org/drawingml/2006/main">
             <a:fld id="{5BCAD085-E8A6-8845-BD4E-CB4CCA059FC4}" type="datetimeFigureOut">
-              <a:rPr lang="en-US" smtClean="0"/>
               <a:t>1/27/13</a:t>
             </a:fld>
-            <a:endParaRPr lang="en-US"/>
-          </a:p>
-        </p:txBody>
-      </p:sp>
-      <p:sp>
-        <p:nvSpPr>
-          <p:cNvPr id="3" name="Footer Placeholder 2"/>
-          <p:cNvSpPr>
-            <a:spLocks noGrp="1"/>
-          </p:cNvSpPr>
-          <p:nvPr>
-            <p:ph type="ftr" sz="quarter" idx="11"/>
+          </a:p>
+        </p:txBody>
+      </p:sp>
+      <p:sp>
+        <p:nvSpPr>
+          <p:cNvPr id="3" name="Footer Placeholder 2">
+            <a:extLst xmlns:a="http://schemas.openxmlformats.org/drawingml/2006/main">
+              <a:ext uri="{FF2B5EF4-FFF2-40B4-BE49-F238E27FC236}">
+                <a16:creationId xmlns:a16="http://schemas.microsoft.com/office/drawing/2014/main" id="{F17C36C9-160F-438D-9341-0938C09B83D4}"/>
+              </a:ext>
+            </a:extLst>
+          </p:cNvPr>
+          <p:cNvSpPr>
+            <a:spLocks xmlns:a="http://schemas.openxmlformats.org/drawingml/2006/main" noGrp="1"/>
+          </p:cNvSpPr>
+          <p:nvPr>
+            <p:ph type="ftr" idx="11"/>
           </p:nvPr>
         </p:nvSpPr>
         <p:spPr/>
         <p:txBody>
-          <a:bodyPr/>
-          <a:lstStyle/>
-          <a:p>
-            <a:endParaRPr lang="en-US"/>
-          </a:p>
-        </p:txBody>
-      </p:sp>
-      <p:sp>
-        <p:nvSpPr>
-          <p:cNvPr id="4" name="Slide Number Placeholder 3"/>
-          <p:cNvSpPr>
-            <a:spLocks noGrp="1"/>
-          </p:cNvSpPr>
-          <p:nvPr>
-            <p:ph type="sldNum" sz="quarter" idx="12"/>
+          <a:bodyPr xmlns:a="http://schemas.openxmlformats.org/drawingml/2006/main"/>
+          <a:lstStyle xmlns:a="http://schemas.openxmlformats.org/drawingml/2006/main"/>
+          <a:p xmlns:a="http://schemas.openxmlformats.org/drawingml/2006/main"/>
+        </p:txBody>
+      </p:sp>
+      <p:sp>
+        <p:nvSpPr>
+          <p:cNvPr id="4" name="Slide Number Placeholder 3">
+            <a:extLst xmlns:a="http://schemas.openxmlformats.org/drawingml/2006/main">
+              <a:ext uri="{FF2B5EF4-FFF2-40B4-BE49-F238E27FC236}">
+                <a16:creationId xmlns:a16="http://schemas.microsoft.com/office/drawing/2014/main" id="{83F08BA2-8F4E-49A0-8C6F-642E4B3372BB}"/>
+              </a:ext>
+            </a:extLst>
+          </p:cNvPr>
+          <p:cNvSpPr>
+            <a:spLocks xmlns:a="http://schemas.openxmlformats.org/drawingml/2006/main" noGrp="1"/>
+          </p:cNvSpPr>
+          <p:nvPr>
+            <p:ph type="sldNum" idx="12"/>
           </p:nvPr>
         </p:nvSpPr>
         <p:spPr/>
         <p:txBody>
-          <a:bodyPr/>
-          <a:lstStyle/>
-          <a:p>
+          <a:bodyPr xmlns:a="http://schemas.openxmlformats.org/drawingml/2006/main"/>
+          <a:lstStyle xmlns:a="http://schemas.openxmlformats.org/drawingml/2006/main"/>
+          <a:p xmlns:a="http://schemas.openxmlformats.org/drawingml/2006/main">
             <a:fld id="{C1FF6DA9-008F-8B48-92A6-B652298478BF}" type="slidenum">
-              <a:rPr lang="en-US" smtClean="0"/>
               <a:t>‹#›</a:t>
             </a:fld>
-            <a:endParaRPr lang="en-US"/>
           </a:p>
         </p:txBody>
       </p:sp>
     </p:spTree>
-    <p:extLst>
-      <p:ext uri="{BB962C8B-B14F-4D97-AF65-F5344CB8AC3E}">
-        <p14:creationId xmlns:p14="http://schemas.microsoft.com/office/powerpoint/2010/main" val="1212999818"/>
-      </p:ext>
-    </p:extLst>
   </p:cSld>
-  <p:clrMapOvr>
-    <a:masterClrMapping/>
-  </p:clrMapOvr>
 </p:sldLayout>
 </file>
 
 <file path=ppt/slideLayouts/slideLayout8.xml><?xml version="1.0" encoding="utf-8"?>
-<p:sldLayout xmlns:a="http://schemas.openxmlformats.org/drawingml/2006/main" xmlns:r="http://schemas.openxmlformats.org/officeDocument/2006/relationships" xmlns:p="http://schemas.openxmlformats.org/presentationml/2006/main" type="objTx" preserve="1">
+<p:sldLayout xmlns:p="http://schemas.openxmlformats.org/presentationml/2006/main" type="objTx" preserve="1">
   <p:cSld name="Content with Caption">
     <p:spTree>
       <p:nvGrpSpPr>
@@ -2053,149 +3002,174 @@
         <p:nvPr/>
       </p:nvGrpSpPr>
       <p:grpSpPr>
-        <a:xfrm>
-          <a:off x="0" y="0"/>
-          <a:ext cx="0" cy="0"/>
-          <a:chOff x="0" y="0"/>
-          <a:chExt cx="0" cy="0"/>
-        </a:xfrm>
+        <a:xfrm xmlns:a="http://schemas.openxmlformats.org/drawingml/2006/main"/>
       </p:grpSpPr>
       <p:sp>
         <p:nvSpPr>
-          <p:cNvPr id="2" name="Title 1"/>
-          <p:cNvSpPr>
-            <a:spLocks noGrp="1"/>
-          </p:cNvSpPr>
-          <p:nvPr>
-            <p:ph type="title"/>
-          </p:nvPr>
-        </p:nvSpPr>
-        <p:spPr>
-          <a:xfrm>
+          <p:cNvPr id="2" name="Title 1">
+            <a:extLst xmlns:a="http://schemas.openxmlformats.org/drawingml/2006/main">
+              <a:ext uri="{FF2B5EF4-FFF2-40B4-BE49-F238E27FC236}">
+                <a16:creationId xmlns:a16="http://schemas.microsoft.com/office/drawing/2014/main" id="{FFB31286-9259-41BC-9E4F-1E4A0290A98F}"/>
+              </a:ext>
+            </a:extLst>
+          </p:cNvPr>
+          <p:cNvSpPr>
+            <a:spLocks xmlns:a="http://schemas.openxmlformats.org/drawingml/2006/main" noGrp="1"/>
+          </p:cNvSpPr>
+          <p:nvPr>
+            <p:ph type="title" idx="0"/>
+          </p:nvPr>
+        </p:nvSpPr>
+        <p:spPr>
+          <a:xfrm xmlns:a="http://schemas.openxmlformats.org/drawingml/2006/main">
             <a:off x="457200" y="273050"/>
             <a:ext cx="3008313" cy="1162050"/>
           </a:xfrm>
         </p:spPr>
         <p:txBody>
-          <a:bodyPr anchor="b"/>
-          <a:lstStyle>
+          <a:bodyPr xmlns:a="http://schemas.openxmlformats.org/drawingml/2006/main" anchor="b"/>
+          <a:lstStyle xmlns:a="http://schemas.openxmlformats.org/drawingml/2006/main">
             <a:lvl1pPr algn="l">
+              <a:buNone/>
               <a:defRPr sz="2000" b="1"/>
             </a:lvl1pPr>
           </a:lstStyle>
-          <a:p>
-            <a:r>
-              <a:rPr lang="en-US" smtClean="0"/>
+          <a:p xmlns:a="http://schemas.openxmlformats.org/drawingml/2006/main">
+            <a:r>
               <a:t>Click to edit Master title style</a:t>
             </a:r>
-            <a:endParaRPr lang="en-US"/>
-          </a:p>
-        </p:txBody>
-      </p:sp>
-      <p:sp>
-        <p:nvSpPr>
-          <p:cNvPr id="3" name="Content Placeholder 2"/>
-          <p:cNvSpPr>
-            <a:spLocks noGrp="1"/>
+          </a:p>
+        </p:txBody>
+      </p:sp>
+      <p:sp>
+        <p:nvSpPr>
+          <p:cNvPr id="3" name="Content Placeholder 2">
+            <a:extLst xmlns:a="http://schemas.openxmlformats.org/drawingml/2006/main">
+              <a:ext uri="{FF2B5EF4-FFF2-40B4-BE49-F238E27FC236}">
+                <a16:creationId xmlns:a16="http://schemas.microsoft.com/office/drawing/2014/main" id="{857D7989-D388-4782-B843-A72E91F3B4AA}"/>
+              </a:ext>
+            </a:extLst>
+          </p:cNvPr>
+          <p:cNvSpPr>
+            <a:spLocks xmlns:a="http://schemas.openxmlformats.org/drawingml/2006/main" noGrp="1"/>
           </p:cNvSpPr>
           <p:nvPr>
             <p:ph idx="1"/>
           </p:nvPr>
         </p:nvSpPr>
         <p:spPr>
-          <a:xfrm>
+          <a:xfrm xmlns:a="http://schemas.openxmlformats.org/drawingml/2006/main">
             <a:off x="3575050" y="273050"/>
             <a:ext cx="5111750" cy="5853113"/>
           </a:xfrm>
         </p:spPr>
         <p:txBody>
-          <a:bodyPr/>
-          <a:lstStyle>
+          <a:bodyPr xmlns:a="http://schemas.openxmlformats.org/drawingml/2006/main"/>
+          <a:lstStyle xmlns:a="http://schemas.openxmlformats.org/drawingml/2006/main">
             <a:lvl1pPr>
+              <a:buNone/>
               <a:defRPr sz="3200"/>
             </a:lvl1pPr>
             <a:lvl2pPr>
+              <a:buNone/>
               <a:defRPr sz="2800"/>
             </a:lvl2pPr>
             <a:lvl3pPr>
+              <a:buNone/>
               <a:defRPr sz="2400"/>
             </a:lvl3pPr>
             <a:lvl4pPr>
+              <a:buNone/>
               <a:defRPr sz="2000"/>
             </a:lvl4pPr>
             <a:lvl5pPr>
+              <a:buNone/>
               <a:defRPr sz="2000"/>
             </a:lvl5pPr>
             <a:lvl6pPr>
+              <a:buNone/>
               <a:defRPr sz="2000"/>
             </a:lvl6pPr>
             <a:lvl7pPr>
+              <a:buNone/>
               <a:defRPr sz="2000"/>
             </a:lvl7pPr>
             <a:lvl8pPr>
+              <a:buNone/>
               <a:defRPr sz="2000"/>
             </a:lvl8pPr>
             <a:lvl9pPr>
+              <a:buNone/>
               <a:defRPr sz="2000"/>
             </a:lvl9pPr>
           </a:lstStyle>
-          <a:p>
-            <a:pPr lvl="0"/>
-            <a:r>
-              <a:rPr lang="en-US" smtClean="0"/>
+          <a:p xmlns:a="http://schemas.openxmlformats.org/drawingml/2006/main">
+            <a:pPr lvl="0">
+              <a:buNone/>
+            </a:pPr>
+            <a:r>
               <a:t>Click to edit Master text styles</a:t>
             </a:r>
           </a:p>
-          <a:p>
-            <a:pPr lvl="1"/>
-            <a:r>
-              <a:rPr lang="en-US" smtClean="0"/>
+          <a:p xmlns:a="http://schemas.openxmlformats.org/drawingml/2006/main">
+            <a:pPr lvl="1">
+              <a:buNone/>
+            </a:pPr>
+            <a:r>
               <a:t>Second level</a:t>
             </a:r>
           </a:p>
-          <a:p>
-            <a:pPr lvl="2"/>
-            <a:r>
-              <a:rPr lang="en-US" smtClean="0"/>
+          <a:p xmlns:a="http://schemas.openxmlformats.org/drawingml/2006/main">
+            <a:pPr lvl="2">
+              <a:buNone/>
+            </a:pPr>
+            <a:r>
               <a:t>Third level</a:t>
             </a:r>
           </a:p>
-          <a:p>
-            <a:pPr lvl="3"/>
-            <a:r>
-              <a:rPr lang="en-US" smtClean="0"/>
+          <a:p xmlns:a="http://schemas.openxmlformats.org/drawingml/2006/main">
+            <a:pPr lvl="3">
+              <a:buNone/>
+            </a:pPr>
+            <a:r>
               <a:t>Fourth level</a:t>
             </a:r>
           </a:p>
-          <a:p>
-            <a:pPr lvl="4"/>
-            <a:r>
-              <a:rPr lang="en-US" smtClean="0"/>
+          <a:p xmlns:a="http://schemas.openxmlformats.org/drawingml/2006/main">
+            <a:pPr lvl="4">
+              <a:buNone/>
+            </a:pPr>
+            <a:r>
               <a:t>Fifth level</a:t>
             </a:r>
-            <a:endParaRPr lang="en-US"/>
-          </a:p>
-        </p:txBody>
-      </p:sp>
-      <p:sp>
-        <p:nvSpPr>
-          <p:cNvPr id="4" name="Text Placeholder 3"/>
-          <p:cNvSpPr>
-            <a:spLocks noGrp="1"/>
-          </p:cNvSpPr>
-          <p:nvPr>
-            <p:ph type="body" sz="half" idx="2"/>
-          </p:nvPr>
-        </p:nvSpPr>
-        <p:spPr>
-          <a:xfrm>
+          </a:p>
+        </p:txBody>
+      </p:sp>
+      <p:sp>
+        <p:nvSpPr>
+          <p:cNvPr id="4" name="Text Placeholder 3">
+            <a:extLst xmlns:a="http://schemas.openxmlformats.org/drawingml/2006/main">
+              <a:ext uri="{FF2B5EF4-FFF2-40B4-BE49-F238E27FC236}">
+                <a16:creationId xmlns:a16="http://schemas.microsoft.com/office/drawing/2014/main" id="{D9CF4DFA-F0FE-4F8E-8A3C-3556BF12FEE0}"/>
+              </a:ext>
+            </a:extLst>
+          </p:cNvPr>
+          <p:cNvSpPr>
+            <a:spLocks xmlns:a="http://schemas.openxmlformats.org/drawingml/2006/main" noGrp="1"/>
+          </p:cNvSpPr>
+          <p:nvPr>
+            <p:ph type="body" idx="2"/>
+          </p:nvPr>
+        </p:nvSpPr>
+        <p:spPr>
+          <a:xfrm xmlns:a="http://schemas.openxmlformats.org/drawingml/2006/main">
             <a:off x="457200" y="1435100"/>
             <a:ext cx="3008313" cy="4691063"/>
           </a:xfrm>
         </p:spPr>
         <p:txBody>
-          <a:bodyPr/>
-          <a:lstStyle>
+          <a:bodyPr xmlns:a="http://schemas.openxmlformats.org/drawingml/2006/main"/>
+          <a:lstStyle xmlns:a="http://schemas.openxmlformats.org/drawingml/2006/main">
             <a:lvl1pPr marL="0" indent="0">
               <a:buNone/>
               <a:defRPr sz="1400"/>
@@ -2233,10 +3207,11 @@
               <a:defRPr sz="900"/>
             </a:lvl9pPr>
           </a:lstStyle>
-          <a:p>
-            <a:pPr lvl="0"/>
-            <a:r>
-              <a:rPr lang="en-US" smtClean="0"/>
+          <a:p xmlns:a="http://schemas.openxmlformats.org/drawingml/2006/main">
+            <a:pPr lvl="0">
+              <a:buNone/>
+            </a:pPr>
+            <a:r>
               <a:t>Click to edit Master text styles</a:t>
             </a:r>
           </a:p>
@@ -2244,84 +3219,88 @@
       </p:sp>
       <p:sp>
         <p:nvSpPr>
-          <p:cNvPr id="5" name="Date Placeholder 4"/>
-          <p:cNvSpPr>
-            <a:spLocks noGrp="1"/>
-          </p:cNvSpPr>
-          <p:nvPr>
-            <p:ph type="dt" sz="half" idx="10"/>
+          <p:cNvPr id="5" name="Date Placeholder 4">
+            <a:extLst xmlns:a="http://schemas.openxmlformats.org/drawingml/2006/main">
+              <a:ext uri="{FF2B5EF4-FFF2-40B4-BE49-F238E27FC236}">
+                <a16:creationId xmlns:a16="http://schemas.microsoft.com/office/drawing/2014/main" id="{FBFF4500-8A65-431F-9373-A6A04F010D01}"/>
+              </a:ext>
+            </a:extLst>
+          </p:cNvPr>
+          <p:cNvSpPr>
+            <a:spLocks xmlns:a="http://schemas.openxmlformats.org/drawingml/2006/main" noGrp="1"/>
+          </p:cNvSpPr>
+          <p:nvPr>
+            <p:ph type="dt" idx="10"/>
           </p:nvPr>
         </p:nvSpPr>
         <p:spPr/>
         <p:txBody>
-          <a:bodyPr/>
-          <a:lstStyle/>
-          <a:p>
+          <a:bodyPr xmlns:a="http://schemas.openxmlformats.org/drawingml/2006/main"/>
+          <a:lstStyle xmlns:a="http://schemas.openxmlformats.org/drawingml/2006/main"/>
+          <a:p xmlns:a="http://schemas.openxmlformats.org/drawingml/2006/main">
             <a:fld id="{5BCAD085-E8A6-8845-BD4E-CB4CCA059FC4}" type="datetimeFigureOut">
-              <a:rPr lang="en-US" smtClean="0"/>
               <a:t>1/27/13</a:t>
             </a:fld>
-            <a:endParaRPr lang="en-US"/>
-          </a:p>
-        </p:txBody>
-      </p:sp>
-      <p:sp>
-        <p:nvSpPr>
-          <p:cNvPr id="6" name="Footer Placeholder 5"/>
-          <p:cNvSpPr>
-            <a:spLocks noGrp="1"/>
-          </p:cNvSpPr>
-          <p:nvPr>
-            <p:ph type="ftr" sz="quarter" idx="11"/>
+          </a:p>
+        </p:txBody>
+      </p:sp>
+      <p:sp>
+        <p:nvSpPr>
+          <p:cNvPr id="6" name="Footer Placeholder 5">
+            <a:extLst xmlns:a="http://schemas.openxmlformats.org/drawingml/2006/main">
+              <a:ext uri="{FF2B5EF4-FFF2-40B4-BE49-F238E27FC236}">
+                <a16:creationId xmlns:a16="http://schemas.microsoft.com/office/drawing/2014/main" id="{2512AB40-5A33-4A68-B975-1108949B7E6D}"/>
+              </a:ext>
+            </a:extLst>
+          </p:cNvPr>
+          <p:cNvSpPr>
+            <a:spLocks xmlns:a="http://schemas.openxmlformats.org/drawingml/2006/main" noGrp="1"/>
+          </p:cNvSpPr>
+          <p:nvPr>
+            <p:ph type="ftr" idx="11"/>
           </p:nvPr>
         </p:nvSpPr>
         <p:spPr/>
         <p:txBody>
-          <a:bodyPr/>
-          <a:lstStyle/>
-          <a:p>
-            <a:endParaRPr lang="en-US"/>
-          </a:p>
-        </p:txBody>
-      </p:sp>
-      <p:sp>
-        <p:nvSpPr>
-          <p:cNvPr id="7" name="Slide Number Placeholder 6"/>
-          <p:cNvSpPr>
-            <a:spLocks noGrp="1"/>
-          </p:cNvSpPr>
-          <p:nvPr>
-            <p:ph type="sldNum" sz="quarter" idx="12"/>
+          <a:bodyPr xmlns:a="http://schemas.openxmlformats.org/drawingml/2006/main"/>
+          <a:lstStyle xmlns:a="http://schemas.openxmlformats.org/drawingml/2006/main"/>
+          <a:p xmlns:a="http://schemas.openxmlformats.org/drawingml/2006/main"/>
+        </p:txBody>
+      </p:sp>
+      <p:sp>
+        <p:nvSpPr>
+          <p:cNvPr id="7" name="Slide Number Placeholder 6">
+            <a:extLst xmlns:a="http://schemas.openxmlformats.org/drawingml/2006/main">
+              <a:ext uri="{FF2B5EF4-FFF2-40B4-BE49-F238E27FC236}">
+                <a16:creationId xmlns:a16="http://schemas.microsoft.com/office/drawing/2014/main" id="{41B62ECE-FD11-4323-9D49-F480C5FBBAFE}"/>
+              </a:ext>
+            </a:extLst>
+          </p:cNvPr>
+          <p:cNvSpPr>
+            <a:spLocks xmlns:a="http://schemas.openxmlformats.org/drawingml/2006/main" noGrp="1"/>
+          </p:cNvSpPr>
+          <p:nvPr>
+            <p:ph type="sldNum" idx="12"/>
           </p:nvPr>
         </p:nvSpPr>
         <p:spPr/>
         <p:txBody>
-          <a:bodyPr/>
-          <a:lstStyle/>
-          <a:p>
+          <a:bodyPr xmlns:a="http://schemas.openxmlformats.org/drawingml/2006/main"/>
+          <a:lstStyle xmlns:a="http://schemas.openxmlformats.org/drawingml/2006/main"/>
+          <a:p xmlns:a="http://schemas.openxmlformats.org/drawingml/2006/main">
             <a:fld id="{C1FF6DA9-008F-8B48-92A6-B652298478BF}" type="slidenum">
-              <a:rPr lang="en-US" smtClean="0"/>
               <a:t>‹#›</a:t>
             </a:fld>
-            <a:endParaRPr lang="en-US"/>
           </a:p>
         </p:txBody>
       </p:sp>
     </p:spTree>
-    <p:extLst>
-      <p:ext uri="{BB962C8B-B14F-4D97-AF65-F5344CB8AC3E}">
-        <p14:creationId xmlns:p14="http://schemas.microsoft.com/office/powerpoint/2010/main" val="1840726560"/>
-      </p:ext>
-    </p:extLst>
   </p:cSld>
-  <p:clrMapOvr>
-    <a:masterClrMapping/>
-  </p:clrMapOvr>
 </p:sldLayout>
 </file>
 
 <file path=ppt/slideLayouts/slideLayout9.xml><?xml version="1.0" encoding="utf-8"?>
-<p:sldLayout xmlns:a="http://schemas.openxmlformats.org/drawingml/2006/main" xmlns:r="http://schemas.openxmlformats.org/officeDocument/2006/relationships" xmlns:p="http://schemas.openxmlformats.org/presentationml/2006/main" type="picTx" preserve="1">
+<p:sldLayout xmlns:p="http://schemas.openxmlformats.org/presentationml/2006/main" type="picTx" preserve="1">
   <p:cSld name="Picture with Caption">
     <p:spTree>
       <p:nvGrpSpPr>
@@ -2330,64 +3309,70 @@
         <p:nvPr/>
       </p:nvGrpSpPr>
       <p:grpSpPr>
-        <a:xfrm>
-          <a:off x="0" y="0"/>
-          <a:ext cx="0" cy="0"/>
-          <a:chOff x="0" y="0"/>
-          <a:chExt cx="0" cy="0"/>
-        </a:xfrm>
+        <a:xfrm xmlns:a="http://schemas.openxmlformats.org/drawingml/2006/main"/>
       </p:grpSpPr>
       <p:sp>
         <p:nvSpPr>
-          <p:cNvPr id="2" name="Title 1"/>
-          <p:cNvSpPr>
-            <a:spLocks noGrp="1"/>
-          </p:cNvSpPr>
-          <p:nvPr>
-            <p:ph type="title"/>
-          </p:nvPr>
-        </p:nvSpPr>
-        <p:spPr>
-          <a:xfrm>
+          <p:cNvPr id="2" name="Title 1">
+            <a:extLst xmlns:a="http://schemas.openxmlformats.org/drawingml/2006/main">
+              <a:ext uri="{FF2B5EF4-FFF2-40B4-BE49-F238E27FC236}">
+                <a16:creationId xmlns:a16="http://schemas.microsoft.com/office/drawing/2014/main" id="{22ADAECE-D8E9-4953-B9E0-F565949237C9}"/>
+              </a:ext>
+            </a:extLst>
+          </p:cNvPr>
+          <p:cNvSpPr>
+            <a:spLocks xmlns:a="http://schemas.openxmlformats.org/drawingml/2006/main" noGrp="1"/>
+          </p:cNvSpPr>
+          <p:nvPr>
+            <p:ph type="title" idx="0"/>
+          </p:nvPr>
+        </p:nvSpPr>
+        <p:spPr>
+          <a:xfrm xmlns:a="http://schemas.openxmlformats.org/drawingml/2006/main">
             <a:off x="1792288" y="4800600"/>
             <a:ext cx="5486400" cy="566738"/>
           </a:xfrm>
         </p:spPr>
         <p:txBody>
-          <a:bodyPr anchor="b"/>
-          <a:lstStyle>
+          <a:bodyPr xmlns:a="http://schemas.openxmlformats.org/drawingml/2006/main" anchor="b"/>
+          <a:lstStyle xmlns:a="http://schemas.openxmlformats.org/drawingml/2006/main">
             <a:lvl1pPr algn="l">
+              <a:buNone/>
               <a:defRPr sz="2000" b="1"/>
             </a:lvl1pPr>
           </a:lstStyle>
-          <a:p>
-            <a:r>
-              <a:rPr lang="en-US" smtClean="0"/>
+          <a:p xmlns:a="http://schemas.openxmlformats.org/drawingml/2006/main">
+            <a:r>
               <a:t>Click to edit Master title style</a:t>
             </a:r>
-            <a:endParaRPr lang="en-US"/>
-          </a:p>
-        </p:txBody>
-      </p:sp>
-      <p:sp>
-        <p:nvSpPr>
-          <p:cNvPr id="3" name="Picture Placeholder 2"/>
-          <p:cNvSpPr>
-            <a:spLocks noGrp="1"/>
+          </a:p>
+        </p:txBody>
+      </p:sp>
+      <p:sp>
+        <p:nvSpPr>
+          <p:cNvPr id="3" name="Picture Placeholder 2">
+            <a:extLst xmlns:a="http://schemas.openxmlformats.org/drawingml/2006/main">
+              <a:ext uri="{FF2B5EF4-FFF2-40B4-BE49-F238E27FC236}">
+                <a16:creationId xmlns:a16="http://schemas.microsoft.com/office/drawing/2014/main" id="{5DAF6C0F-66AF-45E3-B972-DC624D129089}"/>
+              </a:ext>
+            </a:extLst>
+          </p:cNvPr>
+          <p:cNvSpPr>
+            <a:spLocks xmlns:a="http://schemas.openxmlformats.org/drawingml/2006/main" noGrp="1"/>
           </p:cNvSpPr>
           <p:nvPr>
             <p:ph type="pic" idx="1"/>
           </p:nvPr>
         </p:nvSpPr>
         <p:spPr>
-          <a:xfrm>
+          <a:xfrm xmlns:a="http://schemas.openxmlformats.org/drawingml/2006/main">
             <a:off x="1792288" y="612775"/>
             <a:ext cx="5486400" cy="4114800"/>
           </a:xfrm>
         </p:spPr>
         <p:txBody>
-          <a:bodyPr/>
-          <a:lstStyle>
+          <a:bodyPr xmlns:a="http://schemas.openxmlformats.org/drawingml/2006/main"/>
+          <a:lstStyle xmlns:a="http://schemas.openxmlformats.org/drawingml/2006/main">
             <a:lvl1pPr marL="0" indent="0">
               <a:buNone/>
               <a:defRPr sz="3200"/>
@@ -2425,30 +3410,34 @@
               <a:defRPr sz="2000"/>
             </a:lvl9pPr>
           </a:lstStyle>
-          <a:p>
-            <a:endParaRPr lang="en-US"/>
-          </a:p>
-        </p:txBody>
-      </p:sp>
-      <p:sp>
-        <p:nvSpPr>
-          <p:cNvPr id="4" name="Text Placeholder 3"/>
-          <p:cNvSpPr>
-            <a:spLocks noGrp="1"/>
-          </p:cNvSpPr>
-          <p:nvPr>
-            <p:ph type="body" sz="half" idx="2"/>
-          </p:nvPr>
-        </p:nvSpPr>
-        <p:spPr>
-          <a:xfrm>
+          <a:p xmlns:a="http://schemas.openxmlformats.org/drawingml/2006/main"/>
+        </p:txBody>
+      </p:sp>
+      <p:sp>
+        <p:nvSpPr>
+          <p:cNvPr id="4" name="Text Placeholder 3">
+            <a:extLst xmlns:a="http://schemas.openxmlformats.org/drawingml/2006/main">
+              <a:ext uri="{FF2B5EF4-FFF2-40B4-BE49-F238E27FC236}">
+                <a16:creationId xmlns:a16="http://schemas.microsoft.com/office/drawing/2014/main" id="{48CB274F-D049-4724-890C-B43E9DC3FDFA}"/>
+              </a:ext>
+            </a:extLst>
+          </p:cNvPr>
+          <p:cNvSpPr>
+            <a:spLocks xmlns:a="http://schemas.openxmlformats.org/drawingml/2006/main" noGrp="1"/>
+          </p:cNvSpPr>
+          <p:nvPr>
+            <p:ph type="body" idx="2"/>
+          </p:nvPr>
+        </p:nvSpPr>
+        <p:spPr>
+          <a:xfrm xmlns:a="http://schemas.openxmlformats.org/drawingml/2006/main">
             <a:off x="1792288" y="5367338"/>
             <a:ext cx="5486400" cy="804862"/>
           </a:xfrm>
         </p:spPr>
         <p:txBody>
-          <a:bodyPr/>
-          <a:lstStyle>
+          <a:bodyPr xmlns:a="http://schemas.openxmlformats.org/drawingml/2006/main"/>
+          <a:lstStyle xmlns:a="http://schemas.openxmlformats.org/drawingml/2006/main">
             <a:lvl1pPr marL="0" indent="0">
               <a:buNone/>
               <a:defRPr sz="1400"/>
@@ -2486,10 +3475,11 @@
               <a:defRPr sz="900"/>
             </a:lvl9pPr>
           </a:lstStyle>
-          <a:p>
-            <a:pPr lvl="0"/>
-            <a:r>
-              <a:rPr lang="en-US" smtClean="0"/>
+          <a:p xmlns:a="http://schemas.openxmlformats.org/drawingml/2006/main">
+            <a:pPr lvl="0">
+              <a:buNone/>
+            </a:pPr>
+            <a:r>
               <a:t>Click to edit Master text styles</a:t>
             </a:r>
           </a:p>
@@ -2497,88 +3487,92 @@
       </p:sp>
       <p:sp>
         <p:nvSpPr>
-          <p:cNvPr id="5" name="Date Placeholder 4"/>
-          <p:cNvSpPr>
-            <a:spLocks noGrp="1"/>
-          </p:cNvSpPr>
-          <p:nvPr>
-            <p:ph type="dt" sz="half" idx="10"/>
+          <p:cNvPr id="5" name="Date Placeholder 4">
+            <a:extLst xmlns:a="http://schemas.openxmlformats.org/drawingml/2006/main">
+              <a:ext uri="{FF2B5EF4-FFF2-40B4-BE49-F238E27FC236}">
+                <a16:creationId xmlns:a16="http://schemas.microsoft.com/office/drawing/2014/main" id="{5220E22E-85AF-43D4-9F4A-D9D219CD7877}"/>
+              </a:ext>
+            </a:extLst>
+          </p:cNvPr>
+          <p:cNvSpPr>
+            <a:spLocks xmlns:a="http://schemas.openxmlformats.org/drawingml/2006/main" noGrp="1"/>
+          </p:cNvSpPr>
+          <p:nvPr>
+            <p:ph type="dt" idx="10"/>
           </p:nvPr>
         </p:nvSpPr>
         <p:spPr/>
         <p:txBody>
-          <a:bodyPr/>
-          <a:lstStyle/>
-          <a:p>
+          <a:bodyPr xmlns:a="http://schemas.openxmlformats.org/drawingml/2006/main"/>
+          <a:lstStyle xmlns:a="http://schemas.openxmlformats.org/drawingml/2006/main"/>
+          <a:p xmlns:a="http://schemas.openxmlformats.org/drawingml/2006/main">
             <a:fld id="{5BCAD085-E8A6-8845-BD4E-CB4CCA059FC4}" type="datetimeFigureOut">
-              <a:rPr lang="en-US" smtClean="0"/>
               <a:t>1/27/13</a:t>
             </a:fld>
-            <a:endParaRPr lang="en-US"/>
-          </a:p>
-        </p:txBody>
-      </p:sp>
-      <p:sp>
-        <p:nvSpPr>
-          <p:cNvPr id="6" name="Footer Placeholder 5"/>
-          <p:cNvSpPr>
-            <a:spLocks noGrp="1"/>
-          </p:cNvSpPr>
-          <p:nvPr>
-            <p:ph type="ftr" sz="quarter" idx="11"/>
+          </a:p>
+        </p:txBody>
+      </p:sp>
+      <p:sp>
+        <p:nvSpPr>
+          <p:cNvPr id="6" name="Footer Placeholder 5">
+            <a:extLst xmlns:a="http://schemas.openxmlformats.org/drawingml/2006/main">
+              <a:ext uri="{FF2B5EF4-FFF2-40B4-BE49-F238E27FC236}">
+                <a16:creationId xmlns:a16="http://schemas.microsoft.com/office/drawing/2014/main" id="{438B22F9-C8DD-42A6-8ACD-54032773F6CE}"/>
+              </a:ext>
+            </a:extLst>
+          </p:cNvPr>
+          <p:cNvSpPr>
+            <a:spLocks xmlns:a="http://schemas.openxmlformats.org/drawingml/2006/main" noGrp="1"/>
+          </p:cNvSpPr>
+          <p:nvPr>
+            <p:ph type="ftr" idx="11"/>
           </p:nvPr>
         </p:nvSpPr>
         <p:spPr/>
         <p:txBody>
-          <a:bodyPr/>
-          <a:lstStyle/>
-          <a:p>
-            <a:endParaRPr lang="en-US"/>
-          </a:p>
-        </p:txBody>
-      </p:sp>
-      <p:sp>
-        <p:nvSpPr>
-          <p:cNvPr id="7" name="Slide Number Placeholder 6"/>
-          <p:cNvSpPr>
-            <a:spLocks noGrp="1"/>
-          </p:cNvSpPr>
-          <p:nvPr>
-            <p:ph type="sldNum" sz="quarter" idx="12"/>
+          <a:bodyPr xmlns:a="http://schemas.openxmlformats.org/drawingml/2006/main"/>
+          <a:lstStyle xmlns:a="http://schemas.openxmlformats.org/drawingml/2006/main"/>
+          <a:p xmlns:a="http://schemas.openxmlformats.org/drawingml/2006/main"/>
+        </p:txBody>
+      </p:sp>
+      <p:sp>
+        <p:nvSpPr>
+          <p:cNvPr id="7" name="Slide Number Placeholder 6">
+            <a:extLst xmlns:a="http://schemas.openxmlformats.org/drawingml/2006/main">
+              <a:ext uri="{FF2B5EF4-FFF2-40B4-BE49-F238E27FC236}">
+                <a16:creationId xmlns:a16="http://schemas.microsoft.com/office/drawing/2014/main" id="{AE157BD9-0244-4BA4-8D3B-01C121EB863D}"/>
+              </a:ext>
+            </a:extLst>
+          </p:cNvPr>
+          <p:cNvSpPr>
+            <a:spLocks xmlns:a="http://schemas.openxmlformats.org/drawingml/2006/main" noGrp="1"/>
+          </p:cNvSpPr>
+          <p:nvPr>
+            <p:ph type="sldNum" idx="12"/>
           </p:nvPr>
         </p:nvSpPr>
         <p:spPr/>
         <p:txBody>
-          <a:bodyPr/>
-          <a:lstStyle/>
-          <a:p>
+          <a:bodyPr xmlns:a="http://schemas.openxmlformats.org/drawingml/2006/main"/>
+          <a:lstStyle xmlns:a="http://schemas.openxmlformats.org/drawingml/2006/main"/>
+          <a:p xmlns:a="http://schemas.openxmlformats.org/drawingml/2006/main">
             <a:fld id="{C1FF6DA9-008F-8B48-92A6-B652298478BF}" type="slidenum">
-              <a:rPr lang="en-US" smtClean="0"/>
               <a:t>‹#›</a:t>
             </a:fld>
-            <a:endParaRPr lang="en-US"/>
           </a:p>
         </p:txBody>
       </p:sp>
     </p:spTree>
-    <p:extLst>
-      <p:ext uri="{BB962C8B-B14F-4D97-AF65-F5344CB8AC3E}">
-        <p14:creationId xmlns:p14="http://schemas.microsoft.com/office/powerpoint/2010/main" val="3889236939"/>
-      </p:ext>
-    </p:extLst>
   </p:cSld>
-  <p:clrMapOvr>
-    <a:masterClrMapping/>
-  </p:clrMapOvr>
 </p:sldLayout>
 </file>
 
 <file path=ppt/slideMasters/slideMaster1.xml><?xml version="1.0" encoding="utf-8"?>
-<p:sldMaster xmlns:a="http://schemas.openxmlformats.org/drawingml/2006/main" xmlns:r="http://schemas.openxmlformats.org/officeDocument/2006/relationships" xmlns:p="http://schemas.openxmlformats.org/presentationml/2006/main">
+<p:sldMaster xmlns:p="http://schemas.openxmlformats.org/presentationml/2006/main">
   <p:cSld>
     <p:bg>
       <p:bgRef idx="1001">
-        <a:schemeClr val="bg1"/>
+        <a:schemeClr xmlns:a="http://schemas.openxmlformats.org/drawingml/2006/main" val="bg1"/>
       </p:bgRef>
     </p:bg>
     <p:spTree>
@@ -2588,131 +3582,147 @@
         <p:nvPr/>
       </p:nvGrpSpPr>
       <p:grpSpPr>
-        <a:xfrm>
-          <a:off x="0" y="0"/>
-          <a:ext cx="0" cy="0"/>
-          <a:chOff x="0" y="0"/>
-          <a:chExt cx="0" cy="0"/>
-        </a:xfrm>
+        <a:xfrm xmlns:a="http://schemas.openxmlformats.org/drawingml/2006/main"/>
       </p:grpSpPr>
       <p:sp>
         <p:nvSpPr>
-          <p:cNvPr id="2" name="Title Placeholder 1"/>
-          <p:cNvSpPr>
-            <a:spLocks noGrp="1"/>
-          </p:cNvSpPr>
-          <p:nvPr>
-            <p:ph type="title"/>
-          </p:nvPr>
-        </p:nvSpPr>
-        <p:spPr>
-          <a:xfrm>
+          <p:cNvPr id="2" name="Title Placeholder 1">
+            <a:extLst xmlns:a="http://schemas.openxmlformats.org/drawingml/2006/main">
+              <a:ext uri="{FF2B5EF4-FFF2-40B4-BE49-F238E27FC236}">
+                <a16:creationId xmlns:a16="http://schemas.microsoft.com/office/drawing/2014/main" id="{4FBEA47B-330D-421D-A964-385A201F201E}"/>
+              </a:ext>
+            </a:extLst>
+          </p:cNvPr>
+          <p:cNvSpPr>
+            <a:spLocks xmlns:a="http://schemas.openxmlformats.org/drawingml/2006/main" noGrp="1"/>
+          </p:cNvSpPr>
+          <p:nvPr>
+            <p:ph type="title" idx="0"/>
+          </p:nvPr>
+        </p:nvSpPr>
+        <p:spPr>
+          <a:xfrm xmlns:a="http://schemas.openxmlformats.org/drawingml/2006/main">
             <a:off x="457200" y="274638"/>
             <a:ext cx="8229600" cy="1143000"/>
           </a:xfrm>
-          <a:prstGeom prst="rect">
+          <a:prstGeom xmlns:a="http://schemas.openxmlformats.org/drawingml/2006/main" prst="rect">
             <a:avLst/>
           </a:prstGeom>
         </p:spPr>
         <p:txBody>
-          <a:bodyPr vert="horz" lIns="91440" tIns="45720" rIns="91440" bIns="45720" rtlCol="0" anchor="ctr">
+          <a:bodyPr xmlns:a="http://schemas.openxmlformats.org/drawingml/2006/main" vert="horz" lIns="91440" tIns="45720" rIns="91440" bIns="45720" anchor="ctr">
             <a:normAutofit/>
           </a:bodyPr>
-          <a:lstStyle/>
-          <a:p>
-            <a:r>
-              <a:rPr lang="en-US" smtClean="0"/>
+          <a:lstStyle xmlns:a="http://schemas.openxmlformats.org/drawingml/2006/main"/>
+          <a:p xmlns:a="http://schemas.openxmlformats.org/drawingml/2006/main">
+            <a:r>
               <a:t>Click to edit Master title style</a:t>
             </a:r>
-            <a:endParaRPr lang="en-US"/>
-          </a:p>
-        </p:txBody>
-      </p:sp>
-      <p:sp>
-        <p:nvSpPr>
-          <p:cNvPr id="3" name="Text Placeholder 2"/>
-          <p:cNvSpPr>
-            <a:spLocks noGrp="1"/>
+          </a:p>
+        </p:txBody>
+      </p:sp>
+      <p:sp>
+        <p:nvSpPr>
+          <p:cNvPr id="3" name="Text Placeholder 2">
+            <a:extLst xmlns:a="http://schemas.openxmlformats.org/drawingml/2006/main">
+              <a:ext uri="{FF2B5EF4-FFF2-40B4-BE49-F238E27FC236}">
+                <a16:creationId xmlns:a16="http://schemas.microsoft.com/office/drawing/2014/main" id="{077C2D65-B4EB-4A47-BD35-4A4DEA13C02B}"/>
+              </a:ext>
+            </a:extLst>
+          </p:cNvPr>
+          <p:cNvSpPr>
+            <a:spLocks xmlns:a="http://schemas.openxmlformats.org/drawingml/2006/main" noGrp="1"/>
           </p:cNvSpPr>
           <p:nvPr>
             <p:ph type="body" idx="1"/>
           </p:nvPr>
         </p:nvSpPr>
         <p:spPr>
-          <a:xfrm>
+          <a:xfrm xmlns:a="http://schemas.openxmlformats.org/drawingml/2006/main">
             <a:off x="457200" y="1600200"/>
             <a:ext cx="8229600" cy="4525963"/>
           </a:xfrm>
-          <a:prstGeom prst="rect">
+          <a:prstGeom xmlns:a="http://schemas.openxmlformats.org/drawingml/2006/main" prst="rect">
             <a:avLst/>
           </a:prstGeom>
         </p:spPr>
         <p:txBody>
-          <a:bodyPr vert="horz" lIns="91440" tIns="45720" rIns="91440" bIns="45720" rtlCol="0">
+          <a:bodyPr xmlns:a="http://schemas.openxmlformats.org/drawingml/2006/main" vert="horz" lIns="91440" tIns="45720" rIns="91440" bIns="45720">
             <a:normAutofit/>
           </a:bodyPr>
-          <a:lstStyle/>
-          <a:p>
-            <a:pPr lvl="0"/>
-            <a:r>
-              <a:rPr lang="en-US" smtClean="0"/>
+          <a:lstStyle xmlns:a="http://schemas.openxmlformats.org/drawingml/2006/main"/>
+          <a:p xmlns:a="http://schemas.openxmlformats.org/drawingml/2006/main">
+            <a:pPr lvl="0">
+              <a:buNone/>
+            </a:pPr>
+            <a:r>
               <a:t>Click to edit Master text styles</a:t>
             </a:r>
           </a:p>
-          <a:p>
-            <a:pPr lvl="1"/>
-            <a:r>
-              <a:rPr lang="en-US" smtClean="0"/>
+          <a:p xmlns:a="http://schemas.openxmlformats.org/drawingml/2006/main">
+            <a:pPr lvl="1">
+              <a:buNone/>
+            </a:pPr>
+            <a:r>
               <a:t>Second level</a:t>
             </a:r>
           </a:p>
-          <a:p>
-            <a:pPr lvl="2"/>
-            <a:r>
-              <a:rPr lang="en-US" smtClean="0"/>
+          <a:p xmlns:a="http://schemas.openxmlformats.org/drawingml/2006/main">
+            <a:pPr lvl="2">
+              <a:buNone/>
+            </a:pPr>
+            <a:r>
               <a:t>Third level</a:t>
             </a:r>
           </a:p>
-          <a:p>
-            <a:pPr lvl="3"/>
-            <a:r>
-              <a:rPr lang="en-US" smtClean="0"/>
+          <a:p xmlns:a="http://schemas.openxmlformats.org/drawingml/2006/main">
+            <a:pPr lvl="3">
+              <a:buNone/>
+            </a:pPr>
+            <a:r>
               <a:t>Fourth level</a:t>
             </a:r>
           </a:p>
-          <a:p>
-            <a:pPr lvl="4"/>
-            <a:r>
-              <a:rPr lang="en-US" smtClean="0"/>
+          <a:p xmlns:a="http://schemas.openxmlformats.org/drawingml/2006/main">
+            <a:pPr lvl="4">
+              <a:buNone/>
+            </a:pPr>
+            <a:r>
               <a:t>Fifth level</a:t>
             </a:r>
-            <a:endParaRPr lang="en-US"/>
-          </a:p>
-        </p:txBody>
-      </p:sp>
-      <p:sp>
-        <p:nvSpPr>
-          <p:cNvPr id="4" name="Date Placeholder 3"/>
-          <p:cNvSpPr>
-            <a:spLocks noGrp="1"/>
-          </p:cNvSpPr>
-          <p:nvPr>
-            <p:ph type="dt" sz="half" idx="2"/>
-          </p:nvPr>
-        </p:nvSpPr>
-        <p:spPr>
-          <a:xfrm>
+          </a:p>
+        </p:txBody>
+      </p:sp>
+      <p:sp>
+        <p:nvSpPr>
+          <p:cNvPr id="4" name="Date Placeholder 3">
+            <a:extLst xmlns:a="http://schemas.openxmlformats.org/drawingml/2006/main">
+              <a:ext uri="{FF2B5EF4-FFF2-40B4-BE49-F238E27FC236}">
+                <a16:creationId xmlns:a16="http://schemas.microsoft.com/office/drawing/2014/main" id="{5754F9A7-B313-48E2-90D2-C8C172A37645}"/>
+              </a:ext>
+            </a:extLst>
+          </p:cNvPr>
+          <p:cNvSpPr>
+            <a:spLocks xmlns:a="http://schemas.openxmlformats.org/drawingml/2006/main" noGrp="1"/>
+          </p:cNvSpPr>
+          <p:nvPr>
+            <p:ph type="dt" idx="2"/>
+          </p:nvPr>
+        </p:nvSpPr>
+        <p:spPr>
+          <a:xfrm xmlns:a="http://schemas.openxmlformats.org/drawingml/2006/main">
             <a:off x="457200" y="6356350"/>
             <a:ext cx="2133600" cy="365125"/>
           </a:xfrm>
-          <a:prstGeom prst="rect">
+          <a:prstGeom xmlns:a="http://schemas.openxmlformats.org/drawingml/2006/main" prst="rect">
             <a:avLst/>
           </a:prstGeom>
         </p:spPr>
         <p:txBody>
-          <a:bodyPr vert="horz" lIns="91440" tIns="45720" rIns="91440" bIns="45720" rtlCol="0" anchor="ctr"/>
-          <a:lstStyle>
+          <a:bodyPr xmlns:a="http://schemas.openxmlformats.org/drawingml/2006/main" vert="horz" lIns="91440" tIns="45720" rIns="91440" bIns="45720" anchor="ctr"/>
+          <a:lstStyle xmlns:a="http://schemas.openxmlformats.org/drawingml/2006/main">
             <a:lvl1pPr algn="l">
+              <a:buNone/>
               <a:defRPr sz="1200">
                 <a:solidFill>
                   <a:schemeClr val="tx1">
@@ -2722,38 +3732,43 @@
               </a:defRPr>
             </a:lvl1pPr>
           </a:lstStyle>
-          <a:p>
+          <a:p xmlns:a="http://schemas.openxmlformats.org/drawingml/2006/main">
             <a:fld id="{5BCAD085-E8A6-8845-BD4E-CB4CCA059FC4}" type="datetimeFigureOut">
-              <a:rPr lang="en-US" smtClean="0"/>
               <a:t>1/27/13</a:t>
             </a:fld>
-            <a:endParaRPr lang="en-US"/>
-          </a:p>
-        </p:txBody>
-      </p:sp>
-      <p:sp>
-        <p:nvSpPr>
-          <p:cNvPr id="5" name="Footer Placeholder 4"/>
-          <p:cNvSpPr>
-            <a:spLocks noGrp="1"/>
-          </p:cNvSpPr>
-          <p:nvPr>
-            <p:ph type="ftr" sz="quarter" idx="3"/>
-          </p:nvPr>
-        </p:nvSpPr>
-        <p:spPr>
-          <a:xfrm>
+          </a:p>
+        </p:txBody>
+      </p:sp>
+      <p:sp>
+        <p:nvSpPr>
+          <p:cNvPr id="5" name="Footer Placeholder 4">
+            <a:extLst xmlns:a="http://schemas.openxmlformats.org/drawingml/2006/main">
+              <a:ext uri="{FF2B5EF4-FFF2-40B4-BE49-F238E27FC236}">
+                <a16:creationId xmlns:a16="http://schemas.microsoft.com/office/drawing/2014/main" id="{38D529A0-B80D-4A4D-AB10-EE3039407458}"/>
+              </a:ext>
+            </a:extLst>
+          </p:cNvPr>
+          <p:cNvSpPr>
+            <a:spLocks xmlns:a="http://schemas.openxmlformats.org/drawingml/2006/main" noGrp="1"/>
+          </p:cNvSpPr>
+          <p:nvPr>
+            <p:ph type="ftr" idx="3"/>
+          </p:nvPr>
+        </p:nvSpPr>
+        <p:spPr>
+          <a:xfrm xmlns:a="http://schemas.openxmlformats.org/drawingml/2006/main">
             <a:off x="3124200" y="6356350"/>
             <a:ext cx="2895600" cy="365125"/>
           </a:xfrm>
-          <a:prstGeom prst="rect">
+          <a:prstGeom xmlns:a="http://schemas.openxmlformats.org/drawingml/2006/main" prst="rect">
             <a:avLst/>
           </a:prstGeom>
         </p:spPr>
         <p:txBody>
-          <a:bodyPr vert="horz" lIns="91440" tIns="45720" rIns="91440" bIns="45720" rtlCol="0" anchor="ctr"/>
-          <a:lstStyle>
+          <a:bodyPr xmlns:a="http://schemas.openxmlformats.org/drawingml/2006/main" vert="horz" lIns="91440" tIns="45720" rIns="91440" bIns="45720" anchor="ctr"/>
+          <a:lstStyle xmlns:a="http://schemas.openxmlformats.org/drawingml/2006/main">
             <a:lvl1pPr algn="ctr">
+              <a:buNone/>
               <a:defRPr sz="1200">
                 <a:solidFill>
                   <a:schemeClr val="tx1">
@@ -2763,34 +3778,39 @@
               </a:defRPr>
             </a:lvl1pPr>
           </a:lstStyle>
-          <a:p>
-            <a:endParaRPr lang="en-US"/>
-          </a:p>
-        </p:txBody>
-      </p:sp>
-      <p:sp>
-        <p:nvSpPr>
-          <p:cNvPr id="6" name="Slide Number Placeholder 5"/>
-          <p:cNvSpPr>
-            <a:spLocks noGrp="1"/>
-          </p:cNvSpPr>
-          <p:nvPr>
-            <p:ph type="sldNum" sz="quarter" idx="4"/>
-          </p:nvPr>
-        </p:nvSpPr>
-        <p:spPr>
-          <a:xfrm>
+          <a:p xmlns:a="http://schemas.openxmlformats.org/drawingml/2006/main"/>
+        </p:txBody>
+      </p:sp>
+      <p:sp>
+        <p:nvSpPr>
+          <p:cNvPr id="6" name="Slide Number Placeholder 5">
+            <a:extLst xmlns:a="http://schemas.openxmlformats.org/drawingml/2006/main">
+              <a:ext uri="{FF2B5EF4-FFF2-40B4-BE49-F238E27FC236}">
+                <a16:creationId xmlns:a16="http://schemas.microsoft.com/office/drawing/2014/main" id="{5E259E8B-1BAF-452F-A846-70A414D6DFB9}"/>
+              </a:ext>
+            </a:extLst>
+          </p:cNvPr>
+          <p:cNvSpPr>
+            <a:spLocks xmlns:a="http://schemas.openxmlformats.org/drawingml/2006/main" noGrp="1"/>
+          </p:cNvSpPr>
+          <p:nvPr>
+            <p:ph type="sldNum" idx="4"/>
+          </p:nvPr>
+        </p:nvSpPr>
+        <p:spPr>
+          <a:xfrm xmlns:a="http://schemas.openxmlformats.org/drawingml/2006/main">
             <a:off x="6553200" y="6356350"/>
             <a:ext cx="2133600" cy="365125"/>
           </a:xfrm>
-          <a:prstGeom prst="rect">
+          <a:prstGeom xmlns:a="http://schemas.openxmlformats.org/drawingml/2006/main" prst="rect">
             <a:avLst/>
           </a:prstGeom>
         </p:spPr>
         <p:txBody>
-          <a:bodyPr vert="horz" lIns="91440" tIns="45720" rIns="91440" bIns="45720" rtlCol="0" anchor="ctr"/>
-          <a:lstStyle>
+          <a:bodyPr xmlns:a="http://schemas.openxmlformats.org/drawingml/2006/main" vert="horz" lIns="91440" tIns="45720" rIns="91440" bIns="45720" anchor="ctr"/>
+          <a:lstStyle xmlns:a="http://schemas.openxmlformats.org/drawingml/2006/main">
             <a:lvl1pPr algn="r">
+              <a:buNone/>
               <a:defRPr sz="1200">
                 <a:solidFill>
                   <a:schemeClr val="tx1">
@@ -2800,39 +3820,32 @@
               </a:defRPr>
             </a:lvl1pPr>
           </a:lstStyle>
-          <a:p>
+          <a:p xmlns:a="http://schemas.openxmlformats.org/drawingml/2006/main">
             <a:fld id="{C1FF6DA9-008F-8B48-92A6-B652298478BF}" type="slidenum">
-              <a:rPr lang="en-US" smtClean="0"/>
               <a:t>‹#›</a:t>
             </a:fld>
-            <a:endParaRPr lang="en-US"/>
           </a:p>
         </p:txBody>
       </p:sp>
     </p:spTree>
-    <p:extLst>
-      <p:ext uri="{BB962C8B-B14F-4D97-AF65-F5344CB8AC3E}">
-        <p14:creationId xmlns:p14="http://schemas.microsoft.com/office/powerpoint/2010/main" val="2209977519"/>
-      </p:ext>
-    </p:extLst>
   </p:cSld>
   <p:clrMap bg1="lt1" tx1="dk1" bg2="lt2" tx2="dk2" accent1="accent1" accent2="accent2" accent3="accent3" accent4="accent4" accent5="accent5" accent6="accent6" hlink="hlink" folHlink="folHlink"/>
   <p:sldLayoutIdLst>
-    <p:sldLayoutId id="2147483649" r:id="rId1"/>
-    <p:sldLayoutId id="2147483650" r:id="rId2"/>
-    <p:sldLayoutId id="2147483651" r:id="rId3"/>
-    <p:sldLayoutId id="2147483652" r:id="rId4"/>
-    <p:sldLayoutId id="2147483653" r:id="rId5"/>
-    <p:sldLayoutId id="2147483654" r:id="rId6"/>
-    <p:sldLayoutId id="2147483655" r:id="rId7"/>
-    <p:sldLayoutId id="2147483656" r:id="rId8"/>
-    <p:sldLayoutId id="2147483657" r:id="rId9"/>
-    <p:sldLayoutId id="2147483658" r:id="rId10"/>
-    <p:sldLayoutId id="2147483659" r:id="rId11"/>
+    <p:sldLayoutId xmlns:r="http://schemas.openxmlformats.org/officeDocument/2006/relationships" id="2147483649" r:id="R4b09143f4a5644ff"/>
+    <p:sldLayoutId xmlns:r="http://schemas.openxmlformats.org/officeDocument/2006/relationships" id="2147483650" r:id="R66a5565bfb944e07"/>
+    <p:sldLayoutId xmlns:r="http://schemas.openxmlformats.org/officeDocument/2006/relationships" id="2147483651" r:id="Re7e8df8c0933432e"/>
+    <p:sldLayoutId xmlns:r="http://schemas.openxmlformats.org/officeDocument/2006/relationships" id="2147483652" r:id="R591c1f9326374bd2"/>
+    <p:sldLayoutId xmlns:r="http://schemas.openxmlformats.org/officeDocument/2006/relationships" id="2147483653" r:id="Rb2032175d42b45b9"/>
+    <p:sldLayoutId xmlns:r="http://schemas.openxmlformats.org/officeDocument/2006/relationships" id="2147483654" r:id="R004bd180c27f48fc"/>
+    <p:sldLayoutId xmlns:r="http://schemas.openxmlformats.org/officeDocument/2006/relationships" id="2147483655" r:id="R547f2e1dfbda4de4"/>
+    <p:sldLayoutId xmlns:r="http://schemas.openxmlformats.org/officeDocument/2006/relationships" id="2147483656" r:id="Rcdd305171af64011"/>
+    <p:sldLayoutId xmlns:r="http://schemas.openxmlformats.org/officeDocument/2006/relationships" id="2147483657" r:id="Rb892495c49d440b3"/>
+    <p:sldLayoutId xmlns:r="http://schemas.openxmlformats.org/officeDocument/2006/relationships" id="2147483658" r:id="Rf10c573209f44200"/>
+    <p:sldLayoutId xmlns:r="http://schemas.openxmlformats.org/officeDocument/2006/relationships" id="2147483659" r:id="R9180687c7f254cf8"/>
   </p:sldLayoutIdLst>
   <p:txStyles>
     <p:titleStyle>
-      <a:lvl1pPr algn="ctr" defTabSz="457200" rtl="0" eaLnBrk="1" latinLnBrk="0" hangingPunct="1">
+      <a:lvl1pPr xmlns:a="http://schemas.openxmlformats.org/drawingml/2006/main" algn="ctr" defTabSz="457200">
         <a:spcBef>
           <a:spcPct val="0"/>
         </a:spcBef>
@@ -2842,13 +3855,13 @@
             <a:schemeClr val="tx1"/>
           </a:solidFill>
           <a:latin typeface="+mj-lt"/>
-          <a:ea typeface="+mj-ea"/>
-          <a:cs typeface="+mj-cs"/>
+          <a:ea typeface="+mj-lt"/>
+          <a:cs typeface="+mj-lt"/>
         </a:defRPr>
       </a:lvl1pPr>
     </p:titleStyle>
     <p:bodyStyle>
-      <a:lvl1pPr marL="342900" indent="-342900" algn="l" defTabSz="457200" rtl="0" eaLnBrk="1" latinLnBrk="0" hangingPunct="1">
+      <a:lvl1pPr xmlns:a="http://schemas.openxmlformats.org/drawingml/2006/main" marL="342900" indent="-342900" algn="l" defTabSz="457200">
         <a:spcBef>
           <a:spcPct val="20000"/>
         </a:spcBef>
@@ -2859,11 +3872,11 @@
             <a:schemeClr val="tx1"/>
           </a:solidFill>
           <a:latin typeface="+mn-lt"/>
-          <a:ea typeface="+mn-ea"/>
-          <a:cs typeface="+mn-cs"/>
+          <a:ea typeface="+mn-lt"/>
+          <a:cs typeface="+mn-lt"/>
         </a:defRPr>
       </a:lvl1pPr>
-      <a:lvl2pPr marL="742950" indent="-285750" algn="l" defTabSz="457200" rtl="0" eaLnBrk="1" latinLnBrk="0" hangingPunct="1">
+      <a:lvl2pPr xmlns:a="http://schemas.openxmlformats.org/drawingml/2006/main" marL="742950" indent="-285750" algn="l" defTabSz="457200">
         <a:spcBef>
           <a:spcPct val="20000"/>
         </a:spcBef>
@@ -2874,11 +3887,11 @@
             <a:schemeClr val="tx1"/>
           </a:solidFill>
           <a:latin typeface="+mn-lt"/>
-          <a:ea typeface="+mn-ea"/>
-          <a:cs typeface="+mn-cs"/>
+          <a:ea typeface="+mn-lt"/>
+          <a:cs typeface="+mn-lt"/>
         </a:defRPr>
       </a:lvl2pPr>
-      <a:lvl3pPr marL="1143000" indent="-228600" algn="l" defTabSz="457200" rtl="0" eaLnBrk="1" latinLnBrk="0" hangingPunct="1">
+      <a:lvl3pPr xmlns:a="http://schemas.openxmlformats.org/drawingml/2006/main" marL="1143000" indent="-228600" algn="l" defTabSz="457200">
         <a:spcBef>
           <a:spcPct val="20000"/>
         </a:spcBef>
@@ -2889,11 +3902,11 @@
             <a:schemeClr val="tx1"/>
           </a:solidFill>
           <a:latin typeface="+mn-lt"/>
-          <a:ea typeface="+mn-ea"/>
-          <a:cs typeface="+mn-cs"/>
+          <a:ea typeface="+mn-lt"/>
+          <a:cs typeface="+mn-lt"/>
         </a:defRPr>
       </a:lvl3pPr>
-      <a:lvl4pPr marL="1600200" indent="-228600" algn="l" defTabSz="457200" rtl="0" eaLnBrk="1" latinLnBrk="0" hangingPunct="1">
+      <a:lvl4pPr xmlns:a="http://schemas.openxmlformats.org/drawingml/2006/main" marL="1600200" indent="-228600" algn="l" defTabSz="457200">
         <a:spcBef>
           <a:spcPct val="20000"/>
         </a:spcBef>
@@ -2904,11 +3917,11 @@
             <a:schemeClr val="tx1"/>
           </a:solidFill>
           <a:latin typeface="+mn-lt"/>
-          <a:ea typeface="+mn-ea"/>
-          <a:cs typeface="+mn-cs"/>
+          <a:ea typeface="+mn-lt"/>
+          <a:cs typeface="+mn-lt"/>
         </a:defRPr>
       </a:lvl4pPr>
-      <a:lvl5pPr marL="2057400" indent="-228600" algn="l" defTabSz="457200" rtl="0" eaLnBrk="1" latinLnBrk="0" hangingPunct="1">
+      <a:lvl5pPr xmlns:a="http://schemas.openxmlformats.org/drawingml/2006/main" marL="2057400" indent="-228600" algn="l" defTabSz="457200">
         <a:spcBef>
           <a:spcPct val="20000"/>
         </a:spcBef>
@@ -2919,11 +3932,11 @@
             <a:schemeClr val="tx1"/>
           </a:solidFill>
           <a:latin typeface="+mn-lt"/>
-          <a:ea typeface="+mn-ea"/>
-          <a:cs typeface="+mn-cs"/>
+          <a:ea typeface="+mn-lt"/>
+          <a:cs typeface="+mn-lt"/>
         </a:defRPr>
       </a:lvl5pPr>
-      <a:lvl6pPr marL="2514600" indent="-228600" algn="l" defTabSz="457200" rtl="0" eaLnBrk="1" latinLnBrk="0" hangingPunct="1">
+      <a:lvl6pPr xmlns:a="http://schemas.openxmlformats.org/drawingml/2006/main" marL="2514600" indent="-228600" algn="l" defTabSz="457200">
         <a:spcBef>
           <a:spcPct val="20000"/>
         </a:spcBef>
@@ -2934,11 +3947,11 @@
             <a:schemeClr val="tx1"/>
           </a:solidFill>
           <a:latin typeface="+mn-lt"/>
-          <a:ea typeface="+mn-ea"/>
-          <a:cs typeface="+mn-cs"/>
+          <a:ea typeface="+mn-lt"/>
+          <a:cs typeface="+mn-lt"/>
         </a:defRPr>
       </a:lvl6pPr>
-      <a:lvl7pPr marL="2971800" indent="-228600" algn="l" defTabSz="457200" rtl="0" eaLnBrk="1" latinLnBrk="0" hangingPunct="1">
+      <a:lvl7pPr xmlns:a="http://schemas.openxmlformats.org/drawingml/2006/main" marL="2971800" indent="-228600" algn="l" defTabSz="457200">
         <a:spcBef>
           <a:spcPct val="20000"/>
         </a:spcBef>
@@ -2949,11 +3962,11 @@
             <a:schemeClr val="tx1"/>
           </a:solidFill>
           <a:latin typeface="+mn-lt"/>
-          <a:ea typeface="+mn-ea"/>
-          <a:cs typeface="+mn-cs"/>
+          <a:ea typeface="+mn-lt"/>
+          <a:cs typeface="+mn-lt"/>
         </a:defRPr>
       </a:lvl7pPr>
-      <a:lvl8pPr marL="3429000" indent="-228600" algn="l" defTabSz="457200" rtl="0" eaLnBrk="1" latinLnBrk="0" hangingPunct="1">
+      <a:lvl8pPr xmlns:a="http://schemas.openxmlformats.org/drawingml/2006/main" marL="3429000" indent="-228600" algn="l" defTabSz="457200">
         <a:spcBef>
           <a:spcPct val="20000"/>
         </a:spcBef>
@@ -2964,11 +3977,11 @@
             <a:schemeClr val="tx1"/>
           </a:solidFill>
           <a:latin typeface="+mn-lt"/>
-          <a:ea typeface="+mn-ea"/>
-          <a:cs typeface="+mn-cs"/>
+          <a:ea typeface="+mn-lt"/>
+          <a:cs typeface="+mn-lt"/>
         </a:defRPr>
       </a:lvl8pPr>
-      <a:lvl9pPr marL="3886200" indent="-228600" algn="l" defTabSz="457200" rtl="0" eaLnBrk="1" latinLnBrk="0" hangingPunct="1">
+      <a:lvl9pPr xmlns:a="http://schemas.openxmlformats.org/drawingml/2006/main" marL="3886200" indent="-228600" algn="l" defTabSz="457200">
         <a:spcBef>
           <a:spcPct val="20000"/>
         </a:spcBef>
@@ -2979,103 +3992,109 @@
             <a:schemeClr val="tx1"/>
           </a:solidFill>
           <a:latin typeface="+mn-lt"/>
-          <a:ea typeface="+mn-ea"/>
-          <a:cs typeface="+mn-cs"/>
+          <a:ea typeface="+mn-lt"/>
+          <a:cs typeface="+mn-lt"/>
         </a:defRPr>
       </a:lvl9pPr>
     </p:bodyStyle>
     <p:otherStyle>
-      <a:defPPr>
-        <a:defRPr lang="en-US"/>
-      </a:defPPr>
-      <a:lvl1pPr marL="0" algn="l" defTabSz="457200" rtl="0" eaLnBrk="1" latinLnBrk="0" hangingPunct="1">
+      <a:lvl1pPr xmlns:a="http://schemas.openxmlformats.org/drawingml/2006/main" marL="0" algn="l" defTabSz="457200">
+        <a:buNone/>
         <a:defRPr sz="1800" kern="1200">
           <a:solidFill>
             <a:schemeClr val="tx1"/>
           </a:solidFill>
           <a:latin typeface="+mn-lt"/>
-          <a:ea typeface="+mn-ea"/>
-          <a:cs typeface="+mn-cs"/>
+          <a:ea typeface="+mn-lt"/>
+          <a:cs typeface="+mn-lt"/>
         </a:defRPr>
       </a:lvl1pPr>
-      <a:lvl2pPr marL="457200" algn="l" defTabSz="457200" rtl="0" eaLnBrk="1" latinLnBrk="0" hangingPunct="1">
+      <a:lvl2pPr xmlns:a="http://schemas.openxmlformats.org/drawingml/2006/main" marL="457200" algn="l" defTabSz="457200">
+        <a:buNone/>
         <a:defRPr sz="1800" kern="1200">
           <a:solidFill>
             <a:schemeClr val="tx1"/>
           </a:solidFill>
           <a:latin typeface="+mn-lt"/>
-          <a:ea typeface="+mn-ea"/>
-          <a:cs typeface="+mn-cs"/>
+          <a:ea typeface="+mn-lt"/>
+          <a:cs typeface="+mn-lt"/>
         </a:defRPr>
       </a:lvl2pPr>
-      <a:lvl3pPr marL="914400" algn="l" defTabSz="457200" rtl="0" eaLnBrk="1" latinLnBrk="0" hangingPunct="1">
+      <a:lvl3pPr xmlns:a="http://schemas.openxmlformats.org/drawingml/2006/main" marL="914400" algn="l" defTabSz="457200">
+        <a:buNone/>
         <a:defRPr sz="1800" kern="1200">
           <a:solidFill>
             <a:schemeClr val="tx1"/>
           </a:solidFill>
           <a:latin typeface="+mn-lt"/>
-          <a:ea typeface="+mn-ea"/>
-          <a:cs typeface="+mn-cs"/>
+          <a:ea typeface="+mn-lt"/>
+          <a:cs typeface="+mn-lt"/>
         </a:defRPr>
       </a:lvl3pPr>
-      <a:lvl4pPr marL="1371600" algn="l" defTabSz="457200" rtl="0" eaLnBrk="1" latinLnBrk="0" hangingPunct="1">
+      <a:lvl4pPr xmlns:a="http://schemas.openxmlformats.org/drawingml/2006/main" marL="1371600" algn="l" defTabSz="457200">
+        <a:buNone/>
         <a:defRPr sz="1800" kern="1200">
           <a:solidFill>
             <a:schemeClr val="tx1"/>
           </a:solidFill>
           <a:latin typeface="+mn-lt"/>
-          <a:ea typeface="+mn-ea"/>
-          <a:cs typeface="+mn-cs"/>
+          <a:ea typeface="+mn-lt"/>
+          <a:cs typeface="+mn-lt"/>
         </a:defRPr>
       </a:lvl4pPr>
-      <a:lvl5pPr marL="1828800" algn="l" defTabSz="457200" rtl="0" eaLnBrk="1" latinLnBrk="0" hangingPunct="1">
+      <a:lvl5pPr xmlns:a="http://schemas.openxmlformats.org/drawingml/2006/main" marL="1828800" algn="l" defTabSz="457200">
+        <a:buNone/>
         <a:defRPr sz="1800" kern="1200">
           <a:solidFill>
             <a:schemeClr val="tx1"/>
           </a:solidFill>
           <a:latin typeface="+mn-lt"/>
-          <a:ea typeface="+mn-ea"/>
-          <a:cs typeface="+mn-cs"/>
+          <a:ea typeface="+mn-lt"/>
+          <a:cs typeface="+mn-lt"/>
         </a:defRPr>
       </a:lvl5pPr>
-      <a:lvl6pPr marL="2286000" algn="l" defTabSz="457200" rtl="0" eaLnBrk="1" latinLnBrk="0" hangingPunct="1">
+      <a:lvl6pPr xmlns:a="http://schemas.openxmlformats.org/drawingml/2006/main" marL="2286000" algn="l" defTabSz="457200">
+        <a:buNone/>
         <a:defRPr sz="1800" kern="1200">
           <a:solidFill>
             <a:schemeClr val="tx1"/>
           </a:solidFill>
           <a:latin typeface="+mn-lt"/>
-          <a:ea typeface="+mn-ea"/>
-          <a:cs typeface="+mn-cs"/>
+          <a:ea typeface="+mn-lt"/>
+          <a:cs typeface="+mn-lt"/>
         </a:defRPr>
       </a:lvl6pPr>
-      <a:lvl7pPr marL="2743200" algn="l" defTabSz="457200" rtl="0" eaLnBrk="1" latinLnBrk="0" hangingPunct="1">
+      <a:lvl7pPr xmlns:a="http://schemas.openxmlformats.org/drawingml/2006/main" marL="2743200" algn="l" defTabSz="457200">
+        <a:buNone/>
         <a:defRPr sz="1800" kern="1200">
           <a:solidFill>
             <a:schemeClr val="tx1"/>
           </a:solidFill>
           <a:latin typeface="+mn-lt"/>
-          <a:ea typeface="+mn-ea"/>
-          <a:cs typeface="+mn-cs"/>
+          <a:ea typeface="+mn-lt"/>
+          <a:cs typeface="+mn-lt"/>
         </a:defRPr>
       </a:lvl7pPr>
-      <a:lvl8pPr marL="3200400" algn="l" defTabSz="457200" rtl="0" eaLnBrk="1" latinLnBrk="0" hangingPunct="1">
+      <a:lvl8pPr xmlns:a="http://schemas.openxmlformats.org/drawingml/2006/main" marL="3200400" algn="l" defTabSz="457200">
+        <a:buNone/>
         <a:defRPr sz="1800" kern="1200">
           <a:solidFill>
             <a:schemeClr val="tx1"/>
           </a:solidFill>
           <a:latin typeface="+mn-lt"/>
-          <a:ea typeface="+mn-ea"/>
-          <a:cs typeface="+mn-cs"/>
+          <a:ea typeface="+mn-lt"/>
+          <a:cs typeface="+mn-lt"/>
         </a:defRPr>
       </a:lvl8pPr>
-      <a:lvl9pPr marL="3657600" algn="l" defTabSz="457200" rtl="0" eaLnBrk="1" latinLnBrk="0" hangingPunct="1">
+      <a:lvl9pPr xmlns:a="http://schemas.openxmlformats.org/drawingml/2006/main" marL="3657600" algn="l" defTabSz="457200">
+        <a:buNone/>
         <a:defRPr sz="1800" kern="1200">
           <a:solidFill>
             <a:schemeClr val="tx1"/>
           </a:solidFill>
           <a:latin typeface="+mn-lt"/>
-          <a:ea typeface="+mn-ea"/>
-          <a:cs typeface="+mn-cs"/>
+          <a:ea typeface="+mn-lt"/>
+          <a:cs typeface="+mn-lt"/>
         </a:defRPr>
       </a:lvl9pPr>
     </p:otherStyle>
@@ -3083,15 +4102,282 @@
 </p:sldMaster>
 </file>
 
+<file path=ppt/slideMasters/theme/theme2.xml><?xml version="1.0" encoding="utf-8"?>
+<a:theme xmlns:a="http://schemas.openxmlformats.org/drawingml/2006/main" name="Office Theme">
+  <a:themeElements>
+    <a:clrScheme name="Office">
+      <a:dk1>
+        <a:sysClr val="windowText" lastClr="000000"/>
+      </a:dk1>
+      <a:lt1>
+        <a:sysClr val="window" lastClr="FFFFFF"/>
+      </a:lt1>
+      <a:dk2>
+        <a:srgbClr val="1F497D"/>
+      </a:dk2>
+      <a:lt2>
+        <a:srgbClr val="EEECE1"/>
+      </a:lt2>
+      <a:accent1>
+        <a:srgbClr val="4F81BD"/>
+      </a:accent1>
+      <a:accent2>
+        <a:srgbClr val="C0504D"/>
+      </a:accent2>
+      <a:accent3>
+        <a:srgbClr val="9BBB59"/>
+      </a:accent3>
+      <a:accent4>
+        <a:srgbClr val="8064A2"/>
+      </a:accent4>
+      <a:accent5>
+        <a:srgbClr val="4BACC6"/>
+      </a:accent5>
+      <a:accent6>
+        <a:srgbClr val="F79646"/>
+      </a:accent6>
+      <a:hlink>
+        <a:srgbClr val="0000FF"/>
+      </a:hlink>
+      <a:folHlink>
+        <a:srgbClr val="800080"/>
+      </a:folHlink>
+    </a:clrScheme>
+    <a:fontScheme name="Office">
+      <a:majorFont>
+        <a:latin typeface="Calibri"/>
+        <a:ea typeface=""/>
+        <a:cs typeface=""/>
+        <a:font script="Jpan" typeface="ＭＳ Ｐゴシック"/>
+        <a:font script="Hang" typeface="맑은 고딕"/>
+        <a:font script="Hans" typeface="宋体"/>
+        <a:font script="Hant" typeface="新細明體"/>
+        <a:font script="Arab" typeface="Times New Roman"/>
+        <a:font script="Hebr" typeface="Times New Roman"/>
+        <a:font script="Thai" typeface="Angsana New"/>
+        <a:font script="Ethi" typeface="Nyala"/>
+        <a:font script="Beng" typeface="Vrinda"/>
+        <a:font script="Gujr" typeface="Shruti"/>
+        <a:font script="Khmr" typeface="MoolBoran"/>
+        <a:font script="Knda" typeface="Tunga"/>
+        <a:font script="Guru" typeface="Raavi"/>
+        <a:font script="Cans" typeface="Euphemia"/>
+        <a:font script="Cher" typeface="Plantagenet Cherokee"/>
+        <a:font script="Yiii" typeface="Microsoft Yi Baiti"/>
+        <a:font script="Tibt" typeface="Microsoft Himalaya"/>
+        <a:font script="Thaa" typeface="MV Boli"/>
+        <a:font script="Deva" typeface="Mangal"/>
+        <a:font script="Telu" typeface="Gautami"/>
+        <a:font script="Taml" typeface="Latha"/>
+        <a:font script="Syrc" typeface="Estrangelo Edessa"/>
+        <a:font script="Orya" typeface="Kalinga"/>
+        <a:font script="Mlym" typeface="Kartika"/>
+        <a:font script="Laoo" typeface="DokChampa"/>
+        <a:font script="Sinh" typeface="Iskoola Pota"/>
+        <a:font script="Mong" typeface="Mongolian Baiti"/>
+        <a:font script="Viet" typeface="Times New Roman"/>
+        <a:font script="Uigh" typeface="Microsoft Uighur"/>
+        <a:font script="Geor" typeface="Sylfaen"/>
+      </a:majorFont>
+      <a:minorFont>
+        <a:latin typeface="Calibri"/>
+        <a:ea typeface=""/>
+        <a:cs typeface=""/>
+        <a:font script="Jpan" typeface="ＭＳ Ｐゴシック"/>
+        <a:font script="Hang" typeface="맑은 고딕"/>
+        <a:font script="Hans" typeface="宋体"/>
+        <a:font script="Hant" typeface="新細明體"/>
+        <a:font script="Arab" typeface="Arial"/>
+        <a:font script="Hebr" typeface="Arial"/>
+        <a:font script="Thai" typeface="Cordia New"/>
+        <a:font script="Ethi" typeface="Nyala"/>
+        <a:font script="Beng" typeface="Vrinda"/>
+        <a:font script="Gujr" typeface="Shruti"/>
+        <a:font script="Khmr" typeface="DaunPenh"/>
+        <a:font script="Knda" typeface="Tunga"/>
+        <a:font script="Guru" typeface="Raavi"/>
+        <a:font script="Cans" typeface="Euphemia"/>
+        <a:font script="Cher" typeface="Plantagenet Cherokee"/>
+        <a:font script="Yiii" typeface="Microsoft Yi Baiti"/>
+        <a:font script="Tibt" typeface="Microsoft Himalaya"/>
+        <a:font script="Thaa" typeface="MV Boli"/>
+        <a:font script="Deva" typeface="Mangal"/>
+        <a:font script="Telu" typeface="Gautami"/>
+        <a:font script="Taml" typeface="Latha"/>
+        <a:font script="Syrc" typeface="Estrangelo Edessa"/>
+        <a:font script="Orya" typeface="Kalinga"/>
+        <a:font script="Mlym" typeface="Kartika"/>
+        <a:font script="Laoo" typeface="DokChampa"/>
+        <a:font script="Sinh" typeface="Iskoola Pota"/>
+        <a:font script="Mong" typeface="Mongolian Baiti"/>
+        <a:font script="Viet" typeface="Arial"/>
+        <a:font script="Uigh" typeface="Microsoft Uighur"/>
+        <a:font script="Geor" typeface="Sylfaen"/>
+      </a:minorFont>
+    </a:fontScheme>
+    <a:fmtScheme name="Office">
+      <a:fillStyleLst>
+        <a:solidFill>
+          <a:schemeClr val="phClr"/>
+        </a:solidFill>
+        <a:gradFill rotWithShape="1">
+          <a:gsLst>
+            <a:gs pos="0">
+              <a:schemeClr val="phClr">
+                <a:tint val="50000"/>
+                <a:satMod val="300000"/>
+              </a:schemeClr>
+            </a:gs>
+            <a:gs pos="35000">
+              <a:schemeClr val="phClr">
+                <a:tint val="37000"/>
+                <a:satMod val="300000"/>
+              </a:schemeClr>
+            </a:gs>
+            <a:gs pos="100000">
+              <a:schemeClr val="phClr">
+                <a:tint val="15000"/>
+                <a:satMod val="350000"/>
+              </a:schemeClr>
+            </a:gs>
+          </a:gsLst>
+          <a:lin ang="16200000" scaled="1"/>
+        </a:gradFill>
+        <a:gradFill rotWithShape="1">
+          <a:gsLst>
+            <a:gs pos="0">
+              <a:schemeClr val="phClr">
+                <a:tint val="100000"/>
+                <a:shade val="100000"/>
+                <a:satMod val="130000"/>
+              </a:schemeClr>
+            </a:gs>
+            <a:gs pos="100000">
+              <a:schemeClr val="phClr">
+                <a:tint val="50000"/>
+                <a:shade val="100000"/>
+                <a:satMod val="350000"/>
+              </a:schemeClr>
+            </a:gs>
+          </a:gsLst>
+          <a:lin ang="16200000" scaled="0"/>
+        </a:gradFill>
+      </a:fillStyleLst>
+      <a:lnStyleLst>
+        <a:ln w="9525">
+          <a:solidFill>
+            <a:schemeClr val="phClr">
+              <a:shade val="95000"/>
+              <a:satMod val="105000"/>
+            </a:schemeClr>
+          </a:solidFill>
+          <a:prstDash val="solid"/>
+        </a:ln>
+        <a:ln w="25400">
+          <a:solidFill>
+            <a:schemeClr val="phClr"/>
+          </a:solidFill>
+          <a:prstDash val="solid"/>
+        </a:ln>
+        <a:ln w="38100">
+          <a:solidFill>
+            <a:schemeClr val="phClr"/>
+          </a:solidFill>
+          <a:prstDash val="solid"/>
+        </a:ln>
+      </a:lnStyleLst>
+      <a:effectStyleLst>
+        <a:effectStyle>
+          <a:effectLst>
+            <a:outerShdw blurRad="40000" dist="20000" dir="5400000" rotWithShape="0">
+              <a:srgbClr val="000000">
+                <a:alpha val="38000"/>
+              </a:srgbClr>
+            </a:outerShdw>
+          </a:effectLst>
+        </a:effectStyle>
+        <a:effectStyle>
+          <a:effectLst>
+            <a:outerShdw blurRad="40000" dist="23000" dir="5400000" rotWithShape="0">
+              <a:srgbClr val="000000">
+                <a:alpha val="35000"/>
+              </a:srgbClr>
+            </a:outerShdw>
+          </a:effectLst>
+        </a:effectStyle>
+        <a:effectStyle>
+          <a:effectLst>
+            <a:outerShdw blurRad="40000" dist="23000" dir="5400000" rotWithShape="0">
+              <a:srgbClr val="000000">
+                <a:alpha val="35000"/>
+              </a:srgbClr>
+            </a:outerShdw>
+          </a:effectLst>
+        </a:effectStyle>
+      </a:effectStyleLst>
+      <a:bgFillStyleLst>
+        <a:solidFill>
+          <a:schemeClr val="phClr"/>
+        </a:solidFill>
+        <a:gradFill rotWithShape="1">
+          <a:gsLst>
+            <a:gs pos="0">
+              <a:schemeClr val="phClr">
+                <a:tint val="40000"/>
+                <a:satMod val="350000"/>
+              </a:schemeClr>
+            </a:gs>
+            <a:gs pos="40000">
+              <a:schemeClr val="phClr">
+                <a:tint val="45000"/>
+                <a:shade val="99000"/>
+                <a:satMod val="350000"/>
+              </a:schemeClr>
+            </a:gs>
+            <a:gs pos="100000">
+              <a:schemeClr val="phClr">
+                <a:shade val="20000"/>
+                <a:satMod val="255000"/>
+              </a:schemeClr>
+            </a:gs>
+          </a:gsLst>
+          <a:path path="circle">
+            <a:fillToRect l="50000" t="-80000" r="50000" b="180000"/>
+          </a:path>
+        </a:gradFill>
+        <a:gradFill rotWithShape="1">
+          <a:gsLst>
+            <a:gs pos="0">
+              <a:schemeClr val="phClr">
+                <a:tint val="80000"/>
+                <a:satMod val="300000"/>
+              </a:schemeClr>
+            </a:gs>
+            <a:gs pos="100000">
+              <a:schemeClr val="phClr">
+                <a:shade val="30000"/>
+                <a:satMod val="200000"/>
+              </a:schemeClr>
+            </a:gs>
+          </a:gsLst>
+          <a:path path="circle">
+            <a:fillToRect l="50000" t="50000" r="50000" b="50000"/>
+          </a:path>
+        </a:gradFill>
+      </a:bgFillStyleLst>
+    </a:fmtScheme>
+  </a:themeElements>
+</a:theme>
+</file>
+
 <file path=ppt/slides/slide1.xml><?xml version="1.0" encoding="utf-8"?>
-<p:sld xmlns:a="http://schemas.openxmlformats.org/drawingml/2006/main" xmlns:p="http://schemas.openxmlformats.org/presentationml/2006/main" xmlns:r="http://schemas.openxmlformats.org/officeDocument/2006/relationships">
+<p:sld xmlns:p="http://schemas.openxmlformats.org/presentationml/2006/main">
   <p:cSld>
     <p:bg>
       <p:bgPr>
-        <a:solidFill>
+        <a:solidFill xmlns:a="http://schemas.openxmlformats.org/drawingml/2006/main">
           <a:srgbClr val="028090"/>
         </a:solidFill>
-        <a:effectLst/>
       </p:bgPr>
     </p:bg>
     <p:spTree>
@@ -3100,30 +4386,41 @@
         <p:cNvGrpSpPr/>
         <p:nvPr/>
       </p:nvGrpSpPr>
-      <p:grpSpPr/>
-      <p:sp>
-        <p:nvSpPr>
-          <p:cNvPr id="2" name="TextBox 1"/>
-          <p:cNvSpPr txBox="1"/>
+      <p:grpSpPr>
+        <a:xfrm xmlns:a="http://schemas.openxmlformats.org/drawingml/2006/main"/>
+      </p:grpSpPr>
+      <p:sp>
+        <p:nvSpPr>
+          <p:cNvPr id="2" name="TextBox 1">
+            <a:extLst xmlns:a="http://schemas.openxmlformats.org/drawingml/2006/main">
+              <a:ext uri="{FF2B5EF4-FFF2-40B4-BE49-F238E27FC236}">
+                <a16:creationId xmlns:a16="http://schemas.microsoft.com/office/drawing/2014/main" id="{A6BC4CD6-D878-4297-A0FA-AB8C7561AE2A}"/>
+              </a:ext>
+            </a:extLst>
+          </p:cNvPr>
+          <p:cNvSpPr>
+            <a:spLocks xmlns:a="http://schemas.openxmlformats.org/drawingml/2006/main" noGrp="1"/>
+          </p:cNvSpPr>
           <p:nvPr/>
         </p:nvSpPr>
         <p:spPr>
-          <a:xfrm>
+          <a:xfrm xmlns:a="http://schemas.openxmlformats.org/drawingml/2006/main">
             <a:off x="457200" y="457200"/>
-            <a:ext cx="8229600" cy="731520"/>
+            <a:ext cx="8229600" cy="762000"/>
           </a:xfrm>
-          <a:prstGeom prst="rect">
+          <a:prstGeom xmlns:a="http://schemas.openxmlformats.org/drawingml/2006/main" prst="rect">
             <a:avLst/>
           </a:prstGeom>
-          <a:noFill/>
-        </p:spPr>
-        <p:txBody>
-          <a:bodyPr wrap="none">
+          <a:noFill xmlns:a="http://schemas.openxmlformats.org/drawingml/2006/main"/>
+        </p:spPr>
+        <p:txBody>
+          <a:bodyPr xmlns:a="http://schemas.openxmlformats.org/drawingml/2006/main" wrap="none">
             <a:spAutoFit/>
           </a:bodyPr>
-          <a:lstStyle/>
-          <a:p>
+          <a:lstStyle xmlns:a="http://schemas.openxmlformats.org/drawingml/2006/main"/>
+          <a:p xmlns:a="http://schemas.openxmlformats.org/drawingml/2006/main">
             <a:pPr>
+              <a:buNone/>
               <a:defRPr sz="4400" b="1">
                 <a:solidFill>
                   <a:srgbClr val="FFFFFF"/>
@@ -3138,109 +4435,118 @@
       </p:sp>
       <p:sp>
         <p:nvSpPr>
-          <p:cNvPr id="3" name="TextBox 2"/>
-          <p:cNvSpPr txBox="1"/>
+          <p:cNvPr id="3" name="TextBox 2">
+            <a:extLst xmlns:a="http://schemas.openxmlformats.org/drawingml/2006/main">
+              <a:ext uri="{FF2B5EF4-FFF2-40B4-BE49-F238E27FC236}">
+                <a16:creationId xmlns:a16="http://schemas.microsoft.com/office/drawing/2014/main" id="{E3F50C68-69E0-4585-9156-442B7B3DF418}"/>
+              </a:ext>
+            </a:extLst>
+          </p:cNvPr>
+          <p:cNvSpPr>
+            <a:spLocks xmlns:a="http://schemas.openxmlformats.org/drawingml/2006/main" noGrp="1"/>
+          </p:cNvSpPr>
           <p:nvPr/>
         </p:nvSpPr>
         <p:spPr>
-          <a:xfrm>
+          <a:xfrm xmlns:a="http://schemas.openxmlformats.org/drawingml/2006/main">
             <a:off x="457200" y="1371600"/>
             <a:ext cx="8229600" cy="457200"/>
           </a:xfrm>
-          <a:prstGeom prst="rect">
+          <a:prstGeom xmlns:a="http://schemas.openxmlformats.org/drawingml/2006/main" prst="rect">
             <a:avLst/>
           </a:prstGeom>
-          <a:noFill/>
-        </p:spPr>
-        <p:txBody>
-          <a:bodyPr wrap="square" anchor="t">
+          <a:noFill xmlns:a="http://schemas.openxmlformats.org/drawingml/2006/main"/>
+        </p:spPr>
+        <p:txBody>
+          <a:bodyPr xmlns:a="http://schemas.openxmlformats.org/drawingml/2006/main" wrap="square" anchor="t">
             <a:spAutoFit/>
           </a:bodyPr>
-          <a:lstStyle/>
-          <a:p>
+          <a:lstStyle xmlns:a="http://schemas.openxmlformats.org/drawingml/2006/main"/>
+          <a:p xmlns:a="http://schemas.openxmlformats.org/drawingml/2006/main">
             <a:r>
               <a:rPr sz="1800" b="1">
                 <a:solidFill>
                   <a:srgbClr val="FFFFFF"/>
                 </a:solidFill>
               </a:rPr>
-              <a:t>Job executor: </a:t>
-            </a:r>
-            <a:r>
-              <a:rPr sz="1800">
-                <a:solidFill>
-                  <a:srgbClr val="FFFFFF"/>
-                </a:solidFill>
-              </a:rPr>
-              <a:t>Học viên vừa xem xong slide bài học</a:t>
-            </a:r>
-          </a:p>
-        </p:txBody>
-      </p:sp>
-      <p:sp>
-        <p:nvSpPr>
-          <p:cNvPr id="4" name="TextBox 3"/>
-          <p:cNvSpPr txBox="1"/>
+              <a:t>Job executor: Học viên vừa học xong một phần slide trong VLearn</a:t>
+            </a:r>
+          </a:p>
+        </p:txBody>
+      </p:sp>
+      <p:sp>
+        <p:nvSpPr>
+          <p:cNvPr id="4" name="TextBox 3">
+            <a:extLst xmlns:a="http://schemas.openxmlformats.org/drawingml/2006/main">
+              <a:ext uri="{FF2B5EF4-FFF2-40B4-BE49-F238E27FC236}">
+                <a16:creationId xmlns:a16="http://schemas.microsoft.com/office/drawing/2014/main" id="{FB65745E-C749-4173-AAFD-84A0AD278DA7}"/>
+              </a:ext>
+            </a:extLst>
+          </p:cNvPr>
+          <p:cNvSpPr>
+            <a:spLocks xmlns:a="http://schemas.openxmlformats.org/drawingml/2006/main" noGrp="1"/>
+          </p:cNvSpPr>
           <p:nvPr/>
         </p:nvSpPr>
         <p:spPr>
-          <a:xfrm>
+          <a:xfrm xmlns:a="http://schemas.openxmlformats.org/drawingml/2006/main">
             <a:off x="457200" y="2011680"/>
             <a:ext cx="8229600" cy="731520"/>
           </a:xfrm>
-          <a:prstGeom prst="rect">
+          <a:prstGeom xmlns:a="http://schemas.openxmlformats.org/drawingml/2006/main" prst="rect">
             <a:avLst/>
           </a:prstGeom>
-          <a:noFill/>
-        </p:spPr>
-        <p:txBody>
-          <a:bodyPr wrap="square" anchor="t">
+          <a:noFill xmlns:a="http://schemas.openxmlformats.org/drawingml/2006/main"/>
+        </p:spPr>
+        <p:txBody>
+          <a:bodyPr xmlns:a="http://schemas.openxmlformats.org/drawingml/2006/main" wrap="square" anchor="t">
             <a:spAutoFit/>
           </a:bodyPr>
-          <a:lstStyle/>
-          <a:p>
+          <a:lstStyle xmlns:a="http://schemas.openxmlformats.org/drawingml/2006/main"/>
+          <a:p xmlns:a="http://schemas.openxmlformats.org/drawingml/2006/main">
             <a:r>
               <a:rPr sz="1800" b="1">
                 <a:solidFill>
                   <a:srgbClr val="FFFFFF"/>
                 </a:solidFill>
               </a:rPr>
-              <a:t>Core JTBD: </a:t>
-            </a:r>
-            <a:r>
-              <a:rPr sz="1800">
-                <a:solidFill>
-                  <a:srgbClr val="FFFFFF"/>
-                </a:solidFill>
-              </a:rPr>
-              <a:t>Kiểm tra nhanh mức độ nhớ kiến thức trước khi hỏi tutor hoặc tiếp tục bài mới</a:t>
-            </a:r>
-          </a:p>
-        </p:txBody>
-      </p:sp>
-      <p:sp>
-        <p:nvSpPr>
-          <p:cNvPr id="5" name="TextBox 4"/>
-          <p:cNvSpPr txBox="1"/>
+              <a:t>Core JTBD: Kiểm tra mình còn nhớ đúng ý chính nào trước khi chuyển sang nội dung tiếp theo</a:t>
+            </a:r>
+          </a:p>
+        </p:txBody>
+      </p:sp>
+      <p:sp>
+        <p:nvSpPr>
+          <p:cNvPr id="5" name="TextBox 4">
+            <a:extLst xmlns:a="http://schemas.openxmlformats.org/drawingml/2006/main">
+              <a:ext uri="{FF2B5EF4-FFF2-40B4-BE49-F238E27FC236}">
+                <a16:creationId xmlns:a16="http://schemas.microsoft.com/office/drawing/2014/main" id="{25851B91-F5DA-4F0A-B318-37474ACAD15C}"/>
+              </a:ext>
+            </a:extLst>
+          </p:cNvPr>
+          <p:cNvSpPr>
+            <a:spLocks xmlns:a="http://schemas.openxmlformats.org/drawingml/2006/main" noGrp="1"/>
+          </p:cNvSpPr>
           <p:nvPr/>
         </p:nvSpPr>
         <p:spPr>
-          <a:xfrm>
+          <a:xfrm xmlns:a="http://schemas.openxmlformats.org/drawingml/2006/main">
             <a:off x="457200" y="2926080"/>
-            <a:ext cx="8229600" cy="365760"/>
+            <a:ext cx="8229600" cy="457200"/>
           </a:xfrm>
-          <a:prstGeom prst="rect">
+          <a:prstGeom xmlns:a="http://schemas.openxmlformats.org/drawingml/2006/main" prst="rect">
             <a:avLst/>
           </a:prstGeom>
-          <a:noFill/>
-        </p:spPr>
-        <p:txBody>
-          <a:bodyPr wrap="square" anchor="t">
+          <a:noFill xmlns:a="http://schemas.openxmlformats.org/drawingml/2006/main"/>
+        </p:spPr>
+        <p:txBody>
+          <a:bodyPr xmlns:a="http://schemas.openxmlformats.org/drawingml/2006/main" wrap="square" anchor="t">
             <a:spAutoFit/>
           </a:bodyPr>
-          <a:lstStyle/>
-          <a:p>
+          <a:lstStyle xmlns:a="http://schemas.openxmlformats.org/drawingml/2006/main"/>
+          <a:p xmlns:a="http://schemas.openxmlformats.org/drawingml/2006/main">
             <a:pPr>
+              <a:buNone/>
               <a:defRPr sz="2400" b="1">
                 <a:solidFill>
                   <a:srgbClr val="FFFFFF"/>
@@ -3248,34 +4554,43 @@
               </a:defRPr>
             </a:pPr>
             <a:r>
-              <a:t>Pain Evidence</a:t>
-            </a:r>
-          </a:p>
-        </p:txBody>
-      </p:sp>
-      <p:sp>
-        <p:nvSpPr>
-          <p:cNvPr id="6" name="TextBox 5"/>
-          <p:cNvSpPr txBox="1"/>
+              <a:t>Evidence: nhu cầu cần câu trả lời có căn cứ</a:t>
+            </a:r>
+          </a:p>
+        </p:txBody>
+      </p:sp>
+      <p:sp>
+        <p:nvSpPr>
+          <p:cNvPr id="6" name="TextBox 5">
+            <a:extLst xmlns:a="http://schemas.openxmlformats.org/drawingml/2006/main">
+              <a:ext uri="{FF2B5EF4-FFF2-40B4-BE49-F238E27FC236}">
+                <a16:creationId xmlns:a16="http://schemas.microsoft.com/office/drawing/2014/main" id="{E0079A9A-655E-4B81-88A5-2328257A6E50}"/>
+              </a:ext>
+            </a:extLst>
+          </p:cNvPr>
+          <p:cNvSpPr>
+            <a:spLocks xmlns:a="http://schemas.openxmlformats.org/drawingml/2006/main" noGrp="1"/>
+          </p:cNvSpPr>
           <p:nvPr/>
         </p:nvSpPr>
         <p:spPr>
-          <a:xfrm>
+          <a:xfrm xmlns:a="http://schemas.openxmlformats.org/drawingml/2006/main">
             <a:off x="457200" y="3474720"/>
             <a:ext cx="8229600" cy="1371600"/>
           </a:xfrm>
-          <a:prstGeom prst="rect">
+          <a:prstGeom xmlns:a="http://schemas.openxmlformats.org/drawingml/2006/main" prst="rect">
             <a:avLst/>
           </a:prstGeom>
-          <a:noFill/>
-        </p:spPr>
-        <p:txBody>
-          <a:bodyPr wrap="square" anchor="t">
+          <a:noFill xmlns:a="http://schemas.openxmlformats.org/drawingml/2006/main"/>
+        </p:spPr>
+        <p:txBody>
+          <a:bodyPr xmlns:a="http://schemas.openxmlformats.org/drawingml/2006/main" wrap="square" anchor="t">
             <a:spAutoFit/>
           </a:bodyPr>
-          <a:lstStyle/>
-          <a:p>
+          <a:lstStyle xmlns:a="http://schemas.openxmlformats.org/drawingml/2006/main"/>
+          <a:p xmlns:a="http://schemas.openxmlformats.org/drawingml/2006/main">
             <a:pPr>
+              <a:buNone/>
               <a:defRPr sz="1400">
                 <a:solidFill>
                   <a:srgbClr val="FFFFFF"/>
@@ -3283,47 +4598,45 @@
               </a:defRPr>
             </a:pPr>
             <a:r>
-              <a:t>[TODO: Mining result]</a:t>
-            </a:r>
-            <a:br/>
-            <a:r>
-              <a:t>VD: 67/200 chatlog (33.5%) học viên hỏi tutor "em có hiểu đúng không" hoặc "kiểm tra hiểu của em" ngay sau xem slide.</a:t>
-            </a:r>
-            <a:br/>
-            <a:br/>
-            <a:r>
-              <a:t>[TODO: Survey result]</a:t>
-            </a:r>
-            <a:br/>
-            <a:r>
-              <a:t>VD: 18/22 học viên khảo sát (82%) xác nhận "muốn tự kiểm tra trước khi hỏi để không hỏi sai trọng tâm".</a:t>
-            </a:r>
-          </a:p>
-        </p:txBody>
-      </p:sp>
-      <p:sp>
-        <p:nvSpPr>
-          <p:cNvPr id="7" name="TextBox 6"/>
-          <p:cNvSpPr txBox="1"/>
+              <a:t>DATA PACK: 369 user · 1.261 lượt hỏi · 585 hội thoại
+ÔN / GIẢI THÍCH: 326 user · 1.074 lượt review_concept
+448 lượt (41,7%) thiếu citation → phải tự dò lại slide</a:t>
+            </a:r>
+          </a:p>
+        </p:txBody>
+      </p:sp>
+      <p:sp>
+        <p:nvSpPr>
+          <p:cNvPr id="7" name="TextBox 6">
+            <a:extLst xmlns:a="http://schemas.openxmlformats.org/drawingml/2006/main">
+              <a:ext uri="{FF2B5EF4-FFF2-40B4-BE49-F238E27FC236}">
+                <a16:creationId xmlns:a16="http://schemas.microsoft.com/office/drawing/2014/main" id="{6035DDEF-4EB0-4F90-847A-BFC92CCFA538}"/>
+              </a:ext>
+            </a:extLst>
+          </p:cNvPr>
+          <p:cNvSpPr>
+            <a:spLocks xmlns:a="http://schemas.openxmlformats.org/drawingml/2006/main" noGrp="1"/>
+          </p:cNvSpPr>
           <p:nvPr/>
         </p:nvSpPr>
         <p:spPr>
-          <a:xfrm>
+          <a:xfrm xmlns:a="http://schemas.openxmlformats.org/drawingml/2006/main">
             <a:off x="457200" y="4663440"/>
             <a:ext cx="8229600" cy="274320"/>
           </a:xfrm>
-          <a:prstGeom prst="rect">
+          <a:prstGeom xmlns:a="http://schemas.openxmlformats.org/drawingml/2006/main" prst="rect">
             <a:avLst/>
           </a:prstGeom>
-          <a:noFill/>
-        </p:spPr>
-        <p:txBody>
-          <a:bodyPr wrap="none">
+          <a:noFill xmlns:a="http://schemas.openxmlformats.org/drawingml/2006/main"/>
+        </p:spPr>
+        <p:txBody>
+          <a:bodyPr xmlns:a="http://schemas.openxmlformats.org/drawingml/2006/main" wrap="none">
             <a:spAutoFit/>
           </a:bodyPr>
-          <a:lstStyle/>
-          <a:p>
+          <a:lstStyle xmlns:a="http://schemas.openxmlformats.org/drawingml/2006/main"/>
+          <a:p xmlns:a="http://schemas.openxmlformats.org/drawingml/2006/main">
             <a:pPr>
+              <a:buNone/>
               <a:defRPr sz="1000" i="1">
                 <a:solidFill>
                   <a:srgbClr val="F3F4F6"/>
@@ -3331,28 +4644,29 @@
               </a:defRPr>
             </a:pPr>
             <a:r>
-              <a:t>CP1 Canvas → spec.md §1-2 + evidence log</a:t>
+              <a:t>Nguồn: evidence/mining-log.md · phương pháp đếm có thể chạy lại</a:t>
             </a:r>
           </a:p>
         </p:txBody>
       </p:sp>
     </p:spTree>
+    <p:extLst>
+      <p:ext uri="{BB962C8B-B14F-4D97-AF65-F5344CB8AC3E}">
+        <p14:creationId xmlns:p14="http://schemas.microsoft.com/office/powerpoint/2010/main" val="747335626"/>
+      </p:ext>
+    </p:extLst>
   </p:cSld>
-  <p:clrMapOvr>
-    <a:masterClrMapping/>
-  </p:clrMapOvr>
 </p:sld>
 </file>
 
 <file path=ppt/slides/slide2.xml><?xml version="1.0" encoding="utf-8"?>
-<p:sld xmlns:a="http://schemas.openxmlformats.org/drawingml/2006/main" xmlns:p="http://schemas.openxmlformats.org/presentationml/2006/main" xmlns:r="http://schemas.openxmlformats.org/officeDocument/2006/relationships">
+<p:sld xmlns:p="http://schemas.openxmlformats.org/presentationml/2006/main">
   <p:cSld>
     <p:bg>
       <p:bgPr>
-        <a:solidFill>
+        <a:solidFill xmlns:a="http://schemas.openxmlformats.org/drawingml/2006/main">
           <a:srgbClr val="FFFFFF"/>
         </a:solidFill>
-        <a:effectLst/>
       </p:bgPr>
     </p:bg>
     <p:spTree>
@@ -3361,30 +4675,41 @@
         <p:cNvGrpSpPr/>
         <p:nvPr/>
       </p:nvGrpSpPr>
-      <p:grpSpPr/>
-      <p:sp>
-        <p:nvSpPr>
-          <p:cNvPr id="2" name="TextBox 1"/>
-          <p:cNvSpPr txBox="1"/>
+      <p:grpSpPr>
+        <a:xfrm xmlns:a="http://schemas.openxmlformats.org/drawingml/2006/main"/>
+      </p:grpSpPr>
+      <p:sp>
+        <p:nvSpPr>
+          <p:cNvPr id="2" name="TextBox 1">
+            <a:extLst xmlns:a="http://schemas.openxmlformats.org/drawingml/2006/main">
+              <a:ext uri="{FF2B5EF4-FFF2-40B4-BE49-F238E27FC236}">
+                <a16:creationId xmlns:a16="http://schemas.microsoft.com/office/drawing/2014/main" id="{BCBC18B5-5731-4198-9779-C526761DBD7D}"/>
+              </a:ext>
+            </a:extLst>
+          </p:cNvPr>
+          <p:cNvSpPr>
+            <a:spLocks xmlns:a="http://schemas.openxmlformats.org/drawingml/2006/main" noGrp="1"/>
+          </p:cNvSpPr>
           <p:nvPr/>
         </p:nvSpPr>
         <p:spPr>
-          <a:xfrm>
+          <a:xfrm xmlns:a="http://schemas.openxmlformats.org/drawingml/2006/main">
             <a:off x="457200" y="457200"/>
-            <a:ext cx="8229600" cy="548640"/>
+            <a:ext cx="8229600" cy="640080"/>
           </a:xfrm>
-          <a:prstGeom prst="rect">
+          <a:prstGeom xmlns:a="http://schemas.openxmlformats.org/drawingml/2006/main" prst="rect">
             <a:avLst/>
           </a:prstGeom>
-          <a:noFill/>
-        </p:spPr>
-        <p:txBody>
-          <a:bodyPr wrap="none">
+          <a:noFill xmlns:a="http://schemas.openxmlformats.org/drawingml/2006/main"/>
+        </p:spPr>
+        <p:txBody>
+          <a:bodyPr xmlns:a="http://schemas.openxmlformats.org/drawingml/2006/main" wrap="none">
             <a:spAutoFit/>
           </a:bodyPr>
-          <a:lstStyle/>
-          <a:p>
+          <a:lstStyle xmlns:a="http://schemas.openxmlformats.org/drawingml/2006/main"/>
+          <a:p xmlns:a="http://schemas.openxmlformats.org/drawingml/2006/main">
             <a:pPr>
+              <a:buNone/>
               <a:defRPr sz="3600" b="1">
                 <a:solidFill>
                   <a:srgbClr val="212121"/>
@@ -3392,34 +4717,43 @@
               </a:defRPr>
             </a:pPr>
             <a:r>
-              <a:t>Vì sao chọn tính năng này</a:t>
-            </a:r>
-          </a:p>
-        </p:txBody>
-      </p:sp>
-      <p:sp>
-        <p:nvSpPr>
-          <p:cNvPr id="3" name="TextBox 2"/>
-          <p:cNvSpPr txBox="1"/>
+              <a:t>Vì sao chọn quiz từ slide</a:t>
+            </a:r>
+          </a:p>
+        </p:txBody>
+      </p:sp>
+      <p:sp>
+        <p:nvSpPr>
+          <p:cNvPr id="3" name="TextBox 2">
+            <a:extLst xmlns:a="http://schemas.openxmlformats.org/drawingml/2006/main">
+              <a:ext uri="{FF2B5EF4-FFF2-40B4-BE49-F238E27FC236}">
+                <a16:creationId xmlns:a16="http://schemas.microsoft.com/office/drawing/2014/main" id="{EAC3D0D1-9C55-440F-B9F6-FF59C66F99F2}"/>
+              </a:ext>
+            </a:extLst>
+          </p:cNvPr>
+          <p:cNvSpPr>
+            <a:spLocks xmlns:a="http://schemas.openxmlformats.org/drawingml/2006/main" noGrp="1"/>
+          </p:cNvSpPr>
           <p:nvPr/>
         </p:nvSpPr>
         <p:spPr>
-          <a:xfrm>
+          <a:xfrm xmlns:a="http://schemas.openxmlformats.org/drawingml/2006/main">
             <a:off x="457200" y="1188720"/>
-            <a:ext cx="8229600" cy="365760"/>
+            <a:ext cx="8229600" cy="396240"/>
           </a:xfrm>
-          <a:prstGeom prst="rect">
+          <a:prstGeom xmlns:a="http://schemas.openxmlformats.org/drawingml/2006/main" prst="rect">
             <a:avLst/>
           </a:prstGeom>
-          <a:noFill/>
-        </p:spPr>
-        <p:txBody>
-          <a:bodyPr wrap="square" anchor="t">
+          <a:noFill xmlns:a="http://schemas.openxmlformats.org/drawingml/2006/main"/>
+        </p:spPr>
+        <p:txBody>
+          <a:bodyPr xmlns:a="http://schemas.openxmlformats.org/drawingml/2006/main" wrap="square" anchor="t">
             <a:spAutoFit/>
           </a:bodyPr>
-          <a:lstStyle/>
-          <a:p>
+          <a:lstStyle xmlns:a="http://schemas.openxmlformats.org/drawingml/2006/main"/>
+          <a:p xmlns:a="http://schemas.openxmlformats.org/drawingml/2006/main">
             <a:pPr>
+              <a:buNone/>
               <a:defRPr sz="2000" b="1">
                 <a:solidFill>
                   <a:srgbClr val="028090"/>
@@ -3427,34 +4761,43 @@
               </a:defRPr>
             </a:pPr>
             <a:r>
-              <a:t>Impact Comparison (3 ứng viên)</a:t>
-            </a:r>
-          </a:p>
-        </p:txBody>
-      </p:sp>
-      <p:sp>
-        <p:nvSpPr>
-          <p:cNvPr id="4" name="TextBox 3"/>
-          <p:cNvSpPr txBox="1"/>
+              <a:t>So sánh impact bằng dữ liệu thật</a:t>
+            </a:r>
+          </a:p>
+        </p:txBody>
+      </p:sp>
+      <p:sp>
+        <p:nvSpPr>
+          <p:cNvPr id="4" name="TextBox 3">
+            <a:extLst xmlns:a="http://schemas.openxmlformats.org/drawingml/2006/main">
+              <a:ext uri="{FF2B5EF4-FFF2-40B4-BE49-F238E27FC236}">
+                <a16:creationId xmlns:a16="http://schemas.microsoft.com/office/drawing/2014/main" id="{E76AFB7F-2A72-4797-AA75-B36DF9026ECF}"/>
+              </a:ext>
+            </a:extLst>
+          </p:cNvPr>
+          <p:cNvSpPr>
+            <a:spLocks xmlns:a="http://schemas.openxmlformats.org/drawingml/2006/main" noGrp="1"/>
+          </p:cNvSpPr>
           <p:nvPr/>
         </p:nvSpPr>
         <p:spPr>
-          <a:xfrm>
+          <a:xfrm xmlns:a="http://schemas.openxmlformats.org/drawingml/2006/main">
             <a:off x="457200" y="1737360"/>
             <a:ext cx="8229600" cy="2560320"/>
           </a:xfrm>
-          <a:prstGeom prst="rect">
+          <a:prstGeom xmlns:a="http://schemas.openxmlformats.org/drawingml/2006/main" prst="rect">
             <a:avLst/>
           </a:prstGeom>
-          <a:noFill/>
-        </p:spPr>
-        <p:txBody>
-          <a:bodyPr wrap="square" anchor="t">
+          <a:noFill xmlns:a="http://schemas.openxmlformats.org/drawingml/2006/main"/>
+        </p:spPr>
+        <p:txBody>
+          <a:bodyPr xmlns:a="http://schemas.openxmlformats.org/drawingml/2006/main" wrap="square" anchor="t">
             <a:spAutoFit/>
           </a:bodyPr>
-          <a:lstStyle/>
-          <a:p>
+          <a:lstStyle xmlns:a="http://schemas.openxmlformats.org/drawingml/2006/main"/>
+          <a:p xmlns:a="http://schemas.openxmlformats.org/drawingml/2006/main">
             <a:pPr>
+              <a:buNone/>
               <a:defRPr sz="1200">
                 <a:solidFill>
                   <a:srgbClr val="212121"/>
@@ -3462,52 +4805,49 @@
               </a:defRPr>
             </a:pPr>
             <a:r>
-              <a:t>[TODO: Bảng impact 3 ứng viên]</a:t>
-            </a:r>
-            <a:br/>
-            <a:br/>
-            <a:r>
-              <a:t>Cột: Ứng viên | Người gặp | Tần suất | Mỗi lần tốn | Build nổi? | Chọn?</a:t>
-            </a:r>
-            <a:br/>
-            <a:br/>
-            <a:r>
-              <a:t>1. Quiz từ slide: ~200 HV, mỗi buổi, 5-10' tìm câu hỏi, ✓, CHỌN</a:t>
-            </a:r>
-            <a:br/>
-            <a:r>
-              <a:t>2. Tóm tắt buổi: [TODO], mỗi buổi, 15' viết notes, ✓, ✗ Evidence yếu</a:t>
-            </a:r>
-            <a:br/>
-            <a:r>
-              <a:t>3. Chatbot logistics: [TODO], mỗi tuần, chờ TA, ✓, ✗ Ít người gặp</a:t>
-            </a:r>
-          </a:p>
-        </p:txBody>
-      </p:sp>
-      <p:sp>
-        <p:nvSpPr>
-          <p:cNvPr id="5" name="TextBox 4"/>
-          <p:cNvSpPr txBox="1"/>
+              <a:t>QUIZ TỪ SLIDE — CHỌN
+326 user · 1.074 lượt · 41,7% thiếu nguồn
+Output hẹp, có source và đo được
+TÓM TẮT TOÀN BÀI — LOẠI
+98 user · 134 lượt · độ phủ thấp hơn
+XÂY LẠI AI TUTOR — LOẠI
+369 user · 1.261 lượt · đã tồn tại, phạm vi quá rộng</a:t>
+            </a:r>
+          </a:p>
+        </p:txBody>
+      </p:sp>
+      <p:sp>
+        <p:nvSpPr>
+          <p:cNvPr id="5" name="TextBox 4">
+            <a:extLst xmlns:a="http://schemas.openxmlformats.org/drawingml/2006/main">
+              <a:ext uri="{FF2B5EF4-FFF2-40B4-BE49-F238E27FC236}">
+                <a16:creationId xmlns:a16="http://schemas.microsoft.com/office/drawing/2014/main" id="{0B63E5CD-A782-4FE9-A7CC-E816E12FFDE2}"/>
+              </a:ext>
+            </a:extLst>
+          </p:cNvPr>
+          <p:cNvSpPr>
+            <a:spLocks xmlns:a="http://schemas.openxmlformats.org/drawingml/2006/main" noGrp="1"/>
+          </p:cNvSpPr>
           <p:nvPr/>
         </p:nvSpPr>
         <p:spPr>
-          <a:xfrm>
+          <a:xfrm xmlns:a="http://schemas.openxmlformats.org/drawingml/2006/main">
             <a:off x="457200" y="4663440"/>
             <a:ext cx="8229600" cy="274320"/>
           </a:xfrm>
-          <a:prstGeom prst="rect">
+          <a:prstGeom xmlns:a="http://schemas.openxmlformats.org/drawingml/2006/main" prst="rect">
             <a:avLst/>
           </a:prstGeom>
-          <a:noFill/>
-        </p:spPr>
-        <p:txBody>
-          <a:bodyPr wrap="none">
+          <a:noFill xmlns:a="http://schemas.openxmlformats.org/drawingml/2006/main"/>
+        </p:spPr>
+        <p:txBody>
+          <a:bodyPr xmlns:a="http://schemas.openxmlformats.org/drawingml/2006/main" wrap="none">
             <a:spAutoFit/>
           </a:bodyPr>
-          <a:lstStyle/>
-          <a:p>
+          <a:lstStyle xmlns:a="http://schemas.openxmlformats.org/drawingml/2006/main"/>
+          <a:p xmlns:a="http://schemas.openxmlformats.org/drawingml/2006/main">
             <a:pPr>
+              <a:buNone/>
               <a:defRPr sz="1000" i="1">
                 <a:solidFill>
                   <a:srgbClr val="6B7280"/>
@@ -3515,28 +4855,29 @@
               </a:defRPr>
             </a:pPr>
             <a:r>
-              <a:t>spec.md §2 Impact Table + ứng viên đã loại</a:t>
+              <a:t>Nguồn: spec.md §2 · evidence/mining-log.md</a:t>
             </a:r>
           </a:p>
         </p:txBody>
       </p:sp>
     </p:spTree>
+    <p:extLst>
+      <p:ext uri="{BB962C8B-B14F-4D97-AF65-F5344CB8AC3E}">
+        <p14:creationId xmlns:p14="http://schemas.microsoft.com/office/powerpoint/2010/main" val="1766362150"/>
+      </p:ext>
+    </p:extLst>
   </p:cSld>
-  <p:clrMapOvr>
-    <a:masterClrMapping/>
-  </p:clrMapOvr>
 </p:sld>
 </file>
 
 <file path=ppt/slides/slide3.xml><?xml version="1.0" encoding="utf-8"?>
-<p:sld xmlns:a="http://schemas.openxmlformats.org/drawingml/2006/main" xmlns:p="http://schemas.openxmlformats.org/presentationml/2006/main" xmlns:r="http://schemas.openxmlformats.org/officeDocument/2006/relationships">
+<p:sld xmlns:p="http://schemas.openxmlformats.org/presentationml/2006/main">
   <p:cSld>
     <p:bg>
       <p:bgPr>
-        <a:solidFill>
+        <a:solidFill xmlns:a="http://schemas.openxmlformats.org/drawingml/2006/main">
           <a:srgbClr val="FFFFFF"/>
         </a:solidFill>
-        <a:effectLst/>
       </p:bgPr>
     </p:bg>
     <p:spTree>
@@ -3545,30 +4886,41 @@
         <p:cNvGrpSpPr/>
         <p:nvPr/>
       </p:nvGrpSpPr>
-      <p:grpSpPr/>
-      <p:sp>
-        <p:nvSpPr>
-          <p:cNvPr id="2" name="TextBox 1"/>
-          <p:cNvSpPr txBox="1"/>
+      <p:grpSpPr>
+        <a:xfrm xmlns:a="http://schemas.openxmlformats.org/drawingml/2006/main"/>
+      </p:grpSpPr>
+      <p:sp>
+        <p:nvSpPr>
+          <p:cNvPr id="2" name="TextBox 1">
+            <a:extLst xmlns:a="http://schemas.openxmlformats.org/drawingml/2006/main">
+              <a:ext uri="{FF2B5EF4-FFF2-40B4-BE49-F238E27FC236}">
+                <a16:creationId xmlns:a16="http://schemas.microsoft.com/office/drawing/2014/main" id="{4F284E8D-296C-4837-BB08-8BD5A23C901E}"/>
+              </a:ext>
+            </a:extLst>
+          </p:cNvPr>
+          <p:cNvSpPr>
+            <a:spLocks xmlns:a="http://schemas.openxmlformats.org/drawingml/2006/main" noGrp="1"/>
+          </p:cNvSpPr>
           <p:nvPr/>
         </p:nvSpPr>
         <p:spPr>
-          <a:xfrm>
+          <a:xfrm xmlns:a="http://schemas.openxmlformats.org/drawingml/2006/main">
             <a:off x="457200" y="457200"/>
-            <a:ext cx="8229600" cy="548640"/>
+            <a:ext cx="8229600" cy="640080"/>
           </a:xfrm>
-          <a:prstGeom prst="rect">
+          <a:prstGeom xmlns:a="http://schemas.openxmlformats.org/drawingml/2006/main" prst="rect">
             <a:avLst/>
           </a:prstGeom>
-          <a:noFill/>
-        </p:spPr>
-        <p:txBody>
-          <a:bodyPr wrap="none">
+          <a:noFill xmlns:a="http://schemas.openxmlformats.org/drawingml/2006/main"/>
+        </p:spPr>
+        <p:txBody>
+          <a:bodyPr xmlns:a="http://schemas.openxmlformats.org/drawingml/2006/main" wrap="none">
             <a:spAutoFit/>
           </a:bodyPr>
-          <a:lstStyle/>
-          <a:p>
+          <a:lstStyle xmlns:a="http://schemas.openxmlformats.org/drawingml/2006/main"/>
+          <a:p xmlns:a="http://schemas.openxmlformats.org/drawingml/2006/main">
             <a:pPr>
+              <a:buNone/>
               <a:defRPr sz="3600" b="1">
                 <a:solidFill>
                   <a:srgbClr val="212121"/>
@@ -3576,34 +4928,43 @@
               </a:defRPr>
             </a:pPr>
             <a:r>
-              <a:t>Giải pháp &amp; Demo Live</a:t>
-            </a:r>
-          </a:p>
-        </p:txBody>
-      </p:sp>
-      <p:sp>
-        <p:nvSpPr>
-          <p:cNvPr id="3" name="TextBox 2"/>
-          <p:cNvSpPr txBox="1"/>
+              <a:t>Một luồng học, hai đường demo</a:t>
+            </a:r>
+          </a:p>
+        </p:txBody>
+      </p:sp>
+      <p:sp>
+        <p:nvSpPr>
+          <p:cNvPr id="3" name="TextBox 2">
+            <a:extLst xmlns:a="http://schemas.openxmlformats.org/drawingml/2006/main">
+              <a:ext uri="{FF2B5EF4-FFF2-40B4-BE49-F238E27FC236}">
+                <a16:creationId xmlns:a16="http://schemas.microsoft.com/office/drawing/2014/main" id="{08A09A58-B49E-45F6-8ECE-C87ABEFC08E4}"/>
+              </a:ext>
+            </a:extLst>
+          </p:cNvPr>
+          <p:cNvSpPr>
+            <a:spLocks xmlns:a="http://schemas.openxmlformats.org/drawingml/2006/main" noGrp="1"/>
+          </p:cNvSpPr>
           <p:nvPr/>
         </p:nvSpPr>
         <p:spPr>
-          <a:xfrm>
+          <a:xfrm xmlns:a="http://schemas.openxmlformats.org/drawingml/2006/main">
             <a:off x="457200" y="1188720"/>
             <a:ext cx="3657600" cy="365760"/>
           </a:xfrm>
-          <a:prstGeom prst="rect">
+          <a:prstGeom xmlns:a="http://schemas.openxmlformats.org/drawingml/2006/main" prst="rect">
             <a:avLst/>
           </a:prstGeom>
-          <a:noFill/>
-        </p:spPr>
-        <p:txBody>
-          <a:bodyPr wrap="square" anchor="t">
+          <a:noFill xmlns:a="http://schemas.openxmlformats.org/drawingml/2006/main"/>
+        </p:spPr>
+        <p:txBody>
+          <a:bodyPr xmlns:a="http://schemas.openxmlformats.org/drawingml/2006/main" wrap="square" anchor="t">
             <a:spAutoFit/>
           </a:bodyPr>
-          <a:lstStyle/>
-          <a:p>
+          <a:lstStyle xmlns:a="http://schemas.openxmlformats.org/drawingml/2006/main"/>
+          <a:p xmlns:a="http://schemas.openxmlformats.org/drawingml/2006/main">
             <a:pPr>
+              <a:buNone/>
               <a:defRPr sz="1600" b="1">
                 <a:solidFill>
                   <a:srgbClr val="028090"/>
@@ -3611,34 +4972,43 @@
               </a:defRPr>
             </a:pPr>
             <a:r>
-              <a:t>Lát cắt (1 câu)</a:t>
-            </a:r>
-          </a:p>
-        </p:txBody>
-      </p:sp>
-      <p:sp>
-        <p:nvSpPr>
-          <p:cNvPr id="4" name="TextBox 3"/>
-          <p:cNvSpPr txBox="1"/>
+              <a:t>Lát cắt trong VLearn</a:t>
+            </a:r>
+          </a:p>
+        </p:txBody>
+      </p:sp>
+      <p:sp>
+        <p:nvSpPr>
+          <p:cNvPr id="4" name="TextBox 3">
+            <a:extLst xmlns:a="http://schemas.openxmlformats.org/drawingml/2006/main">
+              <a:ext uri="{FF2B5EF4-FFF2-40B4-BE49-F238E27FC236}">
+                <a16:creationId xmlns:a16="http://schemas.microsoft.com/office/drawing/2014/main" id="{91FD3F66-31F5-47D6-AC20-DE8852333E50}"/>
+              </a:ext>
+            </a:extLst>
+          </p:cNvPr>
+          <p:cNvSpPr>
+            <a:spLocks xmlns:a="http://schemas.openxmlformats.org/drawingml/2006/main" noGrp="1"/>
+          </p:cNvSpPr>
           <p:nvPr/>
         </p:nvSpPr>
         <p:spPr>
-          <a:xfrm>
+          <a:xfrm xmlns:a="http://schemas.openxmlformats.org/drawingml/2006/main">
             <a:off x="457200" y="1645920"/>
             <a:ext cx="3657600" cy="1097280"/>
           </a:xfrm>
-          <a:prstGeom prst="rect">
+          <a:prstGeom xmlns:a="http://schemas.openxmlformats.org/drawingml/2006/main" prst="rect">
             <a:avLst/>
           </a:prstGeom>
-          <a:noFill/>
-        </p:spPr>
-        <p:txBody>
-          <a:bodyPr wrap="square" anchor="t">
+          <a:noFill xmlns:a="http://schemas.openxmlformats.org/drawingml/2006/main"/>
+        </p:spPr>
+        <p:txBody>
+          <a:bodyPr xmlns:a="http://schemas.openxmlformats.org/drawingml/2006/main" wrap="square" anchor="t">
             <a:spAutoFit/>
           </a:bodyPr>
-          <a:lstStyle/>
-          <a:p>
+          <a:lstStyle xmlns:a="http://schemas.openxmlformats.org/drawingml/2006/main"/>
+          <a:p xmlns:a="http://schemas.openxmlformats.org/drawingml/2006/main">
             <a:pPr>
+              <a:buNone/>
               <a:defRPr sz="1400">
                 <a:solidFill>
                   <a:srgbClr val="212121"/>
@@ -3646,34 +5016,43 @@
               </a:defRPr>
             </a:pPr>
             <a:r>
-              <a:t>Học viên vừa xem xong slide → tải slide lên → AI tạo quiz 4 lựa chọn → làm quiz trong VLearn → xem đáp án + nguồn trích dẫn</a:t>
-            </a:r>
-          </a:p>
-        </p:txBody>
-      </p:sp>
-      <p:sp>
-        <p:nvSpPr>
-          <p:cNvPr id="5" name="TextBox 4"/>
-          <p:cNvSpPr txBox="1"/>
+              <a:t>Học viên chọn 4, 6 hoặc 8 câu → AI kiểm tra nguồn → tạo MCQ → làm bài → xem đáp án kèm excerpt từ slide.</a:t>
+            </a:r>
+          </a:p>
+        </p:txBody>
+      </p:sp>
+      <p:sp>
+        <p:nvSpPr>
+          <p:cNvPr id="5" name="TextBox 4">
+            <a:extLst xmlns:a="http://schemas.openxmlformats.org/drawingml/2006/main">
+              <a:ext uri="{FF2B5EF4-FFF2-40B4-BE49-F238E27FC236}">
+                <a16:creationId xmlns:a16="http://schemas.microsoft.com/office/drawing/2014/main" id="{2940D4AC-2A6A-4F5E-B9C1-EBBE36F72B65}"/>
+              </a:ext>
+            </a:extLst>
+          </p:cNvPr>
+          <p:cNvSpPr>
+            <a:spLocks xmlns:a="http://schemas.openxmlformats.org/drawingml/2006/main" noGrp="1"/>
+          </p:cNvSpPr>
           <p:nvPr/>
         </p:nvSpPr>
         <p:spPr>
-          <a:xfrm>
+          <a:xfrm xmlns:a="http://schemas.openxmlformats.org/drawingml/2006/main">
             <a:off x="457200" y="2834640"/>
             <a:ext cx="3657600" cy="365760"/>
           </a:xfrm>
-          <a:prstGeom prst="rect">
+          <a:prstGeom xmlns:a="http://schemas.openxmlformats.org/drawingml/2006/main" prst="rect">
             <a:avLst/>
           </a:prstGeom>
-          <a:noFill/>
-        </p:spPr>
-        <p:txBody>
-          <a:bodyPr wrap="square" anchor="t">
+          <a:noFill xmlns:a="http://schemas.openxmlformats.org/drawingml/2006/main"/>
+        </p:spPr>
+        <p:txBody>
+          <a:bodyPr xmlns:a="http://schemas.openxmlformats.org/drawingml/2006/main" wrap="square" anchor="t">
             <a:spAutoFit/>
           </a:bodyPr>
-          <a:lstStyle/>
-          <a:p>
+          <a:lstStyle xmlns:a="http://schemas.openxmlformats.org/drawingml/2006/main"/>
+          <a:p xmlns:a="http://schemas.openxmlformats.org/drawingml/2006/main">
             <a:pPr>
+              <a:buNone/>
               <a:defRPr sz="1600" b="1">
                 <a:solidFill>
                   <a:srgbClr val="028090"/>
@@ -3681,34 +5060,43 @@
               </a:defRPr>
             </a:pPr>
             <a:r>
-              <a:t>Automation: Conditional</a:t>
-            </a:r>
-          </a:p>
-        </p:txBody>
-      </p:sp>
-      <p:sp>
-        <p:nvSpPr>
-          <p:cNvPr id="6" name="TextBox 5"/>
-          <p:cNvSpPr txBox="1"/>
+              <a:t>Conditional automation</a:t>
+            </a:r>
+          </a:p>
+        </p:txBody>
+      </p:sp>
+      <p:sp>
+        <p:nvSpPr>
+          <p:cNvPr id="6" name="TextBox 5">
+            <a:extLst xmlns:a="http://schemas.openxmlformats.org/drawingml/2006/main">
+              <a:ext uri="{FF2B5EF4-FFF2-40B4-BE49-F238E27FC236}">
+                <a16:creationId xmlns:a16="http://schemas.microsoft.com/office/drawing/2014/main" id="{011B7954-EC35-4EA2-A024-A4395FEAADBF}"/>
+              </a:ext>
+            </a:extLst>
+          </p:cNvPr>
+          <p:cNvSpPr>
+            <a:spLocks xmlns:a="http://schemas.openxmlformats.org/drawingml/2006/main" noGrp="1"/>
+          </p:cNvSpPr>
           <p:nvPr/>
         </p:nvSpPr>
         <p:spPr>
-          <a:xfrm>
+          <a:xfrm xmlns:a="http://schemas.openxmlformats.org/drawingml/2006/main">
             <a:off x="457200" y="3291840"/>
             <a:ext cx="3657600" cy="1371600"/>
           </a:xfrm>
-          <a:prstGeom prst="rect">
+          <a:prstGeom xmlns:a="http://schemas.openxmlformats.org/drawingml/2006/main" prst="rect">
             <a:avLst/>
           </a:prstGeom>
-          <a:noFill/>
-        </p:spPr>
-        <p:txBody>
-          <a:bodyPr wrap="square" anchor="t">
+          <a:noFill xmlns:a="http://schemas.openxmlformats.org/drawingml/2006/main"/>
+        </p:spPr>
+        <p:txBody>
+          <a:bodyPr xmlns:a="http://schemas.openxmlformats.org/drawingml/2006/main" wrap="square" anchor="t">
             <a:spAutoFit/>
           </a:bodyPr>
-          <a:lstStyle/>
-          <a:p>
+          <a:lstStyle xmlns:a="http://schemas.openxmlformats.org/drawingml/2006/main"/>
+          <a:p xmlns:a="http://schemas.openxmlformats.org/drawingml/2006/main">
             <a:pPr>
+              <a:buNone/>
               <a:defRPr sz="1400">
                 <a:solidFill>
                   <a:srgbClr val="212121"/>
@@ -3716,84 +5104,100 @@
               </a:defRPr>
             </a:pPr>
             <a:r>
-              <a:t>Chỉ tạo khi slide có đủ text rõ ràng. Slide toàn ảnh → từ chối + gợi ý.</a:t>
-            </a:r>
-            <a:br/>
-            <a:br/>
-            <a:r>
-              <a:t>Cost-of-error: Câu hỏi sai → học viên học sai kiến thức. Grounded refusal &gt; confident hallucination.</a:t>
-            </a:r>
-          </a:p>
-        </p:txBody>
-      </p:sp>
-      <p:sp>
-        <p:nvSpPr>
-          <p:cNvPr id="7" name="Rectangle 6"/>
-          <p:cNvSpPr/>
+              <a:t>Đủ căn cứ → tạo đúng số câu + excerpt.
+Thiếu hoặc mâu thuẫn → từ chối có lý do.
+Cost-of-error: học viên ghi nhớ sai.</a:t>
+            </a:r>
+          </a:p>
+        </p:txBody>
+      </p:sp>
+      <p:sp>
+        <p:nvSpPr>
+          <p:cNvPr id="7" name="Rectangle 6">
+            <a:extLst xmlns:a="http://schemas.openxmlformats.org/drawingml/2006/main">
+              <a:ext uri="{FF2B5EF4-FFF2-40B4-BE49-F238E27FC236}">
+                <a16:creationId xmlns:a16="http://schemas.microsoft.com/office/drawing/2014/main" id="{E1B52B4C-33D1-4B0D-81A0-ED9D65DF0EC5}"/>
+              </a:ext>
+            </a:extLst>
+          </p:cNvPr>
+          <p:cNvSpPr>
+            <a:spLocks xmlns:a="http://schemas.openxmlformats.org/drawingml/2006/main" noGrp="1"/>
+          </p:cNvSpPr>
           <p:nvPr/>
         </p:nvSpPr>
         <p:spPr>
-          <a:xfrm>
+          <a:xfrm xmlns:a="http://schemas.openxmlformats.org/drawingml/2006/main">
             <a:off x="4754880" y="1188720"/>
             <a:ext cx="3931920" cy="3474720"/>
           </a:xfrm>
-          <a:prstGeom prst="rect">
+          <a:prstGeom xmlns:a="http://schemas.openxmlformats.org/drawingml/2006/main" prst="rect">
             <a:avLst/>
           </a:prstGeom>
-          <a:solidFill>
+          <a:solidFill xmlns:a="http://schemas.openxmlformats.org/drawingml/2006/main">
             <a:srgbClr val="F3F4F6"/>
           </a:solidFill>
-          <a:ln w="12700">
+          <a:ln xmlns:a="http://schemas.openxmlformats.org/drawingml/2006/main" w="12700">
             <a:solidFill>
               <a:srgbClr val="6B7280"/>
             </a:solidFill>
           </a:ln>
         </p:spPr>
         <p:style>
-          <a:lnRef idx="1">
+          <a:lnRef xmlns:a="http://schemas.openxmlformats.org/drawingml/2006/main" idx="1">
             <a:schemeClr val="accent1"/>
           </a:lnRef>
-          <a:fillRef idx="3">
+          <a:fillRef xmlns:a="http://schemas.openxmlformats.org/drawingml/2006/main" idx="3">
             <a:schemeClr val="accent1"/>
           </a:fillRef>
-          <a:effectRef idx="2">
+          <a:effectRef xmlns:a="http://schemas.openxmlformats.org/drawingml/2006/main" idx="2">
             <a:schemeClr val="accent1"/>
           </a:effectRef>
-          <a:fontRef idx="minor">
+          <a:fontRef xmlns:a="http://schemas.openxmlformats.org/drawingml/2006/main" idx="minor">
             <a:schemeClr val="lt1"/>
           </a:fontRef>
         </p:style>
         <p:txBody>
-          <a:bodyPr rtlCol="0" anchor="ctr"/>
-          <a:lstStyle/>
-          <a:p>
-            <a:pPr algn="ctr"/>
-          </a:p>
-        </p:txBody>
-      </p:sp>
-      <p:sp>
-        <p:nvSpPr>
-          <p:cNvPr id="8" name="TextBox 7"/>
-          <p:cNvSpPr txBox="1"/>
+          <a:bodyPr xmlns:a="http://schemas.openxmlformats.org/drawingml/2006/main" anchor="ctr"/>
+          <a:lstStyle xmlns:a="http://schemas.openxmlformats.org/drawingml/2006/main"/>
+          <a:p xmlns:a="http://schemas.openxmlformats.org/drawingml/2006/main">
+            <a:pPr algn="ctr">
+              <a:buNone/>
+            </a:pPr>
+          </a:p>
+        </p:txBody>
+      </p:sp>
+      <p:sp>
+        <p:nvSpPr>
+          <p:cNvPr id="8" name="TextBox 7">
+            <a:extLst xmlns:a="http://schemas.openxmlformats.org/drawingml/2006/main">
+              <a:ext uri="{FF2B5EF4-FFF2-40B4-BE49-F238E27FC236}">
+                <a16:creationId xmlns:a16="http://schemas.microsoft.com/office/drawing/2014/main" id="{71EE8809-4B9D-4CFC-8DBF-F737CD75C74F}"/>
+              </a:ext>
+            </a:extLst>
+          </p:cNvPr>
+          <p:cNvSpPr>
+            <a:spLocks xmlns:a="http://schemas.openxmlformats.org/drawingml/2006/main" noGrp="1"/>
+          </p:cNvSpPr>
           <p:nvPr/>
         </p:nvSpPr>
         <p:spPr>
-          <a:xfrm>
+          <a:xfrm xmlns:a="http://schemas.openxmlformats.org/drawingml/2006/main">
             <a:off x="4754880" y="2286000"/>
-            <a:ext cx="3931920" cy="914400"/>
+            <a:ext cx="3931920" cy="1158240"/>
           </a:xfrm>
-          <a:prstGeom prst="rect">
+          <a:prstGeom xmlns:a="http://schemas.openxmlformats.org/drawingml/2006/main" prst="rect">
             <a:avLst/>
           </a:prstGeom>
-          <a:noFill/>
-        </p:spPr>
-        <p:txBody>
-          <a:bodyPr wrap="square" anchor="t">
+          <a:noFill xmlns:a="http://schemas.openxmlformats.org/drawingml/2006/main"/>
+        </p:spPr>
+        <p:txBody>
+          <a:bodyPr xmlns:a="http://schemas.openxmlformats.org/drawingml/2006/main" wrap="square" anchor="t">
             <a:spAutoFit/>
           </a:bodyPr>
-          <a:lstStyle/>
-          <a:p>
+          <a:lstStyle xmlns:a="http://schemas.openxmlformats.org/drawingml/2006/main"/>
+          <a:p xmlns:a="http://schemas.openxmlformats.org/drawingml/2006/main">
             <a:pPr>
+              <a:buNone/>
               <a:defRPr sz="1400">
                 <a:solidFill>
                   <a:srgbClr val="6B7280"/>
@@ -3801,44 +5205,46 @@
               </a:defRPr>
             </a:pPr>
             <a:r>
-              <a:t>DEMO LIVE</a:t>
-            </a:r>
-            <a:br/>
-            <a:br/>
-            <a:r>
-              <a:t>[Chạy prototype]</a:t>
-            </a:r>
-            <a:br/>
-            <a:br/>
-            <a:r>
-              <a:t>1 case happy + 1 case chỗ khó</a:t>
-            </a:r>
-          </a:p>
-        </p:txBody>
-      </p:sp>
-      <p:sp>
-        <p:nvSpPr>
-          <p:cNvPr id="9" name="TextBox 8"/>
-          <p:cNvSpPr txBox="1"/>
+              <a:t>DEMO LIVE
+1  Happy path: / → tạo, làm, xem nguồn
+2  Case khó: ?demoScenario=insufficient
+   Từ chối có lý do</a:t>
+            </a:r>
+          </a:p>
+        </p:txBody>
+      </p:sp>
+      <p:sp>
+        <p:nvSpPr>
+          <p:cNvPr id="9" name="TextBox 8">
+            <a:extLst xmlns:a="http://schemas.openxmlformats.org/drawingml/2006/main">
+              <a:ext uri="{FF2B5EF4-FFF2-40B4-BE49-F238E27FC236}">
+                <a16:creationId xmlns:a16="http://schemas.microsoft.com/office/drawing/2014/main" id="{24A7CA93-0D3E-4D61-8F88-41E070921B51}"/>
+              </a:ext>
+            </a:extLst>
+          </p:cNvPr>
+          <p:cNvSpPr>
+            <a:spLocks xmlns:a="http://schemas.openxmlformats.org/drawingml/2006/main" noGrp="1"/>
+          </p:cNvSpPr>
           <p:nvPr/>
         </p:nvSpPr>
         <p:spPr>
-          <a:xfrm>
+          <a:xfrm xmlns:a="http://schemas.openxmlformats.org/drawingml/2006/main">
             <a:off x="457200" y="4663440"/>
             <a:ext cx="8229600" cy="274320"/>
           </a:xfrm>
-          <a:prstGeom prst="rect">
+          <a:prstGeom xmlns:a="http://schemas.openxmlformats.org/drawingml/2006/main" prst="rect">
             <a:avLst/>
           </a:prstGeom>
-          <a:noFill/>
-        </p:spPr>
-        <p:txBody>
-          <a:bodyPr wrap="none">
+          <a:noFill xmlns:a="http://schemas.openxmlformats.org/drawingml/2006/main"/>
+        </p:spPr>
+        <p:txBody>
+          <a:bodyPr xmlns:a="http://schemas.openxmlformats.org/drawingml/2006/main" wrap="none">
             <a:spAutoFit/>
           </a:bodyPr>
-          <a:lstStyle/>
-          <a:p>
+          <a:lstStyle xmlns:a="http://schemas.openxmlformats.org/drawingml/2006/main"/>
+          <a:p xmlns:a="http://schemas.openxmlformats.org/drawingml/2006/main">
             <a:pPr>
+              <a:buNone/>
               <a:defRPr sz="1000" i="1">
                 <a:solidFill>
                   <a:srgbClr val="6B7280"/>
@@ -3846,28 +5252,29 @@
               </a:defRPr>
             </a:pPr>
             <a:r>
-              <a:t>spec.md §4 + LIVE không video</a:t>
+              <a:t>spec.md §4–§6</a:t>
             </a:r>
           </a:p>
         </p:txBody>
       </p:sp>
     </p:spTree>
+    <p:extLst>
+      <p:ext uri="{BB962C8B-B14F-4D97-AF65-F5344CB8AC3E}">
+        <p14:creationId xmlns:p14="http://schemas.microsoft.com/office/powerpoint/2010/main" val="1815649363"/>
+      </p:ext>
+    </p:extLst>
   </p:cSld>
-  <p:clrMapOvr>
-    <a:masterClrMapping/>
-  </p:clrMapOvr>
 </p:sld>
 </file>
 
 <file path=ppt/slides/slide4.xml><?xml version="1.0" encoding="utf-8"?>
-<p:sld xmlns:a="http://schemas.openxmlformats.org/drawingml/2006/main" xmlns:p="http://schemas.openxmlformats.org/presentationml/2006/main" xmlns:r="http://schemas.openxmlformats.org/officeDocument/2006/relationships">
+<p:sld xmlns:p="http://schemas.openxmlformats.org/presentationml/2006/main">
   <p:cSld>
     <p:bg>
       <p:bgPr>
-        <a:solidFill>
+        <a:solidFill xmlns:a="http://schemas.openxmlformats.org/drawingml/2006/main">
           <a:srgbClr val="FFFFFF"/>
         </a:solidFill>
-        <a:effectLst/>
       </p:bgPr>
     </p:bg>
     <p:spTree>
@@ -3876,30 +5283,41 @@
         <p:cNvGrpSpPr/>
         <p:nvPr/>
       </p:nvGrpSpPr>
-      <p:grpSpPr/>
-      <p:sp>
-        <p:nvSpPr>
-          <p:cNvPr id="2" name="TextBox 1"/>
-          <p:cNvSpPr txBox="1"/>
+      <p:grpSpPr>
+        <a:xfrm xmlns:a="http://schemas.openxmlformats.org/drawingml/2006/main"/>
+      </p:grpSpPr>
+      <p:sp>
+        <p:nvSpPr>
+          <p:cNvPr id="2" name="TextBox 1">
+            <a:extLst xmlns:a="http://schemas.openxmlformats.org/drawingml/2006/main">
+              <a:ext uri="{FF2B5EF4-FFF2-40B4-BE49-F238E27FC236}">
+                <a16:creationId xmlns:a16="http://schemas.microsoft.com/office/drawing/2014/main" id="{F00F3C67-49E8-4695-8057-A96A95FC1685}"/>
+              </a:ext>
+            </a:extLst>
+          </p:cNvPr>
+          <p:cNvSpPr>
+            <a:spLocks xmlns:a="http://schemas.openxmlformats.org/drawingml/2006/main" noGrp="1"/>
+          </p:cNvSpPr>
           <p:nvPr/>
         </p:nvSpPr>
         <p:spPr>
-          <a:xfrm>
+          <a:xfrm xmlns:a="http://schemas.openxmlformats.org/drawingml/2006/main">
             <a:off x="457200" y="457200"/>
-            <a:ext cx="8229600" cy="548640"/>
+            <a:ext cx="8229600" cy="640080"/>
           </a:xfrm>
-          <a:prstGeom prst="rect">
+          <a:prstGeom xmlns:a="http://schemas.openxmlformats.org/drawingml/2006/main" prst="rect">
             <a:avLst/>
           </a:prstGeom>
-          <a:noFill/>
-        </p:spPr>
-        <p:txBody>
-          <a:bodyPr wrap="none">
+          <a:noFill xmlns:a="http://schemas.openxmlformats.org/drawingml/2006/main"/>
+        </p:spPr>
+        <p:txBody>
+          <a:bodyPr xmlns:a="http://schemas.openxmlformats.org/drawingml/2006/main" wrap="none">
             <a:spAutoFit/>
           </a:bodyPr>
-          <a:lstStyle/>
-          <a:p>
+          <a:lstStyle xmlns:a="http://schemas.openxmlformats.org/drawingml/2006/main"/>
+          <a:p xmlns:a="http://schemas.openxmlformats.org/drawingml/2006/main">
             <a:pPr>
+              <a:buNone/>
               <a:defRPr sz="3600" b="1">
                 <a:solidFill>
                   <a:srgbClr val="212121"/>
@@ -3907,34 +5325,43 @@
               </a:defRPr>
             </a:pPr>
             <a:r>
-              <a:t>Kết quả đo</a:t>
-            </a:r>
-          </a:p>
-        </p:txBody>
-      </p:sp>
-      <p:sp>
-        <p:nvSpPr>
-          <p:cNvPr id="3" name="TextBox 2"/>
-          <p:cNvSpPr txBox="1"/>
+              <a:t>Đo trước, sửa sau</a:t>
+            </a:r>
+          </a:p>
+        </p:txBody>
+      </p:sp>
+      <p:sp>
+        <p:nvSpPr>
+          <p:cNvPr id="3" name="TextBox 2">
+            <a:extLst xmlns:a="http://schemas.openxmlformats.org/drawingml/2006/main">
+              <a:ext uri="{FF2B5EF4-FFF2-40B4-BE49-F238E27FC236}">
+                <a16:creationId xmlns:a16="http://schemas.microsoft.com/office/drawing/2014/main" id="{067BABF6-66A6-4E63-8759-54D4E785D61C}"/>
+              </a:ext>
+            </a:extLst>
+          </p:cNvPr>
+          <p:cNvSpPr>
+            <a:spLocks xmlns:a="http://schemas.openxmlformats.org/drawingml/2006/main" noGrp="1"/>
+          </p:cNvSpPr>
           <p:nvPr/>
         </p:nvSpPr>
         <p:spPr>
-          <a:xfrm>
+          <a:xfrm xmlns:a="http://schemas.openxmlformats.org/drawingml/2006/main">
             <a:off x="457200" y="1188720"/>
             <a:ext cx="4114800" cy="365760"/>
           </a:xfrm>
-          <a:prstGeom prst="rect">
+          <a:prstGeom xmlns:a="http://schemas.openxmlformats.org/drawingml/2006/main" prst="rect">
             <a:avLst/>
           </a:prstGeom>
-          <a:noFill/>
-        </p:spPr>
-        <p:txBody>
-          <a:bodyPr wrap="square" anchor="t">
+          <a:noFill xmlns:a="http://schemas.openxmlformats.org/drawingml/2006/main"/>
+        </p:spPr>
+        <p:txBody>
+          <a:bodyPr xmlns:a="http://schemas.openxmlformats.org/drawingml/2006/main" wrap="square" anchor="t">
             <a:spAutoFit/>
           </a:bodyPr>
-          <a:lstStyle/>
-          <a:p>
+          <a:lstStyle xmlns:a="http://schemas.openxmlformats.org/drawingml/2006/main"/>
+          <a:p xmlns:a="http://schemas.openxmlformats.org/drawingml/2006/main">
             <a:pPr>
+              <a:buNone/>
               <a:defRPr sz="1800" b="1">
                 <a:solidFill>
                   <a:srgbClr val="028090"/>
@@ -3942,34 +5369,43 @@
               </a:defRPr>
             </a:pPr>
             <a:r>
-              <a:t>Quality Bar (chốt 23:59 N1)</a:t>
-            </a:r>
-          </a:p>
-        </p:txBody>
-      </p:sp>
-      <p:sp>
-        <p:nvSpPr>
-          <p:cNvPr id="4" name="TextBox 3"/>
-          <p:cNvSpPr txBox="1"/>
+              <a:t>Quality bar chốt trước khi chạy</a:t>
+            </a:r>
+          </a:p>
+        </p:txBody>
+      </p:sp>
+      <p:sp>
+        <p:nvSpPr>
+          <p:cNvPr id="4" name="TextBox 3">
+            <a:extLst xmlns:a="http://schemas.openxmlformats.org/drawingml/2006/main">
+              <a:ext uri="{FF2B5EF4-FFF2-40B4-BE49-F238E27FC236}">
+                <a16:creationId xmlns:a16="http://schemas.microsoft.com/office/drawing/2014/main" id="{01C42D71-3C7E-4515-9B8F-F9C005FEB05D}"/>
+              </a:ext>
+            </a:extLst>
+          </p:cNvPr>
+          <p:cNvSpPr>
+            <a:spLocks xmlns:a="http://schemas.openxmlformats.org/drawingml/2006/main" noGrp="1"/>
+          </p:cNvSpPr>
           <p:nvPr/>
         </p:nvSpPr>
         <p:spPr>
-          <a:xfrm>
+          <a:xfrm xmlns:a="http://schemas.openxmlformats.org/drawingml/2006/main">
             <a:off x="457200" y="1645920"/>
             <a:ext cx="4114800" cy="914400"/>
           </a:xfrm>
-          <a:prstGeom prst="rect">
+          <a:prstGeom xmlns:a="http://schemas.openxmlformats.org/drawingml/2006/main" prst="rect">
             <a:avLst/>
           </a:prstGeom>
-          <a:noFill/>
-        </p:spPr>
-        <p:txBody>
-          <a:bodyPr wrap="square" anchor="t">
+          <a:noFill xmlns:a="http://schemas.openxmlformats.org/drawingml/2006/main"/>
+        </p:spPr>
+        <p:txBody>
+          <a:bodyPr xmlns:a="http://schemas.openxmlformats.org/drawingml/2006/main" wrap="square" anchor="t">
             <a:spAutoFit/>
           </a:bodyPr>
-          <a:lstStyle/>
-          <a:p>
+          <a:lstStyle xmlns:a="http://schemas.openxmlformats.org/drawingml/2006/main"/>
+          <a:p xmlns:a="http://schemas.openxmlformats.org/drawingml/2006/main">
             <a:pPr>
+              <a:buNone/>
               <a:defRPr sz="1400">
                 <a:solidFill>
                   <a:srgbClr val="212121"/>
@@ -3977,39 +5413,45 @@
               </a:defRPr>
             </a:pPr>
             <a:r>
-              <a:t>[TODO: Bar]</a:t>
-            </a:r>
-            <a:br/>
-            <a:br/>
-            <a:r>
-              <a:t>VD: Đạt khi ≥75% qua golden set VÀ 0% câu hỏi bịa nguồn</a:t>
-            </a:r>
-          </a:p>
-        </p:txBody>
-      </p:sp>
-      <p:sp>
-        <p:nvSpPr>
-          <p:cNvPr id="5" name="TextBox 4"/>
-          <p:cNvSpPr txBox="1"/>
+              <a:t>≥80% toàn bộ 22 case
+100% source_of_truth + domain_harm
+0 câu ready thiếu excerpt nguyên văn</a:t>
+            </a:r>
+          </a:p>
+        </p:txBody>
+      </p:sp>
+      <p:sp>
+        <p:nvSpPr>
+          <p:cNvPr id="5" name="TextBox 4">
+            <a:extLst xmlns:a="http://schemas.openxmlformats.org/drawingml/2006/main">
+              <a:ext uri="{FF2B5EF4-FFF2-40B4-BE49-F238E27FC236}">
+                <a16:creationId xmlns:a16="http://schemas.microsoft.com/office/drawing/2014/main" id="{4DC8833D-00A6-411D-B309-D7BCC652D54D}"/>
+              </a:ext>
+            </a:extLst>
+          </p:cNvPr>
+          <p:cNvSpPr>
+            <a:spLocks xmlns:a="http://schemas.openxmlformats.org/drawingml/2006/main" noGrp="1"/>
+          </p:cNvSpPr>
           <p:nvPr/>
         </p:nvSpPr>
         <p:spPr>
-          <a:xfrm>
+          <a:xfrm xmlns:a="http://schemas.openxmlformats.org/drawingml/2006/main">
             <a:off x="457200" y="2743200"/>
             <a:ext cx="4114800" cy="365760"/>
           </a:xfrm>
-          <a:prstGeom prst="rect">
+          <a:prstGeom xmlns:a="http://schemas.openxmlformats.org/drawingml/2006/main" prst="rect">
             <a:avLst/>
           </a:prstGeom>
-          <a:noFill/>
-        </p:spPr>
-        <p:txBody>
-          <a:bodyPr wrap="square" anchor="t">
+          <a:noFill xmlns:a="http://schemas.openxmlformats.org/drawingml/2006/main"/>
+        </p:spPr>
+        <p:txBody>
+          <a:bodyPr xmlns:a="http://schemas.openxmlformats.org/drawingml/2006/main" wrap="square" anchor="t">
             <a:spAutoFit/>
           </a:bodyPr>
-          <a:lstStyle/>
-          <a:p>
+          <a:lstStyle xmlns:a="http://schemas.openxmlformats.org/drawingml/2006/main"/>
+          <a:p xmlns:a="http://schemas.openxmlformats.org/drawingml/2006/main">
             <a:pPr>
+              <a:buNone/>
               <a:defRPr sz="1800" b="1">
                 <a:solidFill>
                   <a:srgbClr val="028090"/>
@@ -4024,27 +5466,36 @@
       </p:sp>
       <p:sp>
         <p:nvSpPr>
-          <p:cNvPr id="6" name="TextBox 5"/>
-          <p:cNvSpPr txBox="1"/>
+          <p:cNvPr id="6" name="TextBox 5">
+            <a:extLst xmlns:a="http://schemas.openxmlformats.org/drawingml/2006/main">
+              <a:ext uri="{FF2B5EF4-FFF2-40B4-BE49-F238E27FC236}">
+                <a16:creationId xmlns:a16="http://schemas.microsoft.com/office/drawing/2014/main" id="{71108D5C-A8F4-42A5-9DA8-F5419CA9ECC7}"/>
+              </a:ext>
+            </a:extLst>
+          </p:cNvPr>
+          <p:cNvSpPr>
+            <a:spLocks xmlns:a="http://schemas.openxmlformats.org/drawingml/2006/main" noGrp="1"/>
+          </p:cNvSpPr>
           <p:nvPr/>
         </p:nvSpPr>
         <p:spPr>
-          <a:xfrm>
+          <a:xfrm xmlns:a="http://schemas.openxmlformats.org/drawingml/2006/main">
             <a:off x="457200" y="3200400"/>
             <a:ext cx="4114800" cy="914400"/>
           </a:xfrm>
-          <a:prstGeom prst="rect">
+          <a:prstGeom xmlns:a="http://schemas.openxmlformats.org/drawingml/2006/main" prst="rect">
             <a:avLst/>
           </a:prstGeom>
-          <a:noFill/>
-        </p:spPr>
-        <p:txBody>
-          <a:bodyPr wrap="square" anchor="t">
+          <a:noFill xmlns:a="http://schemas.openxmlformats.org/drawingml/2006/main"/>
+        </p:spPr>
+        <p:txBody>
+          <a:bodyPr xmlns:a="http://schemas.openxmlformats.org/drawingml/2006/main" wrap="square" anchor="t">
             <a:spAutoFit/>
           </a:bodyPr>
-          <a:lstStyle/>
-          <a:p>
+          <a:lstStyle xmlns:a="http://schemas.openxmlformats.org/drawingml/2006/main"/>
+          <a:p xmlns:a="http://schemas.openxmlformats.org/drawingml/2006/main">
             <a:pPr>
+              <a:buNone/>
               <a:defRPr sz="1400">
                 <a:solidFill>
                   <a:srgbClr val="212121"/>
@@ -4052,88 +5503,99 @@
               </a:defRPr>
             </a:pPr>
             <a:r>
-              <a:t>[TODO: %]</a:t>
-            </a:r>
-            <a:br/>
-            <a:br/>
-            <a:r>
-              <a:t>VD: 18/24 (75%) - ĐẠT</a:t>
-            </a:r>
-            <a:br/>
-            <a:r>
-              <a:t>VD: 16/24 (67%) - CHƯA ĐẠT</a:t>
-            </a:r>
-          </a:p>
-        </p:txBody>
-      </p:sp>
-      <p:sp>
-        <p:nvSpPr>
-          <p:cNvPr id="7" name="Rectangle 6"/>
-          <p:cNvSpPr/>
+              <a:t>BASELINE  11/22 · 50% · CHƯA ĐẠT
+CHÍNH THỨC  22/22 · 100% · ĐẠT</a:t>
+            </a:r>
+          </a:p>
+        </p:txBody>
+      </p:sp>
+      <p:sp>
+        <p:nvSpPr>
+          <p:cNvPr id="7" name="Rectangle 6">
+            <a:extLst xmlns:a="http://schemas.openxmlformats.org/drawingml/2006/main">
+              <a:ext uri="{FF2B5EF4-FFF2-40B4-BE49-F238E27FC236}">
+                <a16:creationId xmlns:a16="http://schemas.microsoft.com/office/drawing/2014/main" id="{65A3201C-8DB7-4CDE-BD73-2F70E60D6CD9}"/>
+              </a:ext>
+            </a:extLst>
+          </p:cNvPr>
+          <p:cNvSpPr>
+            <a:spLocks xmlns:a="http://schemas.openxmlformats.org/drawingml/2006/main" noGrp="1"/>
+          </p:cNvSpPr>
           <p:nvPr/>
         </p:nvSpPr>
         <p:spPr>
-          <a:xfrm>
+          <a:xfrm xmlns:a="http://schemas.openxmlformats.org/drawingml/2006/main">
             <a:off x="5029200" y="1188720"/>
             <a:ext cx="3657600" cy="3200400"/>
           </a:xfrm>
-          <a:prstGeom prst="rect">
+          <a:prstGeom xmlns:a="http://schemas.openxmlformats.org/drawingml/2006/main" prst="rect">
             <a:avLst/>
           </a:prstGeom>
-          <a:solidFill>
+          <a:solidFill xmlns:a="http://schemas.openxmlformats.org/drawingml/2006/main">
             <a:srgbClr val="F3F4F6"/>
           </a:solidFill>
-          <a:ln w="12700">
+          <a:ln xmlns:a="http://schemas.openxmlformats.org/drawingml/2006/main" w="12700">
             <a:solidFill>
               <a:srgbClr val="6B7280"/>
             </a:solidFill>
           </a:ln>
         </p:spPr>
         <p:style>
-          <a:lnRef idx="1">
+          <a:lnRef xmlns:a="http://schemas.openxmlformats.org/drawingml/2006/main" idx="1">
             <a:schemeClr val="accent1"/>
           </a:lnRef>
-          <a:fillRef idx="3">
+          <a:fillRef xmlns:a="http://schemas.openxmlformats.org/drawingml/2006/main" idx="3">
             <a:schemeClr val="accent1"/>
           </a:fillRef>
-          <a:effectRef idx="2">
+          <a:effectRef xmlns:a="http://schemas.openxmlformats.org/drawingml/2006/main" idx="2">
             <a:schemeClr val="accent1"/>
           </a:effectRef>
-          <a:fontRef idx="minor">
+          <a:fontRef xmlns:a="http://schemas.openxmlformats.org/drawingml/2006/main" idx="minor">
             <a:schemeClr val="lt1"/>
           </a:fontRef>
         </p:style>
         <p:txBody>
-          <a:bodyPr rtlCol="0" anchor="ctr"/>
-          <a:lstStyle/>
-          <a:p>
-            <a:pPr algn="ctr"/>
-          </a:p>
-        </p:txBody>
-      </p:sp>
-      <p:sp>
-        <p:nvSpPr>
-          <p:cNvPr id="8" name="TextBox 7"/>
-          <p:cNvSpPr txBox="1"/>
+          <a:bodyPr xmlns:a="http://schemas.openxmlformats.org/drawingml/2006/main" anchor="ctr"/>
+          <a:lstStyle xmlns:a="http://schemas.openxmlformats.org/drawingml/2006/main"/>
+          <a:p xmlns:a="http://schemas.openxmlformats.org/drawingml/2006/main">
+            <a:pPr algn="ctr">
+              <a:buNone/>
+            </a:pPr>
+          </a:p>
+        </p:txBody>
+      </p:sp>
+      <p:sp>
+        <p:nvSpPr>
+          <p:cNvPr id="8" name="TextBox 7">
+            <a:extLst xmlns:a="http://schemas.openxmlformats.org/drawingml/2006/main">
+              <a:ext uri="{FF2B5EF4-FFF2-40B4-BE49-F238E27FC236}">
+                <a16:creationId xmlns:a16="http://schemas.microsoft.com/office/drawing/2014/main" id="{0BE522B8-7C16-4A8D-BBFA-59501BD043BD}"/>
+              </a:ext>
+            </a:extLst>
+          </p:cNvPr>
+          <p:cNvSpPr>
+            <a:spLocks xmlns:a="http://schemas.openxmlformats.org/drawingml/2006/main" noGrp="1"/>
+          </p:cNvSpPr>
           <p:nvPr/>
         </p:nvSpPr>
         <p:spPr>
-          <a:xfrm>
+          <a:xfrm xmlns:a="http://schemas.openxmlformats.org/drawingml/2006/main">
             <a:off x="5212080" y="1371600"/>
             <a:ext cx="3291840" cy="365760"/>
           </a:xfrm>
-          <a:prstGeom prst="rect">
+          <a:prstGeom xmlns:a="http://schemas.openxmlformats.org/drawingml/2006/main" prst="rect">
             <a:avLst/>
           </a:prstGeom>
-          <a:noFill/>
-        </p:spPr>
-        <p:txBody>
-          <a:bodyPr wrap="square" anchor="t">
+          <a:noFill xmlns:a="http://schemas.openxmlformats.org/drawingml/2006/main"/>
+        </p:spPr>
+        <p:txBody>
+          <a:bodyPr xmlns:a="http://schemas.openxmlformats.org/drawingml/2006/main" wrap="square" anchor="t">
             <a:spAutoFit/>
           </a:bodyPr>
-          <a:lstStyle/>
-          <a:p>
+          <a:lstStyle xmlns:a="http://schemas.openxmlformats.org/drawingml/2006/main"/>
+          <a:p xmlns:a="http://schemas.openxmlformats.org/drawingml/2006/main">
             <a:pPr>
+              <a:buNone/>
               <a:defRPr sz="1600" b="1">
                 <a:solidFill>
                   <a:srgbClr val="028090"/>
@@ -4148,27 +5610,36 @@
       </p:sp>
       <p:sp>
         <p:nvSpPr>
-          <p:cNvPr id="9" name="TextBox 8"/>
-          <p:cNvSpPr txBox="1"/>
+          <p:cNvPr id="9" name="TextBox 8">
+            <a:extLst xmlns:a="http://schemas.openxmlformats.org/drawingml/2006/main">
+              <a:ext uri="{FF2B5EF4-FFF2-40B4-BE49-F238E27FC236}">
+                <a16:creationId xmlns:a16="http://schemas.microsoft.com/office/drawing/2014/main" id="{C9791B25-B6C4-4B73-988A-5E3239E5CA6A}"/>
+              </a:ext>
+            </a:extLst>
+          </p:cNvPr>
+          <p:cNvSpPr>
+            <a:spLocks xmlns:a="http://schemas.openxmlformats.org/drawingml/2006/main" noGrp="1"/>
+          </p:cNvSpPr>
           <p:nvPr/>
         </p:nvSpPr>
         <p:spPr>
-          <a:xfrm>
+          <a:xfrm xmlns:a="http://schemas.openxmlformats.org/drawingml/2006/main">
             <a:off x="5212080" y="1828800"/>
             <a:ext cx="3291840" cy="2286000"/>
           </a:xfrm>
-          <a:prstGeom prst="rect">
+          <a:prstGeom xmlns:a="http://schemas.openxmlformats.org/drawingml/2006/main" prst="rect">
             <a:avLst/>
           </a:prstGeom>
-          <a:noFill/>
-        </p:spPr>
-        <p:txBody>
-          <a:bodyPr wrap="square" anchor="t">
+          <a:noFill xmlns:a="http://schemas.openxmlformats.org/drawingml/2006/main"/>
+        </p:spPr>
+        <p:txBody>
+          <a:bodyPr xmlns:a="http://schemas.openxmlformats.org/drawingml/2006/main" wrap="square" anchor="t">
             <a:spAutoFit/>
           </a:bodyPr>
-          <a:lstStyle/>
-          <a:p>
+          <a:lstStyle xmlns:a="http://schemas.openxmlformats.org/drawingml/2006/main"/>
+          <a:p xmlns:a="http://schemas.openxmlformats.org/drawingml/2006/main">
             <a:pPr>
+              <a:buNone/>
               <a:defRPr sz="1300">
                 <a:solidFill>
                   <a:srgbClr val="212121"/>
@@ -4176,43 +5647,45 @@
               </a:defRPr>
             </a:pPr>
             <a:r>
-              <a:t>[TODO: Case fail + phân tích]</a:t>
-            </a:r>
-            <a:br/>
-            <a:br/>
-            <a:r>
-              <a:t>VD: 3/4 slide toàn ảnh vẫn gen → bịa.</a:t>
-            </a:r>
-            <a:br/>
-            <a:r>
-              <a:t>Nguyên nhân: Threshold 50→200 chars</a:t>
-            </a:r>
-          </a:p>
-        </p:txBody>
-      </p:sp>
-      <p:sp>
-        <p:nvSpPr>
-          <p:cNvPr id="10" name="TextBox 9"/>
-          <p:cNvSpPr txBox="1"/>
+              <a:t>10 lỗi parse JSON + 1 decision sai
+Nguyên nhân: output contract chưa ổn định.
+Cách sửa: JSON schema + response healing + validation chặt; chạy lại đủ 22 case, không hạ quality bar.</a:t>
+            </a:r>
+          </a:p>
+        </p:txBody>
+      </p:sp>
+      <p:sp>
+        <p:nvSpPr>
+          <p:cNvPr id="10" name="TextBox 9">
+            <a:extLst xmlns:a="http://schemas.openxmlformats.org/drawingml/2006/main">
+              <a:ext uri="{FF2B5EF4-FFF2-40B4-BE49-F238E27FC236}">
+                <a16:creationId xmlns:a16="http://schemas.microsoft.com/office/drawing/2014/main" id="{2774C81B-DEA7-4C6B-89AD-8F6A0CC06371}"/>
+              </a:ext>
+            </a:extLst>
+          </p:cNvPr>
+          <p:cNvSpPr>
+            <a:spLocks xmlns:a="http://schemas.openxmlformats.org/drawingml/2006/main" noGrp="1"/>
+          </p:cNvSpPr>
           <p:nvPr/>
         </p:nvSpPr>
         <p:spPr>
-          <a:xfrm>
+          <a:xfrm xmlns:a="http://schemas.openxmlformats.org/drawingml/2006/main">
             <a:off x="457200" y="4663440"/>
             <a:ext cx="8229600" cy="274320"/>
           </a:xfrm>
-          <a:prstGeom prst="rect">
+          <a:prstGeom xmlns:a="http://schemas.openxmlformats.org/drawingml/2006/main" prst="rect">
             <a:avLst/>
           </a:prstGeom>
-          <a:noFill/>
-        </p:spPr>
-        <p:txBody>
-          <a:bodyPr wrap="none">
+          <a:noFill xmlns:a="http://schemas.openxmlformats.org/drawingml/2006/main"/>
+        </p:spPr>
+        <p:txBody>
+          <a:bodyPr xmlns:a="http://schemas.openxmlformats.org/drawingml/2006/main" wrap="none">
             <a:spAutoFit/>
           </a:bodyPr>
-          <a:lstStyle/>
-          <a:p>
+          <a:lstStyle xmlns:a="http://schemas.openxmlformats.org/drawingml/2006/main"/>
+          <a:p xmlns:a="http://schemas.openxmlformats.org/drawingml/2006/main">
             <a:pPr>
+              <a:buNone/>
               <a:defRPr sz="1000" i="1">
                 <a:solidFill>
                   <a:srgbClr val="6B7280"/>
@@ -4220,28 +5693,29 @@
               </a:defRPr>
             </a:pPr>
             <a:r>
-              <a:t>spec.md §7 + eval/runs/ — GHI NHẬN TRUNG THỰC</a:t>
+              <a:t>Nguồn: spec.md §7 · eval/runs/ · ghi nhận đủ cả case fail</a:t>
             </a:r>
           </a:p>
         </p:txBody>
       </p:sp>
     </p:spTree>
+    <p:extLst>
+      <p:ext uri="{BB962C8B-B14F-4D97-AF65-F5344CB8AC3E}">
+        <p14:creationId xmlns:p14="http://schemas.microsoft.com/office/powerpoint/2010/main" val="1351210923"/>
+      </p:ext>
+    </p:extLst>
   </p:cSld>
-  <p:clrMapOvr>
-    <a:masterClrMapping/>
-  </p:clrMapOvr>
 </p:sld>
 </file>
 
 <file path=ppt/slides/slide5.xml><?xml version="1.0" encoding="utf-8"?>
-<p:sld xmlns:a="http://schemas.openxmlformats.org/drawingml/2006/main" xmlns:p="http://schemas.openxmlformats.org/presentationml/2006/main" xmlns:r="http://schemas.openxmlformats.org/officeDocument/2006/relationships">
+<p:sld xmlns:p="http://schemas.openxmlformats.org/presentationml/2006/main">
   <p:cSld>
     <p:bg>
       <p:bgPr>
-        <a:solidFill>
+        <a:solidFill xmlns:a="http://schemas.openxmlformats.org/drawingml/2006/main">
           <a:srgbClr val="FFFFFF"/>
         </a:solidFill>
-        <a:effectLst/>
       </p:bgPr>
     </p:bg>
     <p:spTree>
@@ -4250,30 +5724,41 @@
         <p:cNvGrpSpPr/>
         <p:nvPr/>
       </p:nvGrpSpPr>
-      <p:grpSpPr/>
-      <p:sp>
-        <p:nvSpPr>
-          <p:cNvPr id="2" name="TextBox 1"/>
-          <p:cNvSpPr txBox="1"/>
+      <p:grpSpPr>
+        <a:xfrm xmlns:a="http://schemas.openxmlformats.org/drawingml/2006/main"/>
+      </p:grpSpPr>
+      <p:sp>
+        <p:nvSpPr>
+          <p:cNvPr id="2" name="TextBox 1">
+            <a:extLst xmlns:a="http://schemas.openxmlformats.org/drawingml/2006/main">
+              <a:ext uri="{FF2B5EF4-FFF2-40B4-BE49-F238E27FC236}">
+                <a16:creationId xmlns:a16="http://schemas.microsoft.com/office/drawing/2014/main" id="{967D9F6B-D945-49A6-BB54-3722374235EE}"/>
+              </a:ext>
+            </a:extLst>
+          </p:cNvPr>
+          <p:cNvSpPr>
+            <a:spLocks xmlns:a="http://schemas.openxmlformats.org/drawingml/2006/main" noGrp="1"/>
+          </p:cNvSpPr>
           <p:nvPr/>
         </p:nvSpPr>
         <p:spPr>
-          <a:xfrm>
+          <a:xfrm xmlns:a="http://schemas.openxmlformats.org/drawingml/2006/main">
             <a:off x="457200" y="457200"/>
-            <a:ext cx="8229600" cy="548640"/>
+            <a:ext cx="8229600" cy="640080"/>
           </a:xfrm>
-          <a:prstGeom prst="rect">
+          <a:prstGeom xmlns:a="http://schemas.openxmlformats.org/drawingml/2006/main" prst="rect">
             <a:avLst/>
           </a:prstGeom>
-          <a:noFill/>
-        </p:spPr>
-        <p:txBody>
-          <a:bodyPr wrap="none">
+          <a:noFill xmlns:a="http://schemas.openxmlformats.org/drawingml/2006/main"/>
+        </p:spPr>
+        <p:txBody>
+          <a:bodyPr xmlns:a="http://schemas.openxmlformats.org/drawingml/2006/main" wrap="none">
             <a:spAutoFit/>
           </a:bodyPr>
-          <a:lstStyle/>
-          <a:p>
+          <a:lstStyle xmlns:a="http://schemas.openxmlformats.org/drawingml/2006/main"/>
+          <a:p xmlns:a="http://schemas.openxmlformats.org/drawingml/2006/main">
             <a:pPr>
+              <a:buNone/>
               <a:defRPr sz="3600" b="1">
                 <a:solidFill>
                   <a:srgbClr val="212121"/>
@@ -4281,79 +5766,98 @@
               </a:defRPr>
             </a:pPr>
             <a:r>
-              <a:t>User thật nói gì</a:t>
-            </a:r>
-          </a:p>
-        </p:txBody>
-      </p:sp>
-      <p:sp>
-        <p:nvSpPr>
-          <p:cNvPr id="3" name="Rectangle 2"/>
-          <p:cNvSpPr/>
+              <a:t>5 người thật đã giúp nhóm sửa gì?</a:t>
+            </a:r>
+          </a:p>
+        </p:txBody>
+      </p:sp>
+      <p:sp>
+        <p:nvSpPr>
+          <p:cNvPr id="3" name="Rectangle 2">
+            <a:extLst xmlns:a="http://schemas.openxmlformats.org/drawingml/2006/main">
+              <a:ext uri="{FF2B5EF4-FFF2-40B4-BE49-F238E27FC236}">
+                <a16:creationId xmlns:a16="http://schemas.microsoft.com/office/drawing/2014/main" id="{B501B5C1-4AB0-494B-8E88-4C805EC8E7A5}"/>
+              </a:ext>
+            </a:extLst>
+          </p:cNvPr>
+          <p:cNvSpPr>
+            <a:spLocks xmlns:a="http://schemas.openxmlformats.org/drawingml/2006/main" noGrp="1"/>
+          </p:cNvSpPr>
           <p:nvPr/>
         </p:nvSpPr>
         <p:spPr>
-          <a:xfrm>
+          <a:xfrm xmlns:a="http://schemas.openxmlformats.org/drawingml/2006/main">
             <a:off x="457200" y="1188720"/>
             <a:ext cx="3931920" cy="1371600"/>
           </a:xfrm>
-          <a:prstGeom prst="rect">
+          <a:prstGeom xmlns:a="http://schemas.openxmlformats.org/drawingml/2006/main" prst="rect">
             <a:avLst/>
           </a:prstGeom>
-          <a:solidFill>
+          <a:solidFill xmlns:a="http://schemas.openxmlformats.org/drawingml/2006/main">
             <a:srgbClr val="F3F4F6"/>
           </a:solidFill>
-          <a:ln w="12700">
+          <a:ln xmlns:a="http://schemas.openxmlformats.org/drawingml/2006/main" w="12700">
             <a:solidFill>
               <a:srgbClr val="028090"/>
             </a:solidFill>
           </a:ln>
         </p:spPr>
         <p:style>
-          <a:lnRef idx="1">
+          <a:lnRef xmlns:a="http://schemas.openxmlformats.org/drawingml/2006/main" idx="1">
             <a:schemeClr val="accent1"/>
           </a:lnRef>
-          <a:fillRef idx="3">
+          <a:fillRef xmlns:a="http://schemas.openxmlformats.org/drawingml/2006/main" idx="3">
             <a:schemeClr val="accent1"/>
           </a:fillRef>
-          <a:effectRef idx="2">
+          <a:effectRef xmlns:a="http://schemas.openxmlformats.org/drawingml/2006/main" idx="2">
             <a:schemeClr val="accent1"/>
           </a:effectRef>
-          <a:fontRef idx="minor">
+          <a:fontRef xmlns:a="http://schemas.openxmlformats.org/drawingml/2006/main" idx="minor">
             <a:schemeClr val="lt1"/>
           </a:fontRef>
         </p:style>
         <p:txBody>
-          <a:bodyPr rtlCol="0" anchor="ctr"/>
-          <a:lstStyle/>
-          <a:p>
-            <a:pPr algn="ctr"/>
-          </a:p>
-        </p:txBody>
-      </p:sp>
-      <p:sp>
-        <p:nvSpPr>
-          <p:cNvPr id="4" name="TextBox 3"/>
-          <p:cNvSpPr txBox="1"/>
+          <a:bodyPr xmlns:a="http://schemas.openxmlformats.org/drawingml/2006/main" anchor="ctr"/>
+          <a:lstStyle xmlns:a="http://schemas.openxmlformats.org/drawingml/2006/main"/>
+          <a:p xmlns:a="http://schemas.openxmlformats.org/drawingml/2006/main">
+            <a:pPr algn="ctr">
+              <a:buNone/>
+            </a:pPr>
+          </a:p>
+        </p:txBody>
+      </p:sp>
+      <p:sp>
+        <p:nvSpPr>
+          <p:cNvPr id="4" name="TextBox 3">
+            <a:extLst xmlns:a="http://schemas.openxmlformats.org/drawingml/2006/main">
+              <a:ext uri="{FF2B5EF4-FFF2-40B4-BE49-F238E27FC236}">
+                <a16:creationId xmlns:a16="http://schemas.microsoft.com/office/drawing/2014/main" id="{BEE2D29E-6AEF-4C89-A746-88AA201076BB}"/>
+              </a:ext>
+            </a:extLst>
+          </p:cNvPr>
+          <p:cNvSpPr>
+            <a:spLocks xmlns:a="http://schemas.openxmlformats.org/drawingml/2006/main" noGrp="1"/>
+          </p:cNvSpPr>
           <p:nvPr/>
         </p:nvSpPr>
         <p:spPr>
-          <a:xfrm>
+          <a:xfrm xmlns:a="http://schemas.openxmlformats.org/drawingml/2006/main">
             <a:off x="640080" y="1371600"/>
             <a:ext cx="3566160" cy="1005840"/>
           </a:xfrm>
-          <a:prstGeom prst="rect">
+          <a:prstGeom xmlns:a="http://schemas.openxmlformats.org/drawingml/2006/main" prst="rect">
             <a:avLst/>
           </a:prstGeom>
-          <a:noFill/>
-        </p:spPr>
-        <p:txBody>
-          <a:bodyPr wrap="square" anchor="t">
+          <a:noFill xmlns:a="http://schemas.openxmlformats.org/drawingml/2006/main"/>
+        </p:spPr>
+        <p:txBody>
+          <a:bodyPr xmlns:a="http://schemas.openxmlformats.org/drawingml/2006/main" wrap="square" anchor="t">
             <a:spAutoFit/>
           </a:bodyPr>
-          <a:lstStyle/>
-          <a:p>
+          <a:lstStyle xmlns:a="http://schemas.openxmlformats.org/drawingml/2006/main"/>
+          <a:p xmlns:a="http://schemas.openxmlformats.org/drawingml/2006/main">
             <a:pPr>
+              <a:buNone/>
               <a:defRPr sz="1300">
                 <a:solidFill>
                   <a:srgbClr val="212121"/>
@@ -4361,84 +5865,99 @@
               </a:defRPr>
             </a:pPr>
             <a:r>
-              <a:t>[TODO: Quote 1]</a:t>
-            </a:r>
-            <a:br/>
-            <a:br/>
-            <a:r>
-              <a:t>VD: "Slide toàn diagram, nó báo không đủ text — đúng." — Minh, HV B3</a:t>
-            </a:r>
-          </a:p>
-        </p:txBody>
-      </p:sp>
-      <p:sp>
-        <p:nvSpPr>
-          <p:cNvPr id="5" name="Rectangle 4"/>
-          <p:cNvSpPr/>
+              <a:t>“Lúc thì AI trả lời thành đoạn văn, lúc lại chia nhiều gạch đầu dòng nên mình thấy hơi rối.”
+— Bùi Hữu Nghĩa · Học viên K3</a:t>
+            </a:r>
+          </a:p>
+        </p:txBody>
+      </p:sp>
+      <p:sp>
+        <p:nvSpPr>
+          <p:cNvPr id="5" name="Rectangle 4">
+            <a:extLst xmlns:a="http://schemas.openxmlformats.org/drawingml/2006/main">
+              <a:ext uri="{FF2B5EF4-FFF2-40B4-BE49-F238E27FC236}">
+                <a16:creationId xmlns:a16="http://schemas.microsoft.com/office/drawing/2014/main" id="{17BA4C38-93B6-411D-BD8F-5BD5C2E920B9}"/>
+              </a:ext>
+            </a:extLst>
+          </p:cNvPr>
+          <p:cNvSpPr>
+            <a:spLocks xmlns:a="http://schemas.openxmlformats.org/drawingml/2006/main" noGrp="1"/>
+          </p:cNvSpPr>
           <p:nvPr/>
         </p:nvSpPr>
         <p:spPr>
-          <a:xfrm>
+          <a:xfrm xmlns:a="http://schemas.openxmlformats.org/drawingml/2006/main">
             <a:off x="4754880" y="1188720"/>
             <a:ext cx="3931920" cy="1371600"/>
           </a:xfrm>
-          <a:prstGeom prst="rect">
+          <a:prstGeom xmlns:a="http://schemas.openxmlformats.org/drawingml/2006/main" prst="rect">
             <a:avLst/>
           </a:prstGeom>
-          <a:solidFill>
+          <a:solidFill xmlns:a="http://schemas.openxmlformats.org/drawingml/2006/main">
             <a:srgbClr val="F3F4F6"/>
           </a:solidFill>
-          <a:ln w="12700">
+          <a:ln xmlns:a="http://schemas.openxmlformats.org/drawingml/2006/main" w="12700">
             <a:solidFill>
               <a:srgbClr val="028090"/>
             </a:solidFill>
           </a:ln>
         </p:spPr>
         <p:style>
-          <a:lnRef idx="1">
+          <a:lnRef xmlns:a="http://schemas.openxmlformats.org/drawingml/2006/main" idx="1">
             <a:schemeClr val="accent1"/>
           </a:lnRef>
-          <a:fillRef idx="3">
+          <a:fillRef xmlns:a="http://schemas.openxmlformats.org/drawingml/2006/main" idx="3">
             <a:schemeClr val="accent1"/>
           </a:fillRef>
-          <a:effectRef idx="2">
+          <a:effectRef xmlns:a="http://schemas.openxmlformats.org/drawingml/2006/main" idx="2">
             <a:schemeClr val="accent1"/>
           </a:effectRef>
-          <a:fontRef idx="minor">
+          <a:fontRef xmlns:a="http://schemas.openxmlformats.org/drawingml/2006/main" idx="minor">
             <a:schemeClr val="lt1"/>
           </a:fontRef>
         </p:style>
         <p:txBody>
-          <a:bodyPr rtlCol="0" anchor="ctr"/>
-          <a:lstStyle/>
-          <a:p>
-            <a:pPr algn="ctr"/>
-          </a:p>
-        </p:txBody>
-      </p:sp>
-      <p:sp>
-        <p:nvSpPr>
-          <p:cNvPr id="6" name="TextBox 5"/>
-          <p:cNvSpPr txBox="1"/>
+          <a:bodyPr xmlns:a="http://schemas.openxmlformats.org/drawingml/2006/main" anchor="ctr"/>
+          <a:lstStyle xmlns:a="http://schemas.openxmlformats.org/drawingml/2006/main"/>
+          <a:p xmlns:a="http://schemas.openxmlformats.org/drawingml/2006/main">
+            <a:pPr algn="ctr">
+              <a:buNone/>
+            </a:pPr>
+          </a:p>
+        </p:txBody>
+      </p:sp>
+      <p:sp>
+        <p:nvSpPr>
+          <p:cNvPr id="6" name="TextBox 5">
+            <a:extLst xmlns:a="http://schemas.openxmlformats.org/drawingml/2006/main">
+              <a:ext uri="{FF2B5EF4-FFF2-40B4-BE49-F238E27FC236}">
+                <a16:creationId xmlns:a16="http://schemas.microsoft.com/office/drawing/2014/main" id="{55A0590C-55F1-457E-802C-D1F34483D9F0}"/>
+              </a:ext>
+            </a:extLst>
+          </p:cNvPr>
+          <p:cNvSpPr>
+            <a:spLocks xmlns:a="http://schemas.openxmlformats.org/drawingml/2006/main" noGrp="1"/>
+          </p:cNvSpPr>
           <p:nvPr/>
         </p:nvSpPr>
         <p:spPr>
-          <a:xfrm>
+          <a:xfrm xmlns:a="http://schemas.openxmlformats.org/drawingml/2006/main">
             <a:off x="4937760" y="1371600"/>
             <a:ext cx="3566160" cy="1005840"/>
           </a:xfrm>
-          <a:prstGeom prst="rect">
+          <a:prstGeom xmlns:a="http://schemas.openxmlformats.org/drawingml/2006/main" prst="rect">
             <a:avLst/>
           </a:prstGeom>
-          <a:noFill/>
-        </p:spPr>
-        <p:txBody>
-          <a:bodyPr wrap="square" anchor="t">
+          <a:noFill xmlns:a="http://schemas.openxmlformats.org/drawingml/2006/main"/>
+        </p:spPr>
+        <p:txBody>
+          <a:bodyPr xmlns:a="http://schemas.openxmlformats.org/drawingml/2006/main" wrap="square" anchor="t">
             <a:spAutoFit/>
           </a:bodyPr>
-          <a:lstStyle/>
-          <a:p>
+          <a:lstStyle xmlns:a="http://schemas.openxmlformats.org/drawingml/2006/main"/>
+          <a:p xmlns:a="http://schemas.openxmlformats.org/drawingml/2006/main">
             <a:pPr>
+              <a:buNone/>
               <a:defRPr sz="1300">
                 <a:solidFill>
                   <a:srgbClr val="212121"/>
@@ -4446,39 +5965,44 @@
               </a:defRPr>
             </a:pPr>
             <a:r>
-              <a:t>[TODO: Quote 2]</a:t>
-            </a:r>
-            <a:br/>
-            <a:br/>
-            <a:r>
-              <a:t>VD: "Trích dẫn trang giúp mình quay lại xem ngay." — Hương</a:t>
-            </a:r>
-          </a:p>
-        </p:txBody>
-      </p:sp>
-      <p:sp>
-        <p:nvSpPr>
-          <p:cNvPr id="7" name="TextBox 6"/>
-          <p:cNvSpPr txBox="1"/>
+              <a:t>“Mình muốn những gì nhập trong ô này phải được ưu tiên khi tạo quiz.”
+— Hà Nhật Khánh Duy · Học viên K3</a:t>
+            </a:r>
+          </a:p>
+        </p:txBody>
+      </p:sp>
+      <p:sp>
+        <p:nvSpPr>
+          <p:cNvPr id="7" name="TextBox 6">
+            <a:extLst xmlns:a="http://schemas.openxmlformats.org/drawingml/2006/main">
+              <a:ext uri="{FF2B5EF4-FFF2-40B4-BE49-F238E27FC236}">
+                <a16:creationId xmlns:a16="http://schemas.microsoft.com/office/drawing/2014/main" id="{FFFE486A-8876-42FA-B4FA-4C0FA58BD2EF}"/>
+              </a:ext>
+            </a:extLst>
+          </p:cNvPr>
+          <p:cNvSpPr>
+            <a:spLocks xmlns:a="http://schemas.openxmlformats.org/drawingml/2006/main" noGrp="1"/>
+          </p:cNvSpPr>
           <p:nvPr/>
         </p:nvSpPr>
         <p:spPr>
-          <a:xfrm>
+          <a:xfrm xmlns:a="http://schemas.openxmlformats.org/drawingml/2006/main">
             <a:off x="457200" y="2834640"/>
-            <a:ext cx="8229600" cy="365760"/>
+            <a:ext cx="8229600" cy="396240"/>
           </a:xfrm>
-          <a:prstGeom prst="rect">
+          <a:prstGeom xmlns:a="http://schemas.openxmlformats.org/drawingml/2006/main" prst="rect">
             <a:avLst/>
           </a:prstGeom>
-          <a:noFill/>
-        </p:spPr>
-        <p:txBody>
-          <a:bodyPr wrap="square" anchor="t">
+          <a:noFill xmlns:a="http://schemas.openxmlformats.org/drawingml/2006/main"/>
+        </p:spPr>
+        <p:txBody>
+          <a:bodyPr xmlns:a="http://schemas.openxmlformats.org/drawingml/2006/main" wrap="square" anchor="t">
             <a:spAutoFit/>
           </a:bodyPr>
-          <a:lstStyle/>
-          <a:p>
+          <a:lstStyle xmlns:a="http://schemas.openxmlformats.org/drawingml/2006/main"/>
+          <a:p xmlns:a="http://schemas.openxmlformats.org/drawingml/2006/main">
             <a:pPr>
+              <a:buNone/>
               <a:defRPr sz="2000" b="1">
                 <a:solidFill>
                   <a:srgbClr val="028090"/>
@@ -4486,34 +6010,43 @@
               </a:defRPr>
             </a:pPr>
             <a:r>
-              <a:t>Thay đổi từ feedback</a:t>
-            </a:r>
-          </a:p>
-        </p:txBody>
-      </p:sp>
-      <p:sp>
-        <p:nvSpPr>
-          <p:cNvPr id="8" name="TextBox 7"/>
-          <p:cNvSpPr txBox="1"/>
+              <a:t>Hai thay đổi đã chốt và retest đạt</a:t>
+            </a:r>
+          </a:p>
+        </p:txBody>
+      </p:sp>
+      <p:sp>
+        <p:nvSpPr>
+          <p:cNvPr id="8" name="TextBox 7">
+            <a:extLst xmlns:a="http://schemas.openxmlformats.org/drawingml/2006/main">
+              <a:ext uri="{FF2B5EF4-FFF2-40B4-BE49-F238E27FC236}">
+                <a16:creationId xmlns:a16="http://schemas.microsoft.com/office/drawing/2014/main" id="{CD52504B-6479-44B3-A834-D6B2522C67D4}"/>
+              </a:ext>
+            </a:extLst>
+          </p:cNvPr>
+          <p:cNvSpPr>
+            <a:spLocks xmlns:a="http://schemas.openxmlformats.org/drawingml/2006/main" noGrp="1"/>
+          </p:cNvSpPr>
           <p:nvPr/>
         </p:nvSpPr>
         <p:spPr>
-          <a:xfrm>
+          <a:xfrm xmlns:a="http://schemas.openxmlformats.org/drawingml/2006/main">
             <a:off x="457200" y="3291840"/>
             <a:ext cx="8229600" cy="1371600"/>
           </a:xfrm>
-          <a:prstGeom prst="rect">
+          <a:prstGeom xmlns:a="http://schemas.openxmlformats.org/drawingml/2006/main" prst="rect">
             <a:avLst/>
           </a:prstGeom>
-          <a:noFill/>
-        </p:spPr>
-        <p:txBody>
-          <a:bodyPr wrap="square" anchor="t">
+          <a:noFill xmlns:a="http://schemas.openxmlformats.org/drawingml/2006/main"/>
+        </p:spPr>
+        <p:txBody>
+          <a:bodyPr xmlns:a="http://schemas.openxmlformats.org/drawingml/2006/main" wrap="square" anchor="t">
             <a:spAutoFit/>
           </a:bodyPr>
-          <a:lstStyle/>
-          <a:p>
+          <a:lstStyle xmlns:a="http://schemas.openxmlformats.org/drawingml/2006/main"/>
+          <a:p xmlns:a="http://schemas.openxmlformats.org/drawingml/2006/main">
             <a:pPr>
+              <a:buNone/>
               <a:defRPr sz="1300">
                 <a:solidFill>
                   <a:srgbClr val="212121"/>
@@ -4521,43 +6054,45 @@
               </a:defRPr>
             </a:pPr>
             <a:r>
-              <a:t>[TODO: ≥1 thay đổi]</a:t>
-            </a:r>
-            <a:br/>
-            <a:br/>
-            <a:r>
-              <a:t>VD: ĐÃ SỬA: Thêm nút Hủy rõ ràng.</a:t>
-            </a:r>
-            <a:br/>
-            <a:r>
-              <a:t>VD: GIỮ: One-at-a-time vì preserves momentum.</a:t>
-            </a:r>
-          </a:p>
-        </p:txBody>
-      </p:sp>
-      <p:sp>
-        <p:nvSpPr>
-          <p:cNvPr id="9" name="TextBox 8"/>
-          <p:cNvSpPr txBox="1"/>
+              <a:t>1  AI Tutor: plain text thống nhất; không Markdown/dấu *; giữ đúng thứ tự lịch sử.
+2  Quiz generator: ưu tiên ô “Phần muốn ôn” khi nội dung có căn cứ trong slide.
+RETEST: cả hai tiêu chí đạt — Phạm Tiến Anh.</a:t>
+            </a:r>
+          </a:p>
+        </p:txBody>
+      </p:sp>
+      <p:sp>
+        <p:nvSpPr>
+          <p:cNvPr id="9" name="TextBox 8">
+            <a:extLst xmlns:a="http://schemas.openxmlformats.org/drawingml/2006/main">
+              <a:ext uri="{FF2B5EF4-FFF2-40B4-BE49-F238E27FC236}">
+                <a16:creationId xmlns:a16="http://schemas.microsoft.com/office/drawing/2014/main" id="{7187534A-A2E7-478E-AE0B-487C6563C9C8}"/>
+              </a:ext>
+            </a:extLst>
+          </p:cNvPr>
+          <p:cNvSpPr>
+            <a:spLocks xmlns:a="http://schemas.openxmlformats.org/drawingml/2006/main" noGrp="1"/>
+          </p:cNvSpPr>
           <p:nvPr/>
         </p:nvSpPr>
         <p:spPr>
-          <a:xfrm>
+          <a:xfrm xmlns:a="http://schemas.openxmlformats.org/drawingml/2006/main">
             <a:off x="457200" y="4663440"/>
             <a:ext cx="8229600" cy="274320"/>
           </a:xfrm>
-          <a:prstGeom prst="rect">
+          <a:prstGeom xmlns:a="http://schemas.openxmlformats.org/drawingml/2006/main" prst="rect">
             <a:avLst/>
           </a:prstGeom>
-          <a:noFill/>
-        </p:spPr>
-        <p:txBody>
-          <a:bodyPr wrap="none">
+          <a:noFill xmlns:a="http://schemas.openxmlformats.org/drawingml/2006/main"/>
+        </p:spPr>
+        <p:txBody>
+          <a:bodyPr xmlns:a="http://schemas.openxmlformats.org/drawingml/2006/main" wrap="none">
             <a:spAutoFit/>
           </a:bodyPr>
-          <a:lstStyle/>
-          <a:p>
+          <a:lstStyle xmlns:a="http://schemas.openxmlformats.org/drawingml/2006/main"/>
+          <a:p xmlns:a="http://schemas.openxmlformats.org/drawingml/2006/main">
             <a:pPr>
+              <a:buNone/>
               <a:defRPr sz="1000" i="1">
                 <a:solidFill>
                   <a:srgbClr val="6B7280"/>
@@ -4565,28 +6100,29 @@
               </a:defRPr>
             </a:pPr>
             <a:r>
-              <a:t>validation/ ≥5 người + Changelog</a:t>
+              <a:t>validation/feedback-log.md</a:t>
             </a:r>
           </a:p>
         </p:txBody>
       </p:sp>
     </p:spTree>
+    <p:extLst>
+      <p:ext uri="{BB962C8B-B14F-4D97-AF65-F5344CB8AC3E}">
+        <p14:creationId xmlns:p14="http://schemas.microsoft.com/office/powerpoint/2010/main" val="285604443"/>
+      </p:ext>
+    </p:extLst>
   </p:cSld>
-  <p:clrMapOvr>
-    <a:masterClrMapping/>
-  </p:clrMapOvr>
 </p:sld>
 </file>
 
 <file path=ppt/slides/slide6.xml><?xml version="1.0" encoding="utf-8"?>
-<p:sld xmlns:a="http://schemas.openxmlformats.org/drawingml/2006/main" xmlns:p="http://schemas.openxmlformats.org/presentationml/2006/main" xmlns:r="http://schemas.openxmlformats.org/officeDocument/2006/relationships">
+<p:sld xmlns:p="http://schemas.openxmlformats.org/presentationml/2006/main">
   <p:cSld>
     <p:bg>
       <p:bgPr>
-        <a:solidFill>
+        <a:solidFill xmlns:a="http://schemas.openxmlformats.org/drawingml/2006/main">
           <a:srgbClr val="028090"/>
         </a:solidFill>
-        <a:effectLst/>
       </p:bgPr>
     </p:bg>
     <p:spTree>
@@ -4595,30 +6131,41 @@
         <p:cNvGrpSpPr/>
         <p:nvPr/>
       </p:nvGrpSpPr>
-      <p:grpSpPr/>
-      <p:sp>
-        <p:nvSpPr>
-          <p:cNvPr id="2" name="TextBox 1"/>
-          <p:cNvSpPr txBox="1"/>
+      <p:grpSpPr>
+        <a:xfrm xmlns:a="http://schemas.openxmlformats.org/drawingml/2006/main"/>
+      </p:grpSpPr>
+      <p:sp>
+        <p:nvSpPr>
+          <p:cNvPr id="2" name="TextBox 1">
+            <a:extLst xmlns:a="http://schemas.openxmlformats.org/drawingml/2006/main">
+              <a:ext uri="{FF2B5EF4-FFF2-40B4-BE49-F238E27FC236}">
+                <a16:creationId xmlns:a16="http://schemas.microsoft.com/office/drawing/2014/main" id="{0359DC64-1635-4F75-B9CC-ED324766FBA7}"/>
+              </a:ext>
+            </a:extLst>
+          </p:cNvPr>
+          <p:cNvSpPr>
+            <a:spLocks xmlns:a="http://schemas.openxmlformats.org/drawingml/2006/main" noGrp="1"/>
+          </p:cNvSpPr>
           <p:nvPr/>
         </p:nvSpPr>
         <p:spPr>
-          <a:xfrm>
+          <a:xfrm xmlns:a="http://schemas.openxmlformats.org/drawingml/2006/main">
             <a:off x="457200" y="457200"/>
-            <a:ext cx="8229600" cy="731520"/>
+            <a:ext cx="8229600" cy="762000"/>
           </a:xfrm>
-          <a:prstGeom prst="rect">
+          <a:prstGeom xmlns:a="http://schemas.openxmlformats.org/drawingml/2006/main" prst="rect">
             <a:avLst/>
           </a:prstGeom>
-          <a:noFill/>
-        </p:spPr>
-        <p:txBody>
-          <a:bodyPr wrap="none">
+          <a:noFill xmlns:a="http://schemas.openxmlformats.org/drawingml/2006/main"/>
+        </p:spPr>
+        <p:txBody>
+          <a:bodyPr xmlns:a="http://schemas.openxmlformats.org/drawingml/2006/main" wrap="none">
             <a:spAutoFit/>
           </a:bodyPr>
-          <a:lstStyle/>
-          <a:p>
+          <a:lstStyle xmlns:a="http://schemas.openxmlformats.org/drawingml/2006/main"/>
+          <a:p xmlns:a="http://schemas.openxmlformats.org/drawingml/2006/main">
             <a:pPr>
+              <a:buNone/>
               <a:defRPr sz="4400" b="1">
                 <a:solidFill>
                   <a:srgbClr val="FFFFFF"/>
@@ -4633,27 +6180,36 @@
       </p:sp>
       <p:sp>
         <p:nvSpPr>
-          <p:cNvPr id="3" name="TextBox 2"/>
-          <p:cNvSpPr txBox="1"/>
+          <p:cNvPr id="3" name="TextBox 2">
+            <a:extLst xmlns:a="http://schemas.openxmlformats.org/drawingml/2006/main">
+              <a:ext uri="{FF2B5EF4-FFF2-40B4-BE49-F238E27FC236}">
+                <a16:creationId xmlns:a16="http://schemas.microsoft.com/office/drawing/2014/main" id="{3C39924D-5F81-4A6B-9E44-0BE426B98860}"/>
+              </a:ext>
+            </a:extLst>
+          </p:cNvPr>
+          <p:cNvSpPr>
+            <a:spLocks xmlns:a="http://schemas.openxmlformats.org/drawingml/2006/main" noGrp="1"/>
+          </p:cNvSpPr>
           <p:nvPr/>
         </p:nvSpPr>
         <p:spPr>
-          <a:xfrm>
+          <a:xfrm xmlns:a="http://schemas.openxmlformats.org/drawingml/2006/main">
             <a:off x="457200" y="1371600"/>
-            <a:ext cx="8229600" cy="365760"/>
+            <a:ext cx="8229600" cy="396240"/>
           </a:xfrm>
-          <a:prstGeom prst="rect">
+          <a:prstGeom xmlns:a="http://schemas.openxmlformats.org/drawingml/2006/main" prst="rect">
             <a:avLst/>
           </a:prstGeom>
-          <a:noFill/>
-        </p:spPr>
-        <p:txBody>
-          <a:bodyPr wrap="square" anchor="t">
+          <a:noFill xmlns:a="http://schemas.openxmlformats.org/drawingml/2006/main"/>
+        </p:spPr>
+        <p:txBody>
+          <a:bodyPr xmlns:a="http://schemas.openxmlformats.org/drawingml/2006/main" wrap="square" anchor="t">
             <a:spAutoFit/>
           </a:bodyPr>
-          <a:lstStyle/>
-          <a:p>
+          <a:lstStyle xmlns:a="http://schemas.openxmlformats.org/drawingml/2006/main"/>
+          <a:p xmlns:a="http://schemas.openxmlformats.org/drawingml/2006/main">
             <a:pPr>
+              <a:buNone/>
               <a:defRPr sz="2000" b="1">
                 <a:solidFill>
                   <a:srgbClr val="FFFFFF"/>
@@ -4661,34 +6217,43 @@
               </a:defRPr>
             </a:pPr>
             <a:r>
-              <a:t>Ưu tiên từ feedback/failure</a:t>
-            </a:r>
-          </a:p>
-        </p:txBody>
-      </p:sp>
-      <p:sp>
-        <p:nvSpPr>
-          <p:cNvPr id="4" name="TextBox 3"/>
-          <p:cNvSpPr txBox="1"/>
+              <a:t>Ưu tiên tiếp theo từ feedback và failure</a:t>
+            </a:r>
+          </a:p>
+        </p:txBody>
+      </p:sp>
+      <p:sp>
+        <p:nvSpPr>
+          <p:cNvPr id="4" name="TextBox 3">
+            <a:extLst xmlns:a="http://schemas.openxmlformats.org/drawingml/2006/main">
+              <a:ext uri="{FF2B5EF4-FFF2-40B4-BE49-F238E27FC236}">
+                <a16:creationId xmlns:a16="http://schemas.microsoft.com/office/drawing/2014/main" id="{A9C8FA40-0C5E-4461-BCCC-EBF2444E4217}"/>
+              </a:ext>
+            </a:extLst>
+          </p:cNvPr>
+          <p:cNvSpPr>
+            <a:spLocks xmlns:a="http://schemas.openxmlformats.org/drawingml/2006/main" noGrp="1"/>
+          </p:cNvSpPr>
           <p:nvPr/>
         </p:nvSpPr>
         <p:spPr>
-          <a:xfrm>
+          <a:xfrm xmlns:a="http://schemas.openxmlformats.org/drawingml/2006/main">
             <a:off x="457200" y="1920240"/>
             <a:ext cx="8229600" cy="1463040"/>
           </a:xfrm>
-          <a:prstGeom prst="rect">
+          <a:prstGeom xmlns:a="http://schemas.openxmlformats.org/drawingml/2006/main" prst="rect">
             <a:avLst/>
           </a:prstGeom>
-          <a:noFill/>
-        </p:spPr>
-        <p:txBody>
-          <a:bodyPr wrap="square" anchor="t">
+          <a:noFill xmlns:a="http://schemas.openxmlformats.org/drawingml/2006/main"/>
+        </p:spPr>
+        <p:txBody>
+          <a:bodyPr xmlns:a="http://schemas.openxmlformats.org/drawingml/2006/main" wrap="square" anchor="t">
             <a:spAutoFit/>
           </a:bodyPr>
-          <a:lstStyle/>
-          <a:p>
+          <a:lstStyle xmlns:a="http://schemas.openxmlformats.org/drawingml/2006/main"/>
+          <a:p xmlns:a="http://schemas.openxmlformats.org/drawingml/2006/main">
             <a:pPr>
+              <a:buNone/>
               <a:defRPr sz="1500">
                 <a:solidFill>
                   <a:srgbClr val="FFFFFF"/>
@@ -4696,56 +6261,45 @@
               </a:defRPr>
             </a:pPr>
             <a:r>
-              <a:t>1. [TODO: Priority từ failure]</a:t>
-            </a:r>
-            <a:br/>
-            <a:r>
-              <a:t>   VD: Nâng threshold 50→200 chars chặn slide image-heavy</a:t>
-            </a:r>
-            <a:br/>
-            <a:br/>
-            <a:r>
-              <a:t>2. [TODO: Priority từ validation]</a:t>
-            </a:r>
-            <a:br/>
-            <a:r>
-              <a:t>   VD: Link "Xem nguồn" mở PDF tại đúng trang</a:t>
-            </a:r>
-            <a:br/>
-            <a:br/>
-            <a:r>
-              <a:t>3. [TODO: Backlog]</a:t>
-            </a:r>
-            <a:br/>
-            <a:r>
-              <a:t>   VD: OCR tiếng Việt có dấu</a:t>
-            </a:r>
-          </a:p>
-        </p:txBody>
-      </p:sp>
-      <p:sp>
-        <p:nvSpPr>
-          <p:cNvPr id="5" name="TextBox 4"/>
-          <p:cNvSpPr txBox="1"/>
+              <a:t>1. Thêm integration test cho prompt priority và chat plain-text.
+2. Làm phần thông tin tạo quiz dễ hiểu hơn; đổi tên và cải thiện typography.
+3. Chia học liệu theo buổi; bổ sung OCR và holdout cases.</a:t>
+            </a:r>
+          </a:p>
+        </p:txBody>
+      </p:sp>
+      <p:sp>
+        <p:nvSpPr>
+          <p:cNvPr id="5" name="TextBox 4">
+            <a:extLst xmlns:a="http://schemas.openxmlformats.org/drawingml/2006/main">
+              <a:ext uri="{FF2B5EF4-FFF2-40B4-BE49-F238E27FC236}">
+                <a16:creationId xmlns:a16="http://schemas.microsoft.com/office/drawing/2014/main" id="{D2ED223D-F600-49B3-AB7A-418E7F179EE8}"/>
+              </a:ext>
+            </a:extLst>
+          </p:cNvPr>
+          <p:cNvSpPr>
+            <a:spLocks xmlns:a="http://schemas.openxmlformats.org/drawingml/2006/main" noGrp="1"/>
+          </p:cNvSpPr>
           <p:nvPr/>
         </p:nvSpPr>
         <p:spPr>
-          <a:xfrm>
+          <a:xfrm xmlns:a="http://schemas.openxmlformats.org/drawingml/2006/main">
             <a:off x="457200" y="3566160"/>
-            <a:ext cx="8229600" cy="365760"/>
+            <a:ext cx="8229600" cy="396240"/>
           </a:xfrm>
-          <a:prstGeom prst="rect">
+          <a:prstGeom xmlns:a="http://schemas.openxmlformats.org/drawingml/2006/main" prst="rect">
             <a:avLst/>
           </a:prstGeom>
-          <a:noFill/>
-        </p:spPr>
-        <p:txBody>
-          <a:bodyPr wrap="square" anchor="t">
+          <a:noFill xmlns:a="http://schemas.openxmlformats.org/drawingml/2006/main"/>
+        </p:spPr>
+        <p:txBody>
+          <a:bodyPr xmlns:a="http://schemas.openxmlformats.org/drawingml/2006/main" wrap="square" anchor="t">
             <a:spAutoFit/>
           </a:bodyPr>
-          <a:lstStyle/>
-          <a:p>
+          <a:lstStyle xmlns:a="http://schemas.openxmlformats.org/drawingml/2006/main"/>
+          <a:p xmlns:a="http://schemas.openxmlformats.org/drawingml/2006/main">
             <a:pPr>
+              <a:buNone/>
               <a:defRPr sz="2000" b="1">
                 <a:solidFill>
                   <a:srgbClr val="FFFFFF"/>
@@ -4760,27 +6314,36 @@
       </p:sp>
       <p:sp>
         <p:nvSpPr>
-          <p:cNvPr id="6" name="TextBox 5"/>
-          <p:cNvSpPr txBox="1"/>
+          <p:cNvPr id="6" name="TextBox 5">
+            <a:extLst xmlns:a="http://schemas.openxmlformats.org/drawingml/2006/main">
+              <a:ext uri="{FF2B5EF4-FFF2-40B4-BE49-F238E27FC236}">
+                <a16:creationId xmlns:a16="http://schemas.microsoft.com/office/drawing/2014/main" id="{F1545395-EC7A-49CE-97D0-59E3926CAEA4}"/>
+              </a:ext>
+            </a:extLst>
+          </p:cNvPr>
+          <p:cNvSpPr>
+            <a:spLocks xmlns:a="http://schemas.openxmlformats.org/drawingml/2006/main" noGrp="1"/>
+          </p:cNvSpPr>
           <p:nvPr/>
         </p:nvSpPr>
         <p:spPr>
-          <a:xfrm>
+          <a:xfrm xmlns:a="http://schemas.openxmlformats.org/drawingml/2006/main">
             <a:off x="457200" y="4114800"/>
             <a:ext cx="8229600" cy="731520"/>
           </a:xfrm>
-          <a:prstGeom prst="rect">
+          <a:prstGeom xmlns:a="http://schemas.openxmlformats.org/drawingml/2006/main" prst="rect">
             <a:avLst/>
           </a:prstGeom>
-          <a:noFill/>
-        </p:spPr>
-        <p:txBody>
-          <a:bodyPr wrap="square" anchor="t">
+          <a:noFill xmlns:a="http://schemas.openxmlformats.org/drawingml/2006/main"/>
+        </p:spPr>
+        <p:txBody>
+          <a:bodyPr xmlns:a="http://schemas.openxmlformats.org/drawingml/2006/main" wrap="square" anchor="t">
             <a:spAutoFit/>
           </a:bodyPr>
-          <a:lstStyle/>
-          <a:p>
+          <a:lstStyle xmlns:a="http://schemas.openxmlformats.org/drawingml/2006/main"/>
+          <a:p xmlns:a="http://schemas.openxmlformats.org/drawingml/2006/main">
             <a:pPr>
+              <a:buNone/>
               <a:defRPr sz="1400">
                 <a:solidFill>
                   <a:srgbClr val="FFFFFF"/>
@@ -4788,39 +6351,43 @@
               </a:defRPr>
             </a:pPr>
             <a:r>
-              <a:t>[TODO: Bài học từ case fail]</a:t>
-            </a:r>
-            <a:br/>
-            <a:br/>
-            <a:r>
-              <a:t>VD: Khi AI refuse, PHẢI có actionable recovery — không gợi ý "làm gì tiếp" thì user bỏ luôn.</a:t>
-            </a:r>
-          </a:p>
-        </p:txBody>
-      </p:sp>
-      <p:sp>
-        <p:nvSpPr>
-          <p:cNvPr id="7" name="TextBox 6"/>
-          <p:cNvSpPr txBox="1"/>
+              <a:t>Baseline 50% không phải lý do hạ chuẩn. Nhóm siết output contract, schema và grounding rồi chạy lại toàn bộ 22 case. Sửa hệ thống đo, không sửa số liệu.</a:t>
+            </a:r>
+          </a:p>
+        </p:txBody>
+      </p:sp>
+      <p:sp>
+        <p:nvSpPr>
+          <p:cNvPr id="7" name="TextBox 6">
+            <a:extLst xmlns:a="http://schemas.openxmlformats.org/drawingml/2006/main">
+              <a:ext uri="{FF2B5EF4-FFF2-40B4-BE49-F238E27FC236}">
+                <a16:creationId xmlns:a16="http://schemas.microsoft.com/office/drawing/2014/main" id="{24C83A9F-69FE-46CC-8EF0-34B45C252B9C}"/>
+              </a:ext>
+            </a:extLst>
+          </p:cNvPr>
+          <p:cNvSpPr>
+            <a:spLocks xmlns:a="http://schemas.openxmlformats.org/drawingml/2006/main" noGrp="1"/>
+          </p:cNvSpPr>
           <p:nvPr/>
         </p:nvSpPr>
         <p:spPr>
-          <a:xfrm>
+          <a:xfrm xmlns:a="http://schemas.openxmlformats.org/drawingml/2006/main">
             <a:off x="457200" y="4663440"/>
             <a:ext cx="8229600" cy="274320"/>
           </a:xfrm>
-          <a:prstGeom prst="rect">
+          <a:prstGeom xmlns:a="http://schemas.openxmlformats.org/drawingml/2006/main" prst="rect">
             <a:avLst/>
           </a:prstGeom>
-          <a:noFill/>
-        </p:spPr>
-        <p:txBody>
-          <a:bodyPr wrap="none">
+          <a:noFill xmlns:a="http://schemas.openxmlformats.org/drawingml/2006/main"/>
+        </p:spPr>
+        <p:txBody>
+          <a:bodyPr xmlns:a="http://schemas.openxmlformats.org/drawingml/2006/main" wrap="none">
             <a:spAutoFit/>
           </a:bodyPr>
-          <a:lstStyle/>
-          <a:p>
+          <a:lstStyle xmlns:a="http://schemas.openxmlformats.org/drawingml/2006/main"/>
+          <a:p xmlns:a="http://schemas.openxmlformats.org/drawingml/2006/main">
             <a:pPr>
+              <a:buNone/>
               <a:defRPr sz="1000" i="1">
                 <a:solidFill>
                   <a:srgbClr val="F3F4F6"/>
@@ -4831,10 +6398,12 @@
         </p:txBody>
       </p:sp>
     </p:spTree>
+    <p:extLst>
+      <p:ext uri="{BB962C8B-B14F-4D97-AF65-F5344CB8AC3E}">
+        <p14:creationId xmlns:p14="http://schemas.microsoft.com/office/powerpoint/2010/main" val="1865274460"/>
+      </p:ext>
+    </p:extLst>
   </p:cSld>
-  <p:clrMapOvr>
-    <a:masterClrMapping/>
-  </p:clrMapOvr>
 </p:sld>
 </file>
 
@@ -5000,7 +6569,7 @@
         </a:gradFill>
       </a:fillStyleLst>
       <a:lnStyleLst>
-        <a:ln w="9525" cap="flat" cmpd="sng" algn="ctr">
+        <a:ln w="9525">
           <a:solidFill>
             <a:schemeClr val="phClr">
               <a:shade val="95000"/>
@@ -5009,13 +6578,13 @@
           </a:solidFill>
           <a:prstDash val="solid"/>
         </a:ln>
-        <a:ln w="25400" cap="flat" cmpd="sng" algn="ctr">
+        <a:ln w="25400">
           <a:solidFill>
             <a:schemeClr val="phClr"/>
           </a:solidFill>
           <a:prstDash val="solid"/>
         </a:ln>
-        <a:ln w="38100" cap="flat" cmpd="sng" algn="ctr">
+        <a:ln w="38100">
           <a:solidFill>
             <a:schemeClr val="phClr"/>
           </a:solidFill>
@@ -5049,17 +6618,6 @@
               </a:srgbClr>
             </a:outerShdw>
           </a:effectLst>
-          <a:scene3d>
-            <a:camera prst="orthographicFront">
-              <a:rot lat="0" lon="0" rev="0"/>
-            </a:camera>
-            <a:lightRig rig="threePt" dir="t">
-              <a:rot lat="0" lon="0" rev="1200000"/>
-            </a:lightRig>
-          </a:scene3d>
-          <a:sp3d>
-            <a:bevelT w="63500" h="25400"/>
-          </a:sp3d>
         </a:effectStyle>
       </a:effectStyleLst>
       <a:bgFillStyleLst>
@@ -5114,46 +6672,5 @@
       </a:bgFillStyleLst>
     </a:fmtScheme>
   </a:themeElements>
-  <a:objectDefaults>
-    <a:spDef>
-      <a:spPr/>
-      <a:bodyPr/>
-      <a:lstStyle/>
-      <a:style>
-        <a:lnRef idx="1">
-          <a:schemeClr val="accent1"/>
-        </a:lnRef>
-        <a:fillRef idx="3">
-          <a:schemeClr val="accent1"/>
-        </a:fillRef>
-        <a:effectRef idx="2">
-          <a:schemeClr val="accent1"/>
-        </a:effectRef>
-        <a:fontRef idx="minor">
-          <a:schemeClr val="lt1"/>
-        </a:fontRef>
-      </a:style>
-    </a:spDef>
-    <a:lnDef>
-      <a:spPr/>
-      <a:bodyPr/>
-      <a:lstStyle/>
-      <a:style>
-        <a:lnRef idx="2">
-          <a:schemeClr val="accent1"/>
-        </a:lnRef>
-        <a:fillRef idx="0">
-          <a:schemeClr val="accent1"/>
-        </a:fillRef>
-        <a:effectRef idx="1">
-          <a:schemeClr val="accent1"/>
-        </a:effectRef>
-        <a:fontRef idx="minor">
-          <a:schemeClr val="tx1"/>
-        </a:fontRef>
-      </a:style>
-    </a:lnDef>
-  </a:objectDefaults>
-  <a:extraClrSchemeLst/>
 </a:theme>
 </file>